--- a/docs/deck-editable/MeshAI_Deck.pptx
+++ b/docs/deck-editable/MeshAI_Deck.pptx
@@ -16177,8 +16177,8 @@
         </p:nvSpPr>
         <p:spPr>
           <a:xfrm>
-            <a:off x="9753356" y="3154680"/>
-            <a:ext cx="2377440" cy="0"/>
+            <a:off x="9753356" y="3291840"/>
+            <a:ext cx="2468880" cy="0"/>
           </a:xfrm>
           <a:custGeom>
             <a:avLst/>
@@ -16187,12 +16187,12 @@
             <a:cxnLst/>
             <a:rect l="l" t="t" r="r" b="b"/>
             <a:pathLst>
-              <a:path w="2377440" h="0">
+              <a:path w="2468880" h="0">
                 <a:moveTo>
                   <a:pt x="0" y="0"/>
                 </a:moveTo>
                 <a:lnTo>
-                  <a:pt x="2377440" y="0"/>
+                  <a:pt x="2468880" y="0"/>
                 </a:lnTo>
               </a:path>
             </a:pathLst>
@@ -16235,8 +16235,8 @@
         </p:nvSpPr>
         <p:spPr>
           <a:xfrm>
-            <a:off x="9753356" y="3154680"/>
-            <a:ext cx="2058923" cy="1188720"/>
+            <a:off x="9753356" y="3291840"/>
+            <a:ext cx="2138112" cy="1234440"/>
           </a:xfrm>
           <a:custGeom>
             <a:avLst/>
@@ -16245,12 +16245,12 @@
             <a:cxnLst/>
             <a:rect l="l" t="t" r="r" b="b"/>
             <a:pathLst>
-              <a:path w="2058923" h="1188720">
+              <a:path w="2138112" h="1234440">
                 <a:moveTo>
                   <a:pt x="0" y="0"/>
                 </a:moveTo>
                 <a:lnTo>
-                  <a:pt x="2058923" y="1188720"/>
+                  <a:pt x="2138112" y="1234440"/>
                 </a:lnTo>
               </a:path>
             </a:pathLst>
@@ -16293,8 +16293,8 @@
         </p:nvSpPr>
         <p:spPr>
           <a:xfrm>
-            <a:off x="9753356" y="3154680"/>
-            <a:ext cx="1188720" cy="2058923"/>
+            <a:off x="9753356" y="3291840"/>
+            <a:ext cx="1234440" cy="2138112"/>
           </a:xfrm>
           <a:custGeom>
             <a:avLst/>
@@ -16303,12 +16303,12 @@
             <a:cxnLst/>
             <a:rect l="l" t="t" r="r" b="b"/>
             <a:pathLst>
-              <a:path w="1188720" h="2058923">
+              <a:path w="1234440" h="2138112">
                 <a:moveTo>
                   <a:pt x="0" y="0"/>
                 </a:moveTo>
                 <a:lnTo>
-                  <a:pt x="1188720" y="2058923"/>
+                  <a:pt x="1234440" y="2138112"/>
                 </a:lnTo>
               </a:path>
             </a:pathLst>
@@ -16351,8 +16351,8 @@
         </p:nvSpPr>
         <p:spPr>
           <a:xfrm>
-            <a:off x="9753356" y="3154680"/>
-            <a:ext cx="0" cy="2377440"/>
+            <a:off x="9753356" y="3291840"/>
+            <a:ext cx="0" cy="2468880"/>
           </a:xfrm>
           <a:custGeom>
             <a:avLst/>
@@ -16361,12 +16361,12 @@
             <a:cxnLst/>
             <a:rect l="l" t="t" r="r" b="b"/>
             <a:pathLst>
-              <a:path w="0" h="2377440">
+              <a:path w="0" h="2468880">
                 <a:moveTo>
                   <a:pt x="0" y="0"/>
                 </a:moveTo>
                 <a:lnTo>
-                  <a:pt x="0" y="2377440"/>
+                  <a:pt x="0" y="2468880"/>
                 </a:lnTo>
               </a:path>
             </a:pathLst>
@@ -16409,8 +16409,8 @@
         </p:nvSpPr>
         <p:spPr>
           <a:xfrm>
-            <a:off x="8564636" y="3154680"/>
-            <a:ext cx="1188720" cy="2058923"/>
+            <a:off x="8518916" y="3291840"/>
+            <a:ext cx="1234440" cy="2138112"/>
           </a:xfrm>
           <a:custGeom>
             <a:avLst/>
@@ -16419,12 +16419,12 @@
             <a:cxnLst/>
             <a:rect l="l" t="t" r="r" b="b"/>
             <a:pathLst>
-              <a:path w="1188720" h="2058923">
+              <a:path w="1234440" h="2138112">
                 <a:moveTo>
-                  <a:pt x="1188720" y="0"/>
+                  <a:pt x="1234440" y="0"/>
                 </a:moveTo>
                 <a:lnTo>
-                  <a:pt x="0" y="2058923"/>
+                  <a:pt x="0" y="2138112"/>
                 </a:lnTo>
               </a:path>
             </a:pathLst>
@@ -16467,8 +16467,8 @@
         </p:nvSpPr>
         <p:spPr>
           <a:xfrm>
-            <a:off x="7694432" y="3154680"/>
-            <a:ext cx="2058924" cy="1188720"/>
+            <a:off x="7615243" y="3291840"/>
+            <a:ext cx="2138113" cy="1234440"/>
           </a:xfrm>
           <a:custGeom>
             <a:avLst/>
@@ -16477,12 +16477,12 @@
             <a:cxnLst/>
             <a:rect l="l" t="t" r="r" b="b"/>
             <a:pathLst>
-              <a:path w="2058924" h="1188720">
+              <a:path w="2138113" h="1234440">
                 <a:moveTo>
-                  <a:pt x="2058924" y="0"/>
+                  <a:pt x="2138113" y="0"/>
                 </a:moveTo>
                 <a:lnTo>
-                  <a:pt x="0" y="1188720"/>
+                  <a:pt x="0" y="1234440"/>
                 </a:lnTo>
               </a:path>
             </a:pathLst>
@@ -16525,8 +16525,8 @@
         </p:nvSpPr>
         <p:spPr>
           <a:xfrm>
-            <a:off x="7375916" y="3154680"/>
-            <a:ext cx="2377440" cy="0"/>
+            <a:off x="7284476" y="3291840"/>
+            <a:ext cx="2468880" cy="0"/>
           </a:xfrm>
           <a:custGeom>
             <a:avLst/>
@@ -16535,9 +16535,9 @@
             <a:cxnLst/>
             <a:rect l="l" t="t" r="r" b="b"/>
             <a:pathLst>
-              <a:path w="2377440" h="0">
+              <a:path w="2468880" h="0">
                 <a:moveTo>
-                  <a:pt x="2377440" y="0"/>
+                  <a:pt x="2468880" y="0"/>
                 </a:moveTo>
                 <a:lnTo>
                   <a:pt x="0" y="0"/>
@@ -16583,8 +16583,8 @@
         </p:nvSpPr>
         <p:spPr>
           <a:xfrm>
-            <a:off x="7694432" y="1965960"/>
-            <a:ext cx="2058924" cy="1188720"/>
+            <a:off x="7615243" y="2057400"/>
+            <a:ext cx="2138113" cy="1234440"/>
           </a:xfrm>
           <a:custGeom>
             <a:avLst/>
@@ -16593,9 +16593,9 @@
             <a:cxnLst/>
             <a:rect l="l" t="t" r="r" b="b"/>
             <a:pathLst>
-              <a:path w="2058924" h="1188720">
+              <a:path w="2138113" h="1234440">
                 <a:moveTo>
-                  <a:pt x="2058924" y="1188720"/>
+                  <a:pt x="2138113" y="1234440"/>
                 </a:moveTo>
                 <a:lnTo>
                   <a:pt x="0" y="0"/>
@@ -16641,8 +16641,8 @@
         </p:nvSpPr>
         <p:spPr>
           <a:xfrm>
-            <a:off x="8564635" y="1095756"/>
-            <a:ext cx="1188721" cy="2058924"/>
+            <a:off x="8518915" y="1153727"/>
+            <a:ext cx="1234441" cy="2138113"/>
           </a:xfrm>
           <a:custGeom>
             <a:avLst/>
@@ -16651,9 +16651,9 @@
             <a:cxnLst/>
             <a:rect l="l" t="t" r="r" b="b"/>
             <a:pathLst>
-              <a:path w="1188721" h="2058924">
+              <a:path w="1234441" h="2138113">
                 <a:moveTo>
-                  <a:pt x="1188721" y="2058924"/>
+                  <a:pt x="1234441" y="2138113"/>
                 </a:moveTo>
                 <a:lnTo>
                   <a:pt x="0" y="0"/>
@@ -16699,8 +16699,8 @@
         </p:nvSpPr>
         <p:spPr>
           <a:xfrm>
-            <a:off x="9753356" y="777240"/>
-            <a:ext cx="0" cy="2377440"/>
+            <a:off x="9753356" y="822960"/>
+            <a:ext cx="0" cy="2468880"/>
           </a:xfrm>
           <a:custGeom>
             <a:avLst/>
@@ -16709,9 +16709,9 @@
             <a:cxnLst/>
             <a:rect l="l" t="t" r="r" b="b"/>
             <a:pathLst>
-              <a:path w="0" h="2377440">
+              <a:path w="0" h="2468880">
                 <a:moveTo>
-                  <a:pt x="0" y="2377440"/>
+                  <a:pt x="0" y="2468880"/>
                 </a:moveTo>
                 <a:lnTo>
                   <a:pt x="0" y="0"/>
@@ -16757,8 +16757,8 @@
         </p:nvSpPr>
         <p:spPr>
           <a:xfrm>
-            <a:off x="9753356" y="1095756"/>
-            <a:ext cx="1188720" cy="2058924"/>
+            <a:off x="9753356" y="1153727"/>
+            <a:ext cx="1234440" cy="2138113"/>
           </a:xfrm>
           <a:custGeom>
             <a:avLst/>
@@ -16767,12 +16767,12 @@
             <a:cxnLst/>
             <a:rect l="l" t="t" r="r" b="b"/>
             <a:pathLst>
-              <a:path w="1188720" h="2058924">
+              <a:path w="1234440" h="2138113">
                 <a:moveTo>
-                  <a:pt x="0" y="2058924"/>
+                  <a:pt x="0" y="2138113"/>
                 </a:moveTo>
                 <a:lnTo>
-                  <a:pt x="1188720" y="0"/>
+                  <a:pt x="1234440" y="0"/>
                 </a:lnTo>
               </a:path>
             </a:pathLst>
@@ -16815,8 +16815,8 @@
         </p:nvSpPr>
         <p:spPr>
           <a:xfrm>
-            <a:off x="9753356" y="1965959"/>
-            <a:ext cx="2058923" cy="1188721"/>
+            <a:off x="9753356" y="2057399"/>
+            <a:ext cx="2138112" cy="1234441"/>
           </a:xfrm>
           <a:custGeom>
             <a:avLst/>
@@ -16825,12 +16825,12 @@
             <a:cxnLst/>
             <a:rect l="l" t="t" r="r" b="b"/>
             <a:pathLst>
-              <a:path w="2058923" h="1188721">
+              <a:path w="2138112" h="1234441">
                 <a:moveTo>
-                  <a:pt x="0" y="1188721"/>
+                  <a:pt x="0" y="1234441"/>
                 </a:moveTo>
                 <a:lnTo>
-                  <a:pt x="2058923" y="0"/>
+                  <a:pt x="2138112" y="0"/>
                 </a:lnTo>
               </a:path>
             </a:pathLst>
@@ -16873,8 +16873,8 @@
         </p:nvSpPr>
         <p:spPr>
           <a:xfrm>
-            <a:off x="9158996" y="2560320"/>
-            <a:ext cx="1188720" cy="1188720"/>
+            <a:off x="9136136" y="2674620"/>
+            <a:ext cx="1234440" cy="1234440"/>
           </a:xfrm>
           <a:custGeom>
             <a:avLst/>
@@ -16883,45 +16883,45 @@
             <a:cxnLst/>
             <a:rect l="l" t="t" r="r" b="b"/>
             <a:pathLst>
-              <a:path w="1188720" h="1188720">
+              <a:path w="1234440" h="1234440">
                 <a:moveTo>
-                  <a:pt x="1188720" y="594360"/>
+                  <a:pt x="1234440" y="617220"/>
                 </a:moveTo>
                 <a:lnTo>
-                  <a:pt x="1109090" y="891540"/>
-                </a:lnTo>
-                <a:lnTo>
-                  <a:pt x="891540" y="1109090"/>
-                </a:lnTo>
-                <a:lnTo>
-                  <a:pt x="594360" y="1188720"/>
-                </a:lnTo>
-                <a:lnTo>
-                  <a:pt x="297180" y="1109090"/>
-                </a:lnTo>
-                <a:lnTo>
-                  <a:pt x="79629" y="891540"/>
-                </a:lnTo>
-                <a:lnTo>
-                  <a:pt x="0" y="594360"/>
-                </a:lnTo>
-                <a:lnTo>
-                  <a:pt x="79629" y="297180"/>
-                </a:lnTo>
-                <a:lnTo>
-                  <a:pt x="297180" y="79629"/>
-                </a:lnTo>
-                <a:lnTo>
-                  <a:pt x="594360" y="0"/>
-                </a:lnTo>
-                <a:lnTo>
-                  <a:pt x="891540" y="79629"/>
-                </a:lnTo>
-                <a:lnTo>
-                  <a:pt x="1109090" y="297179"/>
-                </a:lnTo>
-                <a:lnTo>
-                  <a:pt x="1188720" y="594360"/>
+                  <a:pt x="1151748" y="925830"/>
+                </a:lnTo>
+                <a:lnTo>
+                  <a:pt x="925830" y="1151748"/>
+                </a:lnTo>
+                <a:lnTo>
+                  <a:pt x="617220" y="1234440"/>
+                </a:lnTo>
+                <a:lnTo>
+                  <a:pt x="308610" y="1151748"/>
+                </a:lnTo>
+                <a:lnTo>
+                  <a:pt x="82691" y="925830"/>
+                </a:lnTo>
+                <a:lnTo>
+                  <a:pt x="0" y="617220"/>
+                </a:lnTo>
+                <a:lnTo>
+                  <a:pt x="82691" y="308610"/>
+                </a:lnTo>
+                <a:lnTo>
+                  <a:pt x="308610" y="82691"/>
+                </a:lnTo>
+                <a:lnTo>
+                  <a:pt x="617220" y="0"/>
+                </a:lnTo>
+                <a:lnTo>
+                  <a:pt x="925830" y="82691"/>
+                </a:lnTo>
+                <a:lnTo>
+                  <a:pt x="1151748" y="308609"/>
+                </a:lnTo>
+                <a:lnTo>
+                  <a:pt x="1234440" y="617220"/>
                 </a:lnTo>
                 <a:close/>
               </a:path>
@@ -16965,8 +16965,8 @@
         </p:nvSpPr>
         <p:spPr>
           <a:xfrm>
-            <a:off x="8564636" y="1965960"/>
-            <a:ext cx="2377440" cy="2377440"/>
+            <a:off x="8518916" y="2057400"/>
+            <a:ext cx="2468880" cy="2468880"/>
           </a:xfrm>
           <a:custGeom>
             <a:avLst/>
@@ -16975,45 +16975,45 @@
             <a:cxnLst/>
             <a:rect l="l" t="t" r="r" b="b"/>
             <a:pathLst>
-              <a:path w="2377440" h="2377440">
+              <a:path w="2468880" h="2468880">
                 <a:moveTo>
-                  <a:pt x="2377440" y="1188720"/>
+                  <a:pt x="2468880" y="1234440"/>
                 </a:moveTo>
                 <a:lnTo>
-                  <a:pt x="2218181" y="1783080"/>
-                </a:lnTo>
-                <a:lnTo>
-                  <a:pt x="1783080" y="2218181"/>
-                </a:lnTo>
-                <a:lnTo>
-                  <a:pt x="1188720" y="2377440"/>
-                </a:lnTo>
-                <a:lnTo>
-                  <a:pt x="594360" y="2218181"/>
-                </a:lnTo>
-                <a:lnTo>
-                  <a:pt x="159258" y="1783080"/>
-                </a:lnTo>
-                <a:lnTo>
-                  <a:pt x="0" y="1188720"/>
-                </a:lnTo>
-                <a:lnTo>
-                  <a:pt x="159258" y="594360"/>
-                </a:lnTo>
-                <a:lnTo>
-                  <a:pt x="594360" y="159258"/>
-                </a:lnTo>
-                <a:lnTo>
-                  <a:pt x="1188720" y="0"/>
-                </a:lnTo>
-                <a:lnTo>
-                  <a:pt x="1783080" y="159258"/>
-                </a:lnTo>
-                <a:lnTo>
-                  <a:pt x="2218181" y="594359"/>
-                </a:lnTo>
-                <a:lnTo>
-                  <a:pt x="2377440" y="1188719"/>
+                  <a:pt x="2303496" y="1851660"/>
+                </a:lnTo>
+                <a:lnTo>
+                  <a:pt x="1851660" y="2303496"/>
+                </a:lnTo>
+                <a:lnTo>
+                  <a:pt x="1234440" y="2468880"/>
+                </a:lnTo>
+                <a:lnTo>
+                  <a:pt x="617220" y="2303496"/>
+                </a:lnTo>
+                <a:lnTo>
+                  <a:pt x="165383" y="1851660"/>
+                </a:lnTo>
+                <a:lnTo>
+                  <a:pt x="0" y="1234440"/>
+                </a:lnTo>
+                <a:lnTo>
+                  <a:pt x="165383" y="617220"/>
+                </a:lnTo>
+                <a:lnTo>
+                  <a:pt x="617220" y="165383"/>
+                </a:lnTo>
+                <a:lnTo>
+                  <a:pt x="1234440" y="0"/>
+                </a:lnTo>
+                <a:lnTo>
+                  <a:pt x="1851660" y="165383"/>
+                </a:lnTo>
+                <a:lnTo>
+                  <a:pt x="2303496" y="617219"/>
+                </a:lnTo>
+                <a:lnTo>
+                  <a:pt x="2468880" y="1234439"/>
                 </a:lnTo>
                 <a:close/>
               </a:path>
@@ -17057,8 +17057,8 @@
         </p:nvSpPr>
         <p:spPr>
           <a:xfrm>
-            <a:off x="7970276" y="1371600"/>
-            <a:ext cx="3566160" cy="3566160"/>
+            <a:off x="7901696" y="1440180"/>
+            <a:ext cx="3703320" cy="3703320"/>
           </a:xfrm>
           <a:custGeom>
             <a:avLst/>
@@ -17067,45 +17067,45 @@
             <a:cxnLst/>
             <a:rect l="l" t="t" r="r" b="b"/>
             <a:pathLst>
-              <a:path w="3566160" h="3566160">
+              <a:path w="3703320" h="3703320">
                 <a:moveTo>
-                  <a:pt x="3566160" y="1783080"/>
+                  <a:pt x="3703320" y="1851660"/>
                 </a:moveTo>
                 <a:lnTo>
-                  <a:pt x="3327272" y="2674620"/>
-                </a:lnTo>
-                <a:lnTo>
-                  <a:pt x="2674620" y="3327272"/>
-                </a:lnTo>
-                <a:lnTo>
-                  <a:pt x="1783080" y="3566160"/>
-                </a:lnTo>
-                <a:lnTo>
-                  <a:pt x="891540" y="3327272"/>
-                </a:lnTo>
-                <a:lnTo>
-                  <a:pt x="238887" y="2674620"/>
-                </a:lnTo>
-                <a:lnTo>
-                  <a:pt x="0" y="1783080"/>
-                </a:lnTo>
-                <a:lnTo>
-                  <a:pt x="238887" y="891540"/>
-                </a:lnTo>
-                <a:lnTo>
-                  <a:pt x="891540" y="238887"/>
-                </a:lnTo>
-                <a:lnTo>
-                  <a:pt x="1783080" y="0"/>
-                </a:lnTo>
-                <a:lnTo>
-                  <a:pt x="2674620" y="238887"/>
-                </a:lnTo>
-                <a:lnTo>
-                  <a:pt x="3327272" y="891539"/>
-                </a:lnTo>
-                <a:lnTo>
-                  <a:pt x="3566160" y="1783079"/>
+                  <a:pt x="3455244" y="2777490"/>
+                </a:lnTo>
+                <a:lnTo>
+                  <a:pt x="2777490" y="3455244"/>
+                </a:lnTo>
+                <a:lnTo>
+                  <a:pt x="1851660" y="3703320"/>
+                </a:lnTo>
+                <a:lnTo>
+                  <a:pt x="925830" y="3455244"/>
+                </a:lnTo>
+                <a:lnTo>
+                  <a:pt x="248075" y="2777490"/>
+                </a:lnTo>
+                <a:lnTo>
+                  <a:pt x="0" y="1851660"/>
+                </a:lnTo>
+                <a:lnTo>
+                  <a:pt x="248075" y="925830"/>
+                </a:lnTo>
+                <a:lnTo>
+                  <a:pt x="925830" y="248075"/>
+                </a:lnTo>
+                <a:lnTo>
+                  <a:pt x="1851660" y="0"/>
+                </a:lnTo>
+                <a:lnTo>
+                  <a:pt x="2777490" y="248075"/>
+                </a:lnTo>
+                <a:lnTo>
+                  <a:pt x="3455244" y="925829"/>
+                </a:lnTo>
+                <a:lnTo>
+                  <a:pt x="3703320" y="1851659"/>
                 </a:lnTo>
                 <a:close/>
               </a:path>
@@ -17149,8 +17149,8 @@
         </p:nvSpPr>
         <p:spPr>
           <a:xfrm>
-            <a:off x="7375916" y="777240"/>
-            <a:ext cx="4754880" cy="4754880"/>
+            <a:off x="7284476" y="822960"/>
+            <a:ext cx="4937760" cy="4937760"/>
           </a:xfrm>
           <a:custGeom>
             <a:avLst/>
@@ -17159,45 +17159,45 @@
             <a:cxnLst/>
             <a:rect l="l" t="t" r="r" b="b"/>
             <a:pathLst>
-              <a:path w="4754880" h="4754880">
+              <a:path w="4937760" h="4937760">
                 <a:moveTo>
-                  <a:pt x="4754880" y="2377440"/>
+                  <a:pt x="4937760" y="2468880"/>
                 </a:moveTo>
                 <a:lnTo>
-                  <a:pt x="4436363" y="3566160"/>
-                </a:lnTo>
-                <a:lnTo>
-                  <a:pt x="3566160" y="4436363"/>
-                </a:lnTo>
-                <a:lnTo>
-                  <a:pt x="2377440" y="4754880"/>
-                </a:lnTo>
-                <a:lnTo>
-                  <a:pt x="1188720" y="4436363"/>
-                </a:lnTo>
-                <a:lnTo>
-                  <a:pt x="318516" y="3566160"/>
-                </a:lnTo>
-                <a:lnTo>
-                  <a:pt x="0" y="2377440"/>
-                </a:lnTo>
-                <a:lnTo>
-                  <a:pt x="318516" y="1188720"/>
-                </a:lnTo>
-                <a:lnTo>
-                  <a:pt x="1188719" y="318516"/>
-                </a:lnTo>
-                <a:lnTo>
-                  <a:pt x="2377440" y="0"/>
-                </a:lnTo>
-                <a:lnTo>
-                  <a:pt x="3566160" y="318516"/>
-                </a:lnTo>
-                <a:lnTo>
-                  <a:pt x="4436363" y="1188719"/>
-                </a:lnTo>
-                <a:lnTo>
-                  <a:pt x="4754880" y="2377439"/>
+                  <a:pt x="4606992" y="3703320"/>
+                </a:lnTo>
+                <a:lnTo>
+                  <a:pt x="3703320" y="4606992"/>
+                </a:lnTo>
+                <a:lnTo>
+                  <a:pt x="2468880" y="4937760"/>
+                </a:lnTo>
+                <a:lnTo>
+                  <a:pt x="1234440" y="4606992"/>
+                </a:lnTo>
+                <a:lnTo>
+                  <a:pt x="330767" y="3703320"/>
+                </a:lnTo>
+                <a:lnTo>
+                  <a:pt x="0" y="2468880"/>
+                </a:lnTo>
+                <a:lnTo>
+                  <a:pt x="330767" y="1234440"/>
+                </a:lnTo>
+                <a:lnTo>
+                  <a:pt x="1234439" y="330767"/>
+                </a:lnTo>
+                <a:lnTo>
+                  <a:pt x="2468880" y="0"/>
+                </a:lnTo>
+                <a:lnTo>
+                  <a:pt x="3703320" y="330767"/>
+                </a:lnTo>
+                <a:lnTo>
+                  <a:pt x="4606992" y="1234439"/>
+                </a:lnTo>
+                <a:lnTo>
+                  <a:pt x="4937760" y="2468879"/>
                 </a:lnTo>
                 <a:close/>
               </a:path>
@@ -17241,8 +17241,8 @@
         </p:nvSpPr>
         <p:spPr>
           <a:xfrm>
-            <a:off x="9240390" y="2691724"/>
-            <a:ext cx="512966" cy="462956"/>
+            <a:off x="9210216" y="2801651"/>
+            <a:ext cx="543140" cy="490189"/>
           </a:xfrm>
           <a:custGeom>
             <a:avLst/>
@@ -17251,15 +17251,15 @@
             <a:cxnLst/>
             <a:rect l="l" t="t" r="r" b="b"/>
             <a:pathLst>
-              <a:path w="512966" h="462956">
+              <a:path w="543140" h="490189">
                 <a:moveTo>
-                  <a:pt x="512966" y="462956"/>
+                  <a:pt x="543140" y="490189"/>
                 </a:moveTo>
                 <a:lnTo>
-                  <a:pt x="205186" y="0"/>
-                </a:lnTo>
-                <a:lnTo>
-                  <a:pt x="0" y="135719"/>
+                  <a:pt x="217256" y="0"/>
+                </a:lnTo>
+                <a:lnTo>
+                  <a:pt x="0" y="143702"/>
                 </a:lnTo>
               </a:path>
             </a:pathLst>
@@ -17302,8 +17302,8 @@
         </p:nvSpPr>
         <p:spPr>
           <a:xfrm>
-            <a:off x="9004274" y="2880030"/>
-            <a:ext cx="749082" cy="274650"/>
+            <a:off x="8960211" y="3001034"/>
+            <a:ext cx="793145" cy="290806"/>
           </a:xfrm>
           <a:custGeom>
             <a:avLst/>
@@ -17312,15 +17312,15 @@
             <a:cxnLst/>
             <a:rect l="l" t="t" r="r" b="b"/>
             <a:pathLst>
-              <a:path w="749082" h="274650">
+              <a:path w="793145" h="290806">
                 <a:moveTo>
-                  <a:pt x="749082" y="274650"/>
+                  <a:pt x="793145" y="290806"/>
                 </a:moveTo>
                 <a:lnTo>
-                  <a:pt x="299633" y="0"/>
-                </a:lnTo>
-                <a:lnTo>
-                  <a:pt x="0" y="248701"/>
+                  <a:pt x="317258" y="0"/>
+                </a:lnTo>
+                <a:lnTo>
+                  <a:pt x="0" y="263331"/>
                 </a:lnTo>
               </a:path>
             </a:pathLst>
@@ -17363,8 +17363,8 @@
         </p:nvSpPr>
         <p:spPr>
           <a:xfrm>
-            <a:off x="9013164" y="3102239"/>
-            <a:ext cx="740192" cy="382027"/>
+            <a:off x="8969623" y="3236314"/>
+            <a:ext cx="783733" cy="404499"/>
           </a:xfrm>
           <a:custGeom>
             <a:avLst/>
@@ -17373,15 +17373,15 @@
             <a:cxnLst/>
             <a:rect l="l" t="t" r="r" b="b"/>
             <a:pathLst>
-              <a:path w="740192" h="382027">
+              <a:path w="783733" h="404499">
                 <a:moveTo>
-                  <a:pt x="740192" y="52441"/>
+                  <a:pt x="783733" y="55526"/>
                 </a:moveTo>
                 <a:lnTo>
-                  <a:pt x="296076" y="0"/>
-                </a:lnTo>
-                <a:lnTo>
-                  <a:pt x="0" y="382027"/>
+                  <a:pt x="313493" y="0"/>
+                </a:lnTo>
+                <a:lnTo>
+                  <a:pt x="0" y="404499"/>
                 </a:lnTo>
               </a:path>
             </a:pathLst>
@@ -17424,8 +17424,8 @@
         </p:nvSpPr>
         <p:spPr>
           <a:xfrm>
-            <a:off x="9264151" y="3154680"/>
-            <a:ext cx="489205" cy="623080"/>
+            <a:off x="9235375" y="3291840"/>
+            <a:ext cx="517981" cy="659731"/>
           </a:xfrm>
           <a:custGeom>
             <a:avLst/>
@@ -17434,15 +17434,15 @@
             <a:cxnLst/>
             <a:rect l="l" t="t" r="r" b="b"/>
             <a:pathLst>
-              <a:path w="489205" h="623080">
+              <a:path w="517981" h="659731">
                 <a:moveTo>
-                  <a:pt x="489205" y="0"/>
+                  <a:pt x="517981" y="0"/>
                 </a:moveTo>
                 <a:lnTo>
-                  <a:pt x="195682" y="130992"/>
-                </a:lnTo>
-                <a:lnTo>
-                  <a:pt x="0" y="623080"/>
+                  <a:pt x="207192" y="138698"/>
+                </a:lnTo>
+                <a:lnTo>
+                  <a:pt x="0" y="659731"/>
                 </a:lnTo>
               </a:path>
             </a:pathLst>
@@ -17485,8 +17485,8 @@
         </p:nvSpPr>
         <p:spPr>
           <a:xfrm>
-            <a:off x="9753356" y="2691724"/>
-            <a:ext cx="512965" cy="462956"/>
+            <a:off x="9753356" y="2801651"/>
+            <a:ext cx="543139" cy="490189"/>
           </a:xfrm>
           <a:custGeom>
             <a:avLst/>
@@ -17495,15 +17495,15 @@
             <a:cxnLst/>
             <a:rect l="l" t="t" r="r" b="b"/>
             <a:pathLst>
-              <a:path w="512965" h="462956">
+              <a:path w="543139" h="490189">
                 <a:moveTo>
-                  <a:pt x="0" y="462956"/>
+                  <a:pt x="0" y="490189"/>
                 </a:moveTo>
                 <a:lnTo>
-                  <a:pt x="307779" y="0"/>
-                </a:lnTo>
-                <a:lnTo>
-                  <a:pt x="512965" y="135719"/>
+                  <a:pt x="325883" y="0"/>
+                </a:lnTo>
+                <a:lnTo>
+                  <a:pt x="543139" y="143702"/>
                 </a:lnTo>
               </a:path>
             </a:pathLst>
@@ -17546,8 +17546,8 @@
         </p:nvSpPr>
         <p:spPr>
           <a:xfrm>
-            <a:off x="9753356" y="2880030"/>
-            <a:ext cx="749081" cy="274650"/>
+            <a:off x="9753356" y="3001034"/>
+            <a:ext cx="793144" cy="290806"/>
           </a:xfrm>
           <a:custGeom>
             <a:avLst/>
@@ -17556,15 +17556,15 @@
             <a:cxnLst/>
             <a:rect l="l" t="t" r="r" b="b"/>
             <a:pathLst>
-              <a:path w="749081" h="274650">
+              <a:path w="793144" h="290806">
                 <a:moveTo>
-                  <a:pt x="0" y="274650"/>
+                  <a:pt x="0" y="290806"/>
                 </a:moveTo>
                 <a:lnTo>
-                  <a:pt x="449448" y="0"/>
-                </a:lnTo>
-                <a:lnTo>
-                  <a:pt x="749081" y="248701"/>
+                  <a:pt x="475886" y="0"/>
+                </a:lnTo>
+                <a:lnTo>
+                  <a:pt x="793144" y="263331"/>
                 </a:lnTo>
               </a:path>
             </a:pathLst>
@@ -17607,8 +17607,8 @@
         </p:nvSpPr>
         <p:spPr>
           <a:xfrm>
-            <a:off x="9753356" y="3102239"/>
-            <a:ext cx="740191" cy="382027"/>
+            <a:off x="9753356" y="3236314"/>
+            <a:ext cx="783732" cy="404499"/>
           </a:xfrm>
           <a:custGeom>
             <a:avLst/>
@@ -17617,15 +17617,15 @@
             <a:cxnLst/>
             <a:rect l="l" t="t" r="r" b="b"/>
             <a:pathLst>
-              <a:path w="740191" h="382027">
+              <a:path w="783732" h="404499">
                 <a:moveTo>
-                  <a:pt x="0" y="52441"/>
+                  <a:pt x="0" y="55526"/>
                 </a:moveTo>
                 <a:lnTo>
-                  <a:pt x="444115" y="0"/>
-                </a:lnTo>
-                <a:lnTo>
-                  <a:pt x="740191" y="382027"/>
+                  <a:pt x="470239" y="0"/>
+                </a:lnTo>
+                <a:lnTo>
+                  <a:pt x="783732" y="404499"/>
                 </a:lnTo>
               </a:path>
             </a:pathLst>
@@ -17668,8 +17668,8 @@
         </p:nvSpPr>
         <p:spPr>
           <a:xfrm>
-            <a:off x="9753356" y="3154680"/>
-            <a:ext cx="489204" cy="623080"/>
+            <a:off x="9753356" y="3291840"/>
+            <a:ext cx="517980" cy="659731"/>
           </a:xfrm>
           <a:custGeom>
             <a:avLst/>
@@ -17678,15 +17678,15 @@
             <a:cxnLst/>
             <a:rect l="l" t="t" r="r" b="b"/>
             <a:pathLst>
-              <a:path w="489204" h="623080">
+              <a:path w="517980" h="659731">
                 <a:moveTo>
                   <a:pt x="0" y="0"/>
                 </a:moveTo>
                 <a:lnTo>
-                  <a:pt x="293522" y="130992"/>
-                </a:lnTo>
-                <a:lnTo>
-                  <a:pt x="489204" y="623080"/>
+                  <a:pt x="310788" y="138698"/>
+                </a:lnTo>
+                <a:lnTo>
+                  <a:pt x="517980" y="659731"/>
                 </a:lnTo>
               </a:path>
             </a:pathLst>
@@ -17729,8 +17729,8 @@
         </p:nvSpPr>
         <p:spPr>
           <a:xfrm>
-            <a:off x="9489094" y="3014776"/>
-            <a:ext cx="528523" cy="528523"/>
+            <a:off x="9473549" y="3143707"/>
+            <a:ext cx="559612" cy="559612"/>
           </a:xfrm>
           <a:prstGeom prst="ellipse">
             <a:avLst/>
@@ -17773,8 +17773,8 @@
         </p:nvSpPr>
         <p:spPr>
           <a:xfrm>
-            <a:off x="9591690" y="2759842"/>
-            <a:ext cx="323331" cy="323331"/>
+            <a:off x="9582180" y="2873776"/>
+            <a:ext cx="342351" cy="342351"/>
           </a:xfrm>
           <a:prstGeom prst="ellipse">
             <a:avLst/>
@@ -17817,8 +17817,8 @@
         </p:nvSpPr>
         <p:spPr>
           <a:xfrm>
-            <a:off x="566928" y="2011680"/>
-            <a:ext cx="9144000" cy="914400"/>
+            <a:off x="566928" y="2148840"/>
+            <a:ext cx="7863840" cy="1005840"/>
           </a:xfrm>
           <a:prstGeom prst="rect">
             <a:avLst/>
@@ -17837,7 +17837,7 @@
               </a:spcAft>
             </a:pPr>
             <a:r>
-              <a:rPr sz="5200" b="1">
+              <a:rPr sz="5800" b="1">
                 <a:solidFill>
                   <a:srgbClr val="F0EFE9"/>
                 </a:solidFill>
@@ -17856,8 +17856,8 @@
         </p:nvSpPr>
         <p:spPr>
           <a:xfrm>
-            <a:off x="566928" y="3108960"/>
-            <a:ext cx="8778240" cy="914400"/>
+            <a:off x="566928" y="3337560"/>
+            <a:ext cx="7498079" cy="914400"/>
           </a:xfrm>
           <a:prstGeom prst="rect">
             <a:avLst/>
@@ -17872,20 +17872,21 @@
           <a:p>
             <a:pPr algn="l">
               <a:lnSpc>
-                <a:spcPct val="130000"/>
+                <a:spcPct val="135000"/>
               </a:lnSpc>
               <a:spcAft>
                 <a:spcPts val="600"/>
               </a:spcAft>
             </a:pPr>
             <a:r>
-              <a:rPr sz="2100" b="0">
+              <a:rPr sz="2400" b="0">
                 <a:solidFill>
                   <a:srgbClr val="C2C6BC"/>
                 </a:solidFill>
                 <a:latin typeface="Segoe UI"/>
               </a:rPr>
-              <a:t>A big model, on the devices you already own, with the internet switched off.</a:t>
+              <a:t>A big model, on the devices you already own,
+with the internet switched off.</a:t>
             </a:r>
           </a:p>
         </p:txBody>
@@ -17898,8 +17899,8 @@
         </p:nvSpPr>
         <p:spPr>
           <a:xfrm>
-            <a:off x="566928" y="4297680"/>
-            <a:ext cx="4754880" cy="365760"/>
+            <a:off x="566928" y="4800600"/>
+            <a:ext cx="7863840" cy="365760"/>
           </a:xfrm>
           <a:prstGeom prst="rect">
             <a:avLst/>
@@ -17924,7 +17925,7 @@
                 </a:solidFill>
                 <a:latin typeface="Segoe UI"/>
               </a:rPr>
-              <a:t>Prajwal Gunnala</a:t>
+              <a:t>Prajwal Gunnala   ·   Yuva Raj Ambati</a:t>
             </a:r>
           </a:p>
         </p:txBody>
@@ -17937,8 +17938,8 @@
         </p:nvSpPr>
         <p:spPr>
           <a:xfrm>
-            <a:off x="566928" y="4663440"/>
-            <a:ext cx="4754880" cy="274320"/>
+            <a:off x="566928" y="5257800"/>
+            <a:ext cx="7863840" cy="320040"/>
           </a:xfrm>
           <a:prstGeom prst="rect">
             <a:avLst/>
@@ -17957,9 +17958,9 @@
               </a:spcAft>
             </a:pPr>
             <a:r>
-              <a:rPr sz="1300" b="0">
+              <a:rPr sz="1500" b="0">
                 <a:solidFill>
-                  <a:srgbClr val="969C90"/>
+                  <a:srgbClr val="5FD68A"/>
                 </a:solidFill>
                 <a:latin typeface="Consolas"/>
               </a:rPr>
@@ -17971,432 +17972,6 @@
       <p:sp>
         <p:nvSpPr>
           <p:cNvPr id="33" name="TextBox 32"/>
-          <p:cNvSpPr txBox="1"/>
-          <p:nvPr/>
-        </p:nvSpPr>
-        <p:spPr>
-          <a:xfrm>
-            <a:off x="5687568" y="4297680"/>
-            <a:ext cx="4754880" cy="365760"/>
-          </a:xfrm>
-          <a:prstGeom prst="rect">
-            <a:avLst/>
-          </a:prstGeom>
-          <a:noFill/>
-        </p:spPr>
-        <p:txBody>
-          <a:bodyPr wrap="square" anchor="t" lIns="0" rIns="0" tIns="0" bIns="0">
-            <a:spAutoFit/>
-          </a:bodyPr>
-          <a:lstStyle/>
-          <a:p>
-            <a:pPr algn="l">
-              <a:spcAft>
-                <a:spcPts val="600"/>
-              </a:spcAft>
-            </a:pPr>
-            <a:r>
-              <a:rPr sz="2000" b="1">
-                <a:solidFill>
-                  <a:srgbClr val="F0EFE9"/>
-                </a:solidFill>
-                <a:latin typeface="Segoe UI"/>
-              </a:rPr>
-              <a:t>Yuva Raj Ambati</a:t>
-            </a:r>
-          </a:p>
-        </p:txBody>
-      </p:sp>
-      <p:sp>
-        <p:nvSpPr>
-          <p:cNvPr id="34" name="TextBox 33"/>
-          <p:cNvSpPr txBox="1"/>
-          <p:nvPr/>
-        </p:nvSpPr>
-        <p:spPr>
-          <a:xfrm>
-            <a:off x="5687568" y="4663440"/>
-            <a:ext cx="4754880" cy="274320"/>
-          </a:xfrm>
-          <a:prstGeom prst="rect">
-            <a:avLst/>
-          </a:prstGeom>
-          <a:noFill/>
-        </p:spPr>
-        <p:txBody>
-          <a:bodyPr wrap="square" anchor="t" lIns="0" rIns="0" tIns="0" bIns="0">
-            <a:spAutoFit/>
-          </a:bodyPr>
-          <a:lstStyle/>
-          <a:p>
-            <a:pPr algn="l">
-              <a:spcAft>
-                <a:spcPts val="600"/>
-              </a:spcAft>
-            </a:pPr>
-            <a:r>
-              <a:rPr sz="1300" b="0">
-                <a:solidFill>
-                  <a:srgbClr val="969C90"/>
-                </a:solidFill>
-                <a:latin typeface="Consolas"/>
-              </a:rPr>
-              <a:t>every number here is in that repository</a:t>
-            </a:r>
-          </a:p>
-        </p:txBody>
-      </p:sp>
-      <p:sp>
-        <p:nvSpPr>
-          <p:cNvPr id="35" name="Rounded Rectangle 34"/>
-          <p:cNvSpPr/>
-          <p:nvPr/>
-        </p:nvSpPr>
-        <p:spPr>
-          <a:xfrm>
-            <a:off x="566928" y="5394960"/>
-            <a:ext cx="2624328" cy="457200"/>
-          </a:xfrm>
-          <a:prstGeom prst="roundRect">
-            <a:avLst>
-              <a:gd name="adj" fmla="val 4000"/>
-            </a:avLst>
-          </a:prstGeom>
-          <a:solidFill>
-            <a:srgbClr val="142E20"/>
-          </a:solidFill>
-          <a:ln w="9525">
-            <a:solidFill>
-              <a:srgbClr val="5FD68A"/>
-            </a:solidFill>
-          </a:ln>
-          <a:effectLst/>
-        </p:spPr>
-        <p:style>
-          <a:lnRef idx="1">
-            <a:schemeClr val="accent1"/>
-          </a:lnRef>
-          <a:fillRef idx="3">
-            <a:schemeClr val="accent1"/>
-          </a:fillRef>
-          <a:effectRef idx="2">
-            <a:schemeClr val="accent1"/>
-          </a:effectRef>
-          <a:fontRef idx="minor">
-            <a:schemeClr val="lt1"/>
-          </a:fontRef>
-        </p:style>
-        <p:txBody>
-          <a:bodyPr rtlCol="0" anchor="ctr"/>
-          <a:lstStyle/>
-          <a:p>
-            <a:pPr algn="ctr"/>
-          </a:p>
-        </p:txBody>
-      </p:sp>
-      <p:sp>
-        <p:nvSpPr>
-          <p:cNvPr id="36" name="TextBox 35"/>
-          <p:cNvSpPr txBox="1"/>
-          <p:nvPr/>
-        </p:nvSpPr>
-        <p:spPr>
-          <a:xfrm>
-            <a:off x="566928" y="5513832"/>
-            <a:ext cx="2624328" cy="274320"/>
-          </a:xfrm>
-          <a:prstGeom prst="rect">
-            <a:avLst/>
-          </a:prstGeom>
-          <a:noFill/>
-        </p:spPr>
-        <p:txBody>
-          <a:bodyPr wrap="square" anchor="t" lIns="0" rIns="0" tIns="0" bIns="0">
-            <a:spAutoFit/>
-          </a:bodyPr>
-          <a:lstStyle/>
-          <a:p>
-            <a:pPr algn="ctr">
-              <a:spcAft>
-                <a:spcPts val="600"/>
-              </a:spcAft>
-            </a:pPr>
-            <a:r>
-              <a:rPr sz="1200" b="0">
-                <a:solidFill>
-                  <a:srgbClr val="5FD68A"/>
-                </a:solidFill>
-                <a:latin typeface="Consolas"/>
-              </a:rPr>
-              <a:t>30B across three devices</a:t>
-            </a:r>
-          </a:p>
-        </p:txBody>
-      </p:sp>
-      <p:sp>
-        <p:nvSpPr>
-          <p:cNvPr id="37" name="Rounded Rectangle 36"/>
-          <p:cNvSpPr/>
-          <p:nvPr/>
-        </p:nvSpPr>
-        <p:spPr>
-          <a:xfrm>
-            <a:off x="3378708" y="5394960"/>
-            <a:ext cx="2624328" cy="457200"/>
-          </a:xfrm>
-          <a:prstGeom prst="roundRect">
-            <a:avLst>
-              <a:gd name="adj" fmla="val 4000"/>
-            </a:avLst>
-          </a:prstGeom>
-          <a:solidFill>
-            <a:srgbClr val="142E20"/>
-          </a:solidFill>
-          <a:ln w="9525">
-            <a:solidFill>
-              <a:srgbClr val="5FD68A"/>
-            </a:solidFill>
-          </a:ln>
-          <a:effectLst/>
-        </p:spPr>
-        <p:style>
-          <a:lnRef idx="1">
-            <a:schemeClr val="accent1"/>
-          </a:lnRef>
-          <a:fillRef idx="3">
-            <a:schemeClr val="accent1"/>
-          </a:fillRef>
-          <a:effectRef idx="2">
-            <a:schemeClr val="accent1"/>
-          </a:effectRef>
-          <a:fontRef idx="minor">
-            <a:schemeClr val="lt1"/>
-          </a:fontRef>
-        </p:style>
-        <p:txBody>
-          <a:bodyPr rtlCol="0" anchor="ctr"/>
-          <a:lstStyle/>
-          <a:p>
-            <a:pPr algn="ctr"/>
-          </a:p>
-        </p:txBody>
-      </p:sp>
-      <p:sp>
-        <p:nvSpPr>
-          <p:cNvPr id="38" name="TextBox 37"/>
-          <p:cNvSpPr txBox="1"/>
-          <p:nvPr/>
-        </p:nvSpPr>
-        <p:spPr>
-          <a:xfrm>
-            <a:off x="3378708" y="5513832"/>
-            <a:ext cx="2624328" cy="274320"/>
-          </a:xfrm>
-          <a:prstGeom prst="rect">
-            <a:avLst/>
-          </a:prstGeom>
-          <a:noFill/>
-        </p:spPr>
-        <p:txBody>
-          <a:bodyPr wrap="square" anchor="t" lIns="0" rIns="0" tIns="0" bIns="0">
-            <a:spAutoFit/>
-          </a:bodyPr>
-          <a:lstStyle/>
-          <a:p>
-            <a:pPr algn="ctr">
-              <a:spcAft>
-                <a:spcPts val="600"/>
-              </a:spcAft>
-            </a:pPr>
-            <a:r>
-              <a:rPr sz="1200" b="0">
-                <a:solidFill>
-                  <a:srgbClr val="5FD68A"/>
-                </a:solidFill>
-                <a:latin typeface="Consolas"/>
-              </a:rPr>
-              <a:t>ready in 70 s</a:t>
-            </a:r>
-          </a:p>
-        </p:txBody>
-      </p:sp>
-      <p:sp>
-        <p:nvSpPr>
-          <p:cNvPr id="39" name="Rounded Rectangle 38"/>
-          <p:cNvSpPr/>
-          <p:nvPr/>
-        </p:nvSpPr>
-        <p:spPr>
-          <a:xfrm>
-            <a:off x="6190488" y="5394960"/>
-            <a:ext cx="2624328" cy="457200"/>
-          </a:xfrm>
-          <a:prstGeom prst="roundRect">
-            <a:avLst>
-              <a:gd name="adj" fmla="val 4000"/>
-            </a:avLst>
-          </a:prstGeom>
-          <a:solidFill>
-            <a:srgbClr val="142E20"/>
-          </a:solidFill>
-          <a:ln w="9525">
-            <a:solidFill>
-              <a:srgbClr val="5FD68A"/>
-            </a:solidFill>
-          </a:ln>
-          <a:effectLst/>
-        </p:spPr>
-        <p:style>
-          <a:lnRef idx="1">
-            <a:schemeClr val="accent1"/>
-          </a:lnRef>
-          <a:fillRef idx="3">
-            <a:schemeClr val="accent1"/>
-          </a:fillRef>
-          <a:effectRef idx="2">
-            <a:schemeClr val="accent1"/>
-          </a:effectRef>
-          <a:fontRef idx="minor">
-            <a:schemeClr val="lt1"/>
-          </a:fontRef>
-        </p:style>
-        <p:txBody>
-          <a:bodyPr rtlCol="0" anchor="ctr"/>
-          <a:lstStyle/>
-          <a:p>
-            <a:pPr algn="ctr"/>
-          </a:p>
-        </p:txBody>
-      </p:sp>
-      <p:sp>
-        <p:nvSpPr>
-          <p:cNvPr id="40" name="TextBox 39"/>
-          <p:cNvSpPr txBox="1"/>
-          <p:nvPr/>
-        </p:nvSpPr>
-        <p:spPr>
-          <a:xfrm>
-            <a:off x="6190488" y="5513832"/>
-            <a:ext cx="2624328" cy="274320"/>
-          </a:xfrm>
-          <a:prstGeom prst="rect">
-            <a:avLst/>
-          </a:prstGeom>
-          <a:noFill/>
-        </p:spPr>
-        <p:txBody>
-          <a:bodyPr wrap="square" anchor="t" lIns="0" rIns="0" tIns="0" bIns="0">
-            <a:spAutoFit/>
-          </a:bodyPr>
-          <a:lstStyle/>
-          <a:p>
-            <a:pPr algn="ctr">
-              <a:spcAft>
-                <a:spcPts val="600"/>
-              </a:spcAft>
-            </a:pPr>
-            <a:r>
-              <a:rPr sz="1200" b="0">
-                <a:solidFill>
-                  <a:srgbClr val="5FD68A"/>
-                </a:solidFill>
-                <a:latin typeface="Consolas"/>
-              </a:rPr>
-              <a:t>6.6 words a second</a:t>
-            </a:r>
-          </a:p>
-        </p:txBody>
-      </p:sp>
-      <p:sp>
-        <p:nvSpPr>
-          <p:cNvPr id="41" name="Rounded Rectangle 40"/>
-          <p:cNvSpPr/>
-          <p:nvPr/>
-        </p:nvSpPr>
-        <p:spPr>
-          <a:xfrm>
-            <a:off x="9002268" y="5394960"/>
-            <a:ext cx="2624328" cy="457200"/>
-          </a:xfrm>
-          <a:prstGeom prst="roundRect">
-            <a:avLst>
-              <a:gd name="adj" fmla="val 4000"/>
-            </a:avLst>
-          </a:prstGeom>
-          <a:solidFill>
-            <a:srgbClr val="142E20"/>
-          </a:solidFill>
-          <a:ln w="9525">
-            <a:solidFill>
-              <a:srgbClr val="5FD68A"/>
-            </a:solidFill>
-          </a:ln>
-          <a:effectLst/>
-        </p:spPr>
-        <p:style>
-          <a:lnRef idx="1">
-            <a:schemeClr val="accent1"/>
-          </a:lnRef>
-          <a:fillRef idx="3">
-            <a:schemeClr val="accent1"/>
-          </a:fillRef>
-          <a:effectRef idx="2">
-            <a:schemeClr val="accent1"/>
-          </a:effectRef>
-          <a:fontRef idx="minor">
-            <a:schemeClr val="lt1"/>
-          </a:fontRef>
-        </p:style>
-        <p:txBody>
-          <a:bodyPr rtlCol="0" anchor="ctr"/>
-          <a:lstStyle/>
-          <a:p>
-            <a:pPr algn="ctr"/>
-          </a:p>
-        </p:txBody>
-      </p:sp>
-      <p:sp>
-        <p:nvSpPr>
-          <p:cNvPr id="42" name="TextBox 41"/>
-          <p:cNvSpPr txBox="1"/>
-          <p:nvPr/>
-        </p:nvSpPr>
-        <p:spPr>
-          <a:xfrm>
-            <a:off x="9002268" y="5513832"/>
-            <a:ext cx="2624328" cy="274320"/>
-          </a:xfrm>
-          <a:prstGeom prst="rect">
-            <a:avLst/>
-          </a:prstGeom>
-          <a:noFill/>
-        </p:spPr>
-        <p:txBody>
-          <a:bodyPr wrap="square" anchor="t" lIns="0" rIns="0" tIns="0" bIns="0">
-            <a:spAutoFit/>
-          </a:bodyPr>
-          <a:lstStyle/>
-          <a:p>
-            <a:pPr algn="ctr">
-              <a:spcAft>
-                <a:spcPts val="600"/>
-              </a:spcAft>
-            </a:pPr>
-            <a:r>
-              <a:rPr sz="1200" b="0">
-                <a:solidFill>
-                  <a:srgbClr val="5FD68A"/>
-                </a:solidFill>
-                <a:latin typeface="Consolas"/>
-              </a:rPr>
-              <a:t>internet off</a:t>
-            </a:r>
-          </a:p>
-        </p:txBody>
-      </p:sp>
-      <p:sp>
-        <p:nvSpPr>
-          <p:cNvPr id="43" name="TextBox 42"/>
           <p:cNvSpPr txBox="1"/>
           <p:nvPr/>
         </p:nvSpPr>
@@ -18435,7 +18010,7 @@
       </p:sp>
       <p:sp>
         <p:nvSpPr>
-          <p:cNvPr id="44" name="TextBox 43"/>
+          <p:cNvPr id="34" name="TextBox 33"/>
           <p:cNvSpPr txBox="1"/>
           <p:nvPr/>
         </p:nvSpPr>

--- a/docs/deck-editable/MeshAI_Deck.pptx
+++ b/docs/deck-editable/MeshAI_Deck.pptx
@@ -24224,7 +24224,7 @@
                 </a:solidFill>
                 <a:latin typeface="Segoe UI"/>
               </a:rPr>
-              <a:t>Layers 0–22 · 9.19 GB</a:t>
+              <a:t>Layers 0–19 · 8.3 GB in use</a:t>
             </a:r>
           </a:p>
         </p:txBody>
@@ -25151,145 +25151,7 @@
       </p:sp>
       <p:sp>
         <p:nvSpPr>
-          <p:cNvPr id="41" name="Rounded Rectangle 40"/>
-          <p:cNvSpPr/>
-          <p:nvPr/>
-        </p:nvSpPr>
-        <p:spPr>
-          <a:xfrm>
-            <a:off x="3950192" y="3154680"/>
-            <a:ext cx="128016" cy="384048"/>
-          </a:xfrm>
-          <a:prstGeom prst="roundRect">
-            <a:avLst>
-              <a:gd name="adj" fmla="val 18000"/>
-            </a:avLst>
-          </a:prstGeom>
-          <a:solidFill>
-            <a:srgbClr val="5FD68A"/>
-          </a:solidFill>
-          <a:ln>
-            <a:noFill/>
-          </a:ln>
-          <a:effectLst/>
-        </p:spPr>
-        <p:style>
-          <a:lnRef idx="1">
-            <a:schemeClr val="accent1"/>
-          </a:lnRef>
-          <a:fillRef idx="3">
-            <a:schemeClr val="accent1"/>
-          </a:fillRef>
-          <a:effectRef idx="2">
-            <a:schemeClr val="accent1"/>
-          </a:effectRef>
-          <a:fontRef idx="minor">
-            <a:schemeClr val="lt1"/>
-          </a:fontRef>
-        </p:style>
-        <p:txBody>
-          <a:bodyPr rtlCol="0" anchor="ctr"/>
-          <a:lstStyle/>
-          <a:p>
-            <a:pPr algn="ctr"/>
-          </a:p>
-        </p:txBody>
-      </p:sp>
-      <p:sp>
-        <p:nvSpPr>
-          <p:cNvPr id="42" name="Rounded Rectangle 41"/>
-          <p:cNvSpPr/>
-          <p:nvPr/>
-        </p:nvSpPr>
-        <p:spPr>
-          <a:xfrm>
-            <a:off x="4107468" y="3154680"/>
-            <a:ext cx="128016" cy="384048"/>
-          </a:xfrm>
-          <a:prstGeom prst="roundRect">
-            <a:avLst>
-              <a:gd name="adj" fmla="val 18000"/>
-            </a:avLst>
-          </a:prstGeom>
-          <a:solidFill>
-            <a:srgbClr val="5FD68A"/>
-          </a:solidFill>
-          <a:ln>
-            <a:noFill/>
-          </a:ln>
-          <a:effectLst/>
-        </p:spPr>
-        <p:style>
-          <a:lnRef idx="1">
-            <a:schemeClr val="accent1"/>
-          </a:lnRef>
-          <a:fillRef idx="3">
-            <a:schemeClr val="accent1"/>
-          </a:fillRef>
-          <a:effectRef idx="2">
-            <a:schemeClr val="accent1"/>
-          </a:effectRef>
-          <a:fontRef idx="minor">
-            <a:schemeClr val="lt1"/>
-          </a:fontRef>
-        </p:style>
-        <p:txBody>
-          <a:bodyPr rtlCol="0" anchor="ctr"/>
-          <a:lstStyle/>
-          <a:p>
-            <a:pPr algn="ctr"/>
-          </a:p>
-        </p:txBody>
-      </p:sp>
-      <p:sp>
-        <p:nvSpPr>
-          <p:cNvPr id="43" name="Rounded Rectangle 42"/>
-          <p:cNvSpPr/>
-          <p:nvPr/>
-        </p:nvSpPr>
-        <p:spPr>
-          <a:xfrm>
-            <a:off x="4264744" y="3154680"/>
-            <a:ext cx="128016" cy="384048"/>
-          </a:xfrm>
-          <a:prstGeom prst="roundRect">
-            <a:avLst>
-              <a:gd name="adj" fmla="val 18000"/>
-            </a:avLst>
-          </a:prstGeom>
-          <a:solidFill>
-            <a:srgbClr val="5FD68A"/>
-          </a:solidFill>
-          <a:ln>
-            <a:noFill/>
-          </a:ln>
-          <a:effectLst/>
-        </p:spPr>
-        <p:style>
-          <a:lnRef idx="1">
-            <a:schemeClr val="accent1"/>
-          </a:lnRef>
-          <a:fillRef idx="3">
-            <a:schemeClr val="accent1"/>
-          </a:fillRef>
-          <a:effectRef idx="2">
-            <a:schemeClr val="accent1"/>
-          </a:effectRef>
-          <a:fontRef idx="minor">
-            <a:schemeClr val="lt1"/>
-          </a:fontRef>
-        </p:style>
-        <p:txBody>
-          <a:bodyPr rtlCol="0" anchor="ctr"/>
-          <a:lstStyle/>
-          <a:p>
-            <a:pPr algn="ctr"/>
-          </a:p>
-        </p:txBody>
-      </p:sp>
-      <p:sp>
-        <p:nvSpPr>
-          <p:cNvPr id="44" name="TextBox 43"/>
+          <p:cNvPr id="41" name="TextBox 40"/>
           <p:cNvSpPr txBox="1"/>
           <p:nvPr/>
         </p:nvSpPr>
@@ -25331,7 +25193,7 @@
       </p:sp>
       <p:sp>
         <p:nvSpPr>
-          <p:cNvPr id="45" name="Rounded Rectangle 44"/>
+          <p:cNvPr id="42" name="Rounded Rectangle 41"/>
           <p:cNvSpPr/>
           <p:nvPr/>
         </p:nvSpPr>
@@ -25379,7 +25241,7 @@
       </p:sp>
       <p:sp>
         <p:nvSpPr>
-          <p:cNvPr id="46" name="TextBox 45"/>
+          <p:cNvPr id="43" name="TextBox 42"/>
           <p:cNvSpPr txBox="1"/>
           <p:nvPr/>
         </p:nvSpPr>
@@ -25418,7 +25280,7 @@
       </p:sp>
       <p:sp>
         <p:nvSpPr>
-          <p:cNvPr id="47" name="TextBox 46"/>
+          <p:cNvPr id="44" name="TextBox 43"/>
           <p:cNvSpPr txBox="1"/>
           <p:nvPr/>
         </p:nvSpPr>
@@ -25450,14 +25312,14 @@
                 </a:solidFill>
                 <a:latin typeface="Segoe UI"/>
               </a:rPr>
-              <a:t>Layers 23–42</a:t>
+              <a:t>Layers 20–33</a:t>
             </a:r>
           </a:p>
         </p:txBody>
       </p:sp>
       <p:sp>
         <p:nvSpPr>
-          <p:cNvPr id="48" name="TextBox 47"/>
+          <p:cNvPr id="45" name="TextBox 44"/>
           <p:cNvSpPr txBox="1"/>
           <p:nvPr/>
         </p:nvSpPr>
@@ -25489,14 +25351,14 @@
                 </a:solidFill>
                 <a:latin typeface="Consolas"/>
               </a:rPr>
-              <a:t>7.53 GB</a:t>
+              <a:t>5.7 GB in use</a:t>
             </a:r>
           </a:p>
         </p:txBody>
       </p:sp>
       <p:sp>
         <p:nvSpPr>
-          <p:cNvPr id="49" name="Rounded Rectangle 48"/>
+          <p:cNvPr id="46" name="Rounded Rectangle 45"/>
           <p:cNvSpPr/>
           <p:nvPr/>
         </p:nvSpPr>
@@ -25542,7 +25404,7 @@
       </p:sp>
       <p:sp>
         <p:nvSpPr>
-          <p:cNvPr id="50" name="Rounded Rectangle 49"/>
+          <p:cNvPr id="47" name="Rounded Rectangle 46"/>
           <p:cNvSpPr/>
           <p:nvPr/>
         </p:nvSpPr>
@@ -25588,7 +25450,7 @@
       </p:sp>
       <p:sp>
         <p:nvSpPr>
-          <p:cNvPr id="51" name="Rounded Rectangle 50"/>
+          <p:cNvPr id="48" name="Rounded Rectangle 47"/>
           <p:cNvSpPr/>
           <p:nvPr/>
         </p:nvSpPr>
@@ -25634,7 +25496,7 @@
       </p:sp>
       <p:sp>
         <p:nvSpPr>
-          <p:cNvPr id="52" name="Rounded Rectangle 51"/>
+          <p:cNvPr id="49" name="Rounded Rectangle 48"/>
           <p:cNvSpPr/>
           <p:nvPr/>
         </p:nvSpPr>
@@ -25680,7 +25542,7 @@
       </p:sp>
       <p:sp>
         <p:nvSpPr>
-          <p:cNvPr id="53" name="Rounded Rectangle 52"/>
+          <p:cNvPr id="50" name="Rounded Rectangle 49"/>
           <p:cNvSpPr/>
           <p:nvPr/>
         </p:nvSpPr>
@@ -25726,7 +25588,7 @@
       </p:sp>
       <p:sp>
         <p:nvSpPr>
-          <p:cNvPr id="54" name="Rounded Rectangle 53"/>
+          <p:cNvPr id="51" name="Rounded Rectangle 50"/>
           <p:cNvSpPr/>
           <p:nvPr/>
         </p:nvSpPr>
@@ -25772,7 +25634,7 @@
       </p:sp>
       <p:sp>
         <p:nvSpPr>
-          <p:cNvPr id="55" name="Rounded Rectangle 54"/>
+          <p:cNvPr id="52" name="Rounded Rectangle 51"/>
           <p:cNvSpPr/>
           <p:nvPr/>
         </p:nvSpPr>
@@ -25818,7 +25680,7 @@
       </p:sp>
       <p:sp>
         <p:nvSpPr>
-          <p:cNvPr id="56" name="Rounded Rectangle 55"/>
+          <p:cNvPr id="53" name="Rounded Rectangle 52"/>
           <p:cNvSpPr/>
           <p:nvPr/>
         </p:nvSpPr>
@@ -25864,7 +25726,7 @@
       </p:sp>
       <p:sp>
         <p:nvSpPr>
-          <p:cNvPr id="57" name="Rounded Rectangle 56"/>
+          <p:cNvPr id="54" name="Rounded Rectangle 53"/>
           <p:cNvSpPr/>
           <p:nvPr/>
         </p:nvSpPr>
@@ -25910,7 +25772,7 @@
       </p:sp>
       <p:sp>
         <p:nvSpPr>
-          <p:cNvPr id="58" name="Rounded Rectangle 57"/>
+          <p:cNvPr id="55" name="Rounded Rectangle 54"/>
           <p:cNvSpPr/>
           <p:nvPr/>
         </p:nvSpPr>
@@ -25956,7 +25818,7 @@
       </p:sp>
       <p:sp>
         <p:nvSpPr>
-          <p:cNvPr id="59" name="Rounded Rectangle 58"/>
+          <p:cNvPr id="56" name="Rounded Rectangle 55"/>
           <p:cNvSpPr/>
           <p:nvPr/>
         </p:nvSpPr>
@@ -26002,7 +25864,7 @@
       </p:sp>
       <p:sp>
         <p:nvSpPr>
-          <p:cNvPr id="60" name="Rounded Rectangle 59"/>
+          <p:cNvPr id="57" name="Rounded Rectangle 56"/>
           <p:cNvSpPr/>
           <p:nvPr/>
         </p:nvSpPr>
@@ -26048,7 +25910,7 @@
       </p:sp>
       <p:sp>
         <p:nvSpPr>
-          <p:cNvPr id="61" name="Rounded Rectangle 60"/>
+          <p:cNvPr id="58" name="Rounded Rectangle 57"/>
           <p:cNvSpPr/>
           <p:nvPr/>
         </p:nvSpPr>
@@ -26094,7 +25956,7 @@
       </p:sp>
       <p:sp>
         <p:nvSpPr>
-          <p:cNvPr id="62" name="Rounded Rectangle 61"/>
+          <p:cNvPr id="59" name="Rounded Rectangle 58"/>
           <p:cNvSpPr/>
           <p:nvPr/>
         </p:nvSpPr>
@@ -26140,283 +26002,7 @@
       </p:sp>
       <p:sp>
         <p:nvSpPr>
-          <p:cNvPr id="63" name="Rounded Rectangle 62"/>
-          <p:cNvSpPr/>
-          <p:nvPr/>
-        </p:nvSpPr>
-        <p:spPr>
-          <a:xfrm>
-            <a:off x="5276088" y="3646616"/>
-            <a:ext cx="1371600" cy="53035"/>
-          </a:xfrm>
-          <a:prstGeom prst="roundRect">
-            <a:avLst>
-              <a:gd name="adj" fmla="val 18000"/>
-            </a:avLst>
-          </a:prstGeom>
-          <a:solidFill>
-            <a:srgbClr val="A78BFA"/>
-          </a:solidFill>
-          <a:ln>
-            <a:noFill/>
-          </a:ln>
-          <a:effectLst/>
-        </p:spPr>
-        <p:style>
-          <a:lnRef idx="1">
-            <a:schemeClr val="accent1"/>
-          </a:lnRef>
-          <a:fillRef idx="3">
-            <a:schemeClr val="accent1"/>
-          </a:fillRef>
-          <a:effectRef idx="2">
-            <a:schemeClr val="accent1"/>
-          </a:effectRef>
-          <a:fontRef idx="minor">
-            <a:schemeClr val="lt1"/>
-          </a:fontRef>
-        </p:style>
-        <p:txBody>
-          <a:bodyPr rtlCol="0" anchor="ctr"/>
-          <a:lstStyle/>
-          <a:p>
-            <a:pPr algn="ctr"/>
-          </a:p>
-        </p:txBody>
-      </p:sp>
-      <p:sp>
-        <p:nvSpPr>
-          <p:cNvPr id="64" name="Rounded Rectangle 63"/>
-          <p:cNvSpPr/>
-          <p:nvPr/>
-        </p:nvSpPr>
-        <p:spPr>
-          <a:xfrm>
-            <a:off x="5276088" y="3703308"/>
-            <a:ext cx="1371600" cy="53035"/>
-          </a:xfrm>
-          <a:prstGeom prst="roundRect">
-            <a:avLst>
-              <a:gd name="adj" fmla="val 18000"/>
-            </a:avLst>
-          </a:prstGeom>
-          <a:solidFill>
-            <a:srgbClr val="A78BFA"/>
-          </a:solidFill>
-          <a:ln>
-            <a:noFill/>
-          </a:ln>
-          <a:effectLst/>
-        </p:spPr>
-        <p:style>
-          <a:lnRef idx="1">
-            <a:schemeClr val="accent1"/>
-          </a:lnRef>
-          <a:fillRef idx="3">
-            <a:schemeClr val="accent1"/>
-          </a:fillRef>
-          <a:effectRef idx="2">
-            <a:schemeClr val="accent1"/>
-          </a:effectRef>
-          <a:fontRef idx="minor">
-            <a:schemeClr val="lt1"/>
-          </a:fontRef>
-        </p:style>
-        <p:txBody>
-          <a:bodyPr rtlCol="0" anchor="ctr"/>
-          <a:lstStyle/>
-          <a:p>
-            <a:pPr algn="ctr"/>
-          </a:p>
-        </p:txBody>
-      </p:sp>
-      <p:sp>
-        <p:nvSpPr>
-          <p:cNvPr id="65" name="Rounded Rectangle 64"/>
-          <p:cNvSpPr/>
-          <p:nvPr/>
-        </p:nvSpPr>
-        <p:spPr>
-          <a:xfrm>
-            <a:off x="5276088" y="3760000"/>
-            <a:ext cx="1371600" cy="53035"/>
-          </a:xfrm>
-          <a:prstGeom prst="roundRect">
-            <a:avLst>
-              <a:gd name="adj" fmla="val 18000"/>
-            </a:avLst>
-          </a:prstGeom>
-          <a:solidFill>
-            <a:srgbClr val="A78BFA"/>
-          </a:solidFill>
-          <a:ln>
-            <a:noFill/>
-          </a:ln>
-          <a:effectLst/>
-        </p:spPr>
-        <p:style>
-          <a:lnRef idx="1">
-            <a:schemeClr val="accent1"/>
-          </a:lnRef>
-          <a:fillRef idx="3">
-            <a:schemeClr val="accent1"/>
-          </a:fillRef>
-          <a:effectRef idx="2">
-            <a:schemeClr val="accent1"/>
-          </a:effectRef>
-          <a:fontRef idx="minor">
-            <a:schemeClr val="lt1"/>
-          </a:fontRef>
-        </p:style>
-        <p:txBody>
-          <a:bodyPr rtlCol="0" anchor="ctr"/>
-          <a:lstStyle/>
-          <a:p>
-            <a:pPr algn="ctr"/>
-          </a:p>
-        </p:txBody>
-      </p:sp>
-      <p:sp>
-        <p:nvSpPr>
-          <p:cNvPr id="66" name="Rounded Rectangle 65"/>
-          <p:cNvSpPr/>
-          <p:nvPr/>
-        </p:nvSpPr>
-        <p:spPr>
-          <a:xfrm>
-            <a:off x="5276088" y="3816692"/>
-            <a:ext cx="1371600" cy="53035"/>
-          </a:xfrm>
-          <a:prstGeom prst="roundRect">
-            <a:avLst>
-              <a:gd name="adj" fmla="val 18000"/>
-            </a:avLst>
-          </a:prstGeom>
-          <a:solidFill>
-            <a:srgbClr val="A78BFA"/>
-          </a:solidFill>
-          <a:ln>
-            <a:noFill/>
-          </a:ln>
-          <a:effectLst/>
-        </p:spPr>
-        <p:style>
-          <a:lnRef idx="1">
-            <a:schemeClr val="accent1"/>
-          </a:lnRef>
-          <a:fillRef idx="3">
-            <a:schemeClr val="accent1"/>
-          </a:fillRef>
-          <a:effectRef idx="2">
-            <a:schemeClr val="accent1"/>
-          </a:effectRef>
-          <a:fontRef idx="minor">
-            <a:schemeClr val="lt1"/>
-          </a:fontRef>
-        </p:style>
-        <p:txBody>
-          <a:bodyPr rtlCol="0" anchor="ctr"/>
-          <a:lstStyle/>
-          <a:p>
-            <a:pPr algn="ctr"/>
-          </a:p>
-        </p:txBody>
-      </p:sp>
-      <p:sp>
-        <p:nvSpPr>
-          <p:cNvPr id="67" name="Rounded Rectangle 66"/>
-          <p:cNvSpPr/>
-          <p:nvPr/>
-        </p:nvSpPr>
-        <p:spPr>
-          <a:xfrm>
-            <a:off x="5276088" y="3873384"/>
-            <a:ext cx="1371600" cy="53035"/>
-          </a:xfrm>
-          <a:prstGeom prst="roundRect">
-            <a:avLst>
-              <a:gd name="adj" fmla="val 18000"/>
-            </a:avLst>
-          </a:prstGeom>
-          <a:solidFill>
-            <a:srgbClr val="A78BFA"/>
-          </a:solidFill>
-          <a:ln>
-            <a:noFill/>
-          </a:ln>
-          <a:effectLst/>
-        </p:spPr>
-        <p:style>
-          <a:lnRef idx="1">
-            <a:schemeClr val="accent1"/>
-          </a:lnRef>
-          <a:fillRef idx="3">
-            <a:schemeClr val="accent1"/>
-          </a:fillRef>
-          <a:effectRef idx="2">
-            <a:schemeClr val="accent1"/>
-          </a:effectRef>
-          <a:fontRef idx="minor">
-            <a:schemeClr val="lt1"/>
-          </a:fontRef>
-        </p:style>
-        <p:txBody>
-          <a:bodyPr rtlCol="0" anchor="ctr"/>
-          <a:lstStyle/>
-          <a:p>
-            <a:pPr algn="ctr"/>
-          </a:p>
-        </p:txBody>
-      </p:sp>
-      <p:sp>
-        <p:nvSpPr>
-          <p:cNvPr id="68" name="Rounded Rectangle 67"/>
-          <p:cNvSpPr/>
-          <p:nvPr/>
-        </p:nvSpPr>
-        <p:spPr>
-          <a:xfrm>
-            <a:off x="5276088" y="3930076"/>
-            <a:ext cx="1371600" cy="53035"/>
-          </a:xfrm>
-          <a:prstGeom prst="roundRect">
-            <a:avLst>
-              <a:gd name="adj" fmla="val 18000"/>
-            </a:avLst>
-          </a:prstGeom>
-          <a:solidFill>
-            <a:srgbClr val="A78BFA"/>
-          </a:solidFill>
-          <a:ln>
-            <a:noFill/>
-          </a:ln>
-          <a:effectLst/>
-        </p:spPr>
-        <p:style>
-          <a:lnRef idx="1">
-            <a:schemeClr val="accent1"/>
-          </a:lnRef>
-          <a:fillRef idx="3">
-            <a:schemeClr val="accent1"/>
-          </a:fillRef>
-          <a:effectRef idx="2">
-            <a:schemeClr val="accent1"/>
-          </a:effectRef>
-          <a:fontRef idx="minor">
-            <a:schemeClr val="lt1"/>
-          </a:fontRef>
-        </p:style>
-        <p:txBody>
-          <a:bodyPr rtlCol="0" anchor="ctr"/>
-          <a:lstStyle/>
-          <a:p>
-            <a:pPr algn="ctr"/>
-          </a:p>
-        </p:txBody>
-      </p:sp>
-      <p:sp>
-        <p:nvSpPr>
-          <p:cNvPr id="69" name="TextBox 68"/>
+          <p:cNvPr id="60" name="TextBox 59"/>
           <p:cNvSpPr txBox="1"/>
           <p:nvPr/>
         </p:nvSpPr>
@@ -26455,7 +26041,7 @@
       </p:sp>
       <p:sp>
         <p:nvSpPr>
-          <p:cNvPr id="70" name="Rounded Rectangle 69"/>
+          <p:cNvPr id="61" name="Rounded Rectangle 60"/>
           <p:cNvSpPr/>
           <p:nvPr/>
         </p:nvSpPr>
@@ -26503,7 +26089,7 @@
       </p:sp>
       <p:sp>
         <p:nvSpPr>
-          <p:cNvPr id="71" name="TextBox 70"/>
+          <p:cNvPr id="62" name="TextBox 61"/>
           <p:cNvSpPr txBox="1"/>
           <p:nvPr/>
         </p:nvSpPr>
@@ -26542,7 +26128,7 @@
       </p:sp>
       <p:sp>
         <p:nvSpPr>
-          <p:cNvPr id="72" name="TextBox 71"/>
+          <p:cNvPr id="63" name="TextBox 62"/>
           <p:cNvSpPr txBox="1"/>
           <p:nvPr/>
         </p:nvSpPr>
@@ -26574,14 +26160,14 @@
                 </a:solidFill>
                 <a:latin typeface="Segoe UI"/>
               </a:rPr>
-              <a:t>Layers 43–47</a:t>
+              <a:t>Layers 34–47</a:t>
             </a:r>
           </a:p>
         </p:txBody>
       </p:sp>
       <p:sp>
         <p:nvSpPr>
-          <p:cNvPr id="73" name="TextBox 72"/>
+          <p:cNvPr id="64" name="TextBox 63"/>
           <p:cNvSpPr txBox="1"/>
           <p:nvPr/>
         </p:nvSpPr>
@@ -26613,14 +26199,14 @@
                 </a:solidFill>
                 <a:latin typeface="Consolas"/>
               </a:rPr>
-              <a:t>2.04 GB</a:t>
+              <a:t>5.1 GB in use</a:t>
             </a:r>
           </a:p>
         </p:txBody>
       </p:sp>
       <p:sp>
         <p:nvSpPr>
-          <p:cNvPr id="74" name="Rounded Rectangle 73"/>
+          <p:cNvPr id="65" name="Rounded Rectangle 64"/>
           <p:cNvSpPr/>
           <p:nvPr/>
         </p:nvSpPr>
@@ -26666,7 +26252,7 @@
       </p:sp>
       <p:sp>
         <p:nvSpPr>
-          <p:cNvPr id="75" name="Rounded Rectangle 74"/>
+          <p:cNvPr id="66" name="Rounded Rectangle 65"/>
           <p:cNvSpPr/>
           <p:nvPr/>
         </p:nvSpPr>
@@ -26712,7 +26298,7 @@
       </p:sp>
       <p:sp>
         <p:nvSpPr>
-          <p:cNvPr id="76" name="Rounded Rectangle 75"/>
+          <p:cNvPr id="67" name="Rounded Rectangle 66"/>
           <p:cNvSpPr/>
           <p:nvPr/>
         </p:nvSpPr>
@@ -26758,7 +26344,7 @@
       </p:sp>
       <p:sp>
         <p:nvSpPr>
-          <p:cNvPr id="77" name="Rounded Rectangle 76"/>
+          <p:cNvPr id="68" name="Rounded Rectangle 67"/>
           <p:cNvSpPr/>
           <p:nvPr/>
         </p:nvSpPr>
@@ -26804,13 +26390,427 @@
       </p:sp>
       <p:sp>
         <p:nvSpPr>
+          <p:cNvPr id="69" name="Rounded Rectangle 68"/>
+          <p:cNvSpPr/>
+          <p:nvPr/>
+        </p:nvSpPr>
+        <p:spPr>
+          <a:xfrm>
+            <a:off x="7379208" y="3079696"/>
+            <a:ext cx="1371600" cy="53035"/>
+          </a:xfrm>
+          <a:prstGeom prst="roundRect">
+            <a:avLst>
+              <a:gd name="adj" fmla="val 18000"/>
+            </a:avLst>
+          </a:prstGeom>
+          <a:solidFill>
+            <a:srgbClr val="A78BFA"/>
+          </a:solidFill>
+          <a:ln>
+            <a:noFill/>
+          </a:ln>
+          <a:effectLst/>
+        </p:spPr>
+        <p:style>
+          <a:lnRef idx="1">
+            <a:schemeClr val="accent1"/>
+          </a:lnRef>
+          <a:fillRef idx="3">
+            <a:schemeClr val="accent1"/>
+          </a:fillRef>
+          <a:effectRef idx="2">
+            <a:schemeClr val="accent1"/>
+          </a:effectRef>
+          <a:fontRef idx="minor">
+            <a:schemeClr val="lt1"/>
+          </a:fontRef>
+        </p:style>
+        <p:txBody>
+          <a:bodyPr rtlCol="0" anchor="ctr"/>
+          <a:lstStyle/>
+          <a:p>
+            <a:pPr algn="ctr"/>
+          </a:p>
+        </p:txBody>
+      </p:sp>
+      <p:sp>
+        <p:nvSpPr>
+          <p:cNvPr id="70" name="Rounded Rectangle 69"/>
+          <p:cNvSpPr/>
+          <p:nvPr/>
+        </p:nvSpPr>
+        <p:spPr>
+          <a:xfrm>
+            <a:off x="7379208" y="3136388"/>
+            <a:ext cx="1371600" cy="53035"/>
+          </a:xfrm>
+          <a:prstGeom prst="roundRect">
+            <a:avLst>
+              <a:gd name="adj" fmla="val 18000"/>
+            </a:avLst>
+          </a:prstGeom>
+          <a:solidFill>
+            <a:srgbClr val="A78BFA"/>
+          </a:solidFill>
+          <a:ln>
+            <a:noFill/>
+          </a:ln>
+          <a:effectLst/>
+        </p:spPr>
+        <p:style>
+          <a:lnRef idx="1">
+            <a:schemeClr val="accent1"/>
+          </a:lnRef>
+          <a:fillRef idx="3">
+            <a:schemeClr val="accent1"/>
+          </a:fillRef>
+          <a:effectRef idx="2">
+            <a:schemeClr val="accent1"/>
+          </a:effectRef>
+          <a:fontRef idx="minor">
+            <a:schemeClr val="lt1"/>
+          </a:fontRef>
+        </p:style>
+        <p:txBody>
+          <a:bodyPr rtlCol="0" anchor="ctr"/>
+          <a:lstStyle/>
+          <a:p>
+            <a:pPr algn="ctr"/>
+          </a:p>
+        </p:txBody>
+      </p:sp>
+      <p:sp>
+        <p:nvSpPr>
+          <p:cNvPr id="71" name="Rounded Rectangle 70"/>
+          <p:cNvSpPr/>
+          <p:nvPr/>
+        </p:nvSpPr>
+        <p:spPr>
+          <a:xfrm>
+            <a:off x="7379208" y="3193080"/>
+            <a:ext cx="1371600" cy="53035"/>
+          </a:xfrm>
+          <a:prstGeom prst="roundRect">
+            <a:avLst>
+              <a:gd name="adj" fmla="val 18000"/>
+            </a:avLst>
+          </a:prstGeom>
+          <a:solidFill>
+            <a:srgbClr val="A78BFA"/>
+          </a:solidFill>
+          <a:ln>
+            <a:noFill/>
+          </a:ln>
+          <a:effectLst/>
+        </p:spPr>
+        <p:style>
+          <a:lnRef idx="1">
+            <a:schemeClr val="accent1"/>
+          </a:lnRef>
+          <a:fillRef idx="3">
+            <a:schemeClr val="accent1"/>
+          </a:fillRef>
+          <a:effectRef idx="2">
+            <a:schemeClr val="accent1"/>
+          </a:effectRef>
+          <a:fontRef idx="minor">
+            <a:schemeClr val="lt1"/>
+          </a:fontRef>
+        </p:style>
+        <p:txBody>
+          <a:bodyPr rtlCol="0" anchor="ctr"/>
+          <a:lstStyle/>
+          <a:p>
+            <a:pPr algn="ctr"/>
+          </a:p>
+        </p:txBody>
+      </p:sp>
+      <p:sp>
+        <p:nvSpPr>
+          <p:cNvPr id="72" name="Rounded Rectangle 71"/>
+          <p:cNvSpPr/>
+          <p:nvPr/>
+        </p:nvSpPr>
+        <p:spPr>
+          <a:xfrm>
+            <a:off x="7379208" y="3249772"/>
+            <a:ext cx="1371600" cy="53035"/>
+          </a:xfrm>
+          <a:prstGeom prst="roundRect">
+            <a:avLst>
+              <a:gd name="adj" fmla="val 18000"/>
+            </a:avLst>
+          </a:prstGeom>
+          <a:solidFill>
+            <a:srgbClr val="A78BFA"/>
+          </a:solidFill>
+          <a:ln>
+            <a:noFill/>
+          </a:ln>
+          <a:effectLst/>
+        </p:spPr>
+        <p:style>
+          <a:lnRef idx="1">
+            <a:schemeClr val="accent1"/>
+          </a:lnRef>
+          <a:fillRef idx="3">
+            <a:schemeClr val="accent1"/>
+          </a:fillRef>
+          <a:effectRef idx="2">
+            <a:schemeClr val="accent1"/>
+          </a:effectRef>
+          <a:fontRef idx="minor">
+            <a:schemeClr val="lt1"/>
+          </a:fontRef>
+        </p:style>
+        <p:txBody>
+          <a:bodyPr rtlCol="0" anchor="ctr"/>
+          <a:lstStyle/>
+          <a:p>
+            <a:pPr algn="ctr"/>
+          </a:p>
+        </p:txBody>
+      </p:sp>
+      <p:sp>
+        <p:nvSpPr>
+          <p:cNvPr id="73" name="Rounded Rectangle 72"/>
+          <p:cNvSpPr/>
+          <p:nvPr/>
+        </p:nvSpPr>
+        <p:spPr>
+          <a:xfrm>
+            <a:off x="7379208" y="3306464"/>
+            <a:ext cx="1371600" cy="53035"/>
+          </a:xfrm>
+          <a:prstGeom prst="roundRect">
+            <a:avLst>
+              <a:gd name="adj" fmla="val 18000"/>
+            </a:avLst>
+          </a:prstGeom>
+          <a:solidFill>
+            <a:srgbClr val="A78BFA"/>
+          </a:solidFill>
+          <a:ln>
+            <a:noFill/>
+          </a:ln>
+          <a:effectLst/>
+        </p:spPr>
+        <p:style>
+          <a:lnRef idx="1">
+            <a:schemeClr val="accent1"/>
+          </a:lnRef>
+          <a:fillRef idx="3">
+            <a:schemeClr val="accent1"/>
+          </a:fillRef>
+          <a:effectRef idx="2">
+            <a:schemeClr val="accent1"/>
+          </a:effectRef>
+          <a:fontRef idx="minor">
+            <a:schemeClr val="lt1"/>
+          </a:fontRef>
+        </p:style>
+        <p:txBody>
+          <a:bodyPr rtlCol="0" anchor="ctr"/>
+          <a:lstStyle/>
+          <a:p>
+            <a:pPr algn="ctr"/>
+          </a:p>
+        </p:txBody>
+      </p:sp>
+      <p:sp>
+        <p:nvSpPr>
+          <p:cNvPr id="74" name="Rounded Rectangle 73"/>
+          <p:cNvSpPr/>
+          <p:nvPr/>
+        </p:nvSpPr>
+        <p:spPr>
+          <a:xfrm>
+            <a:off x="7379208" y="3363156"/>
+            <a:ext cx="1371600" cy="53035"/>
+          </a:xfrm>
+          <a:prstGeom prst="roundRect">
+            <a:avLst>
+              <a:gd name="adj" fmla="val 18000"/>
+            </a:avLst>
+          </a:prstGeom>
+          <a:solidFill>
+            <a:srgbClr val="A78BFA"/>
+          </a:solidFill>
+          <a:ln>
+            <a:noFill/>
+          </a:ln>
+          <a:effectLst/>
+        </p:spPr>
+        <p:style>
+          <a:lnRef idx="1">
+            <a:schemeClr val="accent1"/>
+          </a:lnRef>
+          <a:fillRef idx="3">
+            <a:schemeClr val="accent1"/>
+          </a:fillRef>
+          <a:effectRef idx="2">
+            <a:schemeClr val="accent1"/>
+          </a:effectRef>
+          <a:fontRef idx="minor">
+            <a:schemeClr val="lt1"/>
+          </a:fontRef>
+        </p:style>
+        <p:txBody>
+          <a:bodyPr rtlCol="0" anchor="ctr"/>
+          <a:lstStyle/>
+          <a:p>
+            <a:pPr algn="ctr"/>
+          </a:p>
+        </p:txBody>
+      </p:sp>
+      <p:sp>
+        <p:nvSpPr>
+          <p:cNvPr id="75" name="Rounded Rectangle 74"/>
+          <p:cNvSpPr/>
+          <p:nvPr/>
+        </p:nvSpPr>
+        <p:spPr>
+          <a:xfrm>
+            <a:off x="7379208" y="3419848"/>
+            <a:ext cx="1371600" cy="53035"/>
+          </a:xfrm>
+          <a:prstGeom prst="roundRect">
+            <a:avLst>
+              <a:gd name="adj" fmla="val 18000"/>
+            </a:avLst>
+          </a:prstGeom>
+          <a:solidFill>
+            <a:srgbClr val="A78BFA"/>
+          </a:solidFill>
+          <a:ln>
+            <a:noFill/>
+          </a:ln>
+          <a:effectLst/>
+        </p:spPr>
+        <p:style>
+          <a:lnRef idx="1">
+            <a:schemeClr val="accent1"/>
+          </a:lnRef>
+          <a:fillRef idx="3">
+            <a:schemeClr val="accent1"/>
+          </a:fillRef>
+          <a:effectRef idx="2">
+            <a:schemeClr val="accent1"/>
+          </a:effectRef>
+          <a:fontRef idx="minor">
+            <a:schemeClr val="lt1"/>
+          </a:fontRef>
+        </p:style>
+        <p:txBody>
+          <a:bodyPr rtlCol="0" anchor="ctr"/>
+          <a:lstStyle/>
+          <a:p>
+            <a:pPr algn="ctr"/>
+          </a:p>
+        </p:txBody>
+      </p:sp>
+      <p:sp>
+        <p:nvSpPr>
+          <p:cNvPr id="76" name="Rounded Rectangle 75"/>
+          <p:cNvSpPr/>
+          <p:nvPr/>
+        </p:nvSpPr>
+        <p:spPr>
+          <a:xfrm>
+            <a:off x="7379208" y="3476540"/>
+            <a:ext cx="1371600" cy="53035"/>
+          </a:xfrm>
+          <a:prstGeom prst="roundRect">
+            <a:avLst>
+              <a:gd name="adj" fmla="val 18000"/>
+            </a:avLst>
+          </a:prstGeom>
+          <a:solidFill>
+            <a:srgbClr val="A78BFA"/>
+          </a:solidFill>
+          <a:ln>
+            <a:noFill/>
+          </a:ln>
+          <a:effectLst/>
+        </p:spPr>
+        <p:style>
+          <a:lnRef idx="1">
+            <a:schemeClr val="accent1"/>
+          </a:lnRef>
+          <a:fillRef idx="3">
+            <a:schemeClr val="accent1"/>
+          </a:fillRef>
+          <a:effectRef idx="2">
+            <a:schemeClr val="accent1"/>
+          </a:effectRef>
+          <a:fontRef idx="minor">
+            <a:schemeClr val="lt1"/>
+          </a:fontRef>
+        </p:style>
+        <p:txBody>
+          <a:bodyPr rtlCol="0" anchor="ctr"/>
+          <a:lstStyle/>
+          <a:p>
+            <a:pPr algn="ctr"/>
+          </a:p>
+        </p:txBody>
+      </p:sp>
+      <p:sp>
+        <p:nvSpPr>
+          <p:cNvPr id="77" name="Rounded Rectangle 76"/>
+          <p:cNvSpPr/>
+          <p:nvPr/>
+        </p:nvSpPr>
+        <p:spPr>
+          <a:xfrm>
+            <a:off x="7379208" y="3533232"/>
+            <a:ext cx="1371600" cy="53035"/>
+          </a:xfrm>
+          <a:prstGeom prst="roundRect">
+            <a:avLst>
+              <a:gd name="adj" fmla="val 18000"/>
+            </a:avLst>
+          </a:prstGeom>
+          <a:solidFill>
+            <a:srgbClr val="A78BFA"/>
+          </a:solidFill>
+          <a:ln>
+            <a:noFill/>
+          </a:ln>
+          <a:effectLst/>
+        </p:spPr>
+        <p:style>
+          <a:lnRef idx="1">
+            <a:schemeClr val="accent1"/>
+          </a:lnRef>
+          <a:fillRef idx="3">
+            <a:schemeClr val="accent1"/>
+          </a:fillRef>
+          <a:effectRef idx="2">
+            <a:schemeClr val="accent1"/>
+          </a:effectRef>
+          <a:fontRef idx="minor">
+            <a:schemeClr val="lt1"/>
+          </a:fontRef>
+        </p:style>
+        <p:txBody>
+          <a:bodyPr rtlCol="0" anchor="ctr"/>
+          <a:lstStyle/>
+          <a:p>
+            <a:pPr algn="ctr"/>
+          </a:p>
+        </p:txBody>
+      </p:sp>
+      <p:sp>
+        <p:nvSpPr>
           <p:cNvPr id="78" name="Rounded Rectangle 77"/>
           <p:cNvSpPr/>
           <p:nvPr/>
         </p:nvSpPr>
         <p:spPr>
           <a:xfrm>
-            <a:off x="7379208" y="3079696"/>
+            <a:off x="7379208" y="3589924"/>
             <a:ext cx="1371600" cy="53035"/>
           </a:xfrm>
           <a:prstGeom prst="roundRect">
@@ -27371,7 +27371,7 @@
                 </a:solidFill>
                 <a:latin typeface="Segoe UI"/>
               </a:rPr>
-              <a:t>from live memory, heat, battery and link speed</a:t>
+              <a:t>from live memory, battery and link speed</a:t>
             </a:r>
           </a:p>
         </p:txBody>

--- a/docs/deck-editable/MeshAI_Deck.pptx
+++ b/docs/deck-editable/MeshAI_Deck.pptx
@@ -20,6 +20,7 @@
     <p:sldId id="268" r:id="rId19"/>
     <p:sldId id="269" r:id="rId20"/>
     <p:sldId id="270" r:id="rId21"/>
+    <p:sldId id="271" r:id="rId22"/>
   </p:sldIdLst>
   <p:sldSz cx="12191695" cy="6858000" type="screen4x3"/>
   <p:notesSz cx="6858000" cy="9144000"/>
@@ -6097,7 +6098,7 @@
                 </a:solidFill>
                 <a:latin typeface="Segoe UI"/>
               </a:rPr>
-              <a:t>13% to 47%, on the same tests.</a:t>
+              <a:t>13% to 100%, on the same tests.</a:t>
             </a:r>
           </a:p>
         </p:txBody>
@@ -6197,7 +6198,7 @@
         <p:spPr>
           <a:xfrm>
             <a:off x="566928" y="2377440"/>
-            <a:ext cx="6038770" cy="3017520"/>
+            <a:ext cx="6038770" cy="3200400"/>
           </a:xfrm>
           <a:prstGeom prst="roundRect">
             <a:avLst>
@@ -6244,8 +6245,8 @@
         </p:nvSpPr>
         <p:spPr>
           <a:xfrm>
-            <a:off x="978408" y="4114800"/>
-            <a:ext cx="1371600" cy="365760"/>
+            <a:off x="932688" y="4389120"/>
+            <a:ext cx="1097280" cy="228600"/>
           </a:xfrm>
           <a:prstGeom prst="roundRect">
             <a:avLst>
@@ -6290,8 +6291,8 @@
         </p:nvSpPr>
         <p:spPr>
           <a:xfrm>
-            <a:off x="978408" y="3785616"/>
-            <a:ext cx="1371600" cy="274320"/>
+            <a:off x="932688" y="4059936"/>
+            <a:ext cx="1097280" cy="274320"/>
           </a:xfrm>
           <a:prstGeom prst="rect">
             <a:avLst/>
@@ -6329,8 +6330,8 @@
         </p:nvSpPr>
         <p:spPr>
           <a:xfrm>
-            <a:off x="978408" y="4572000"/>
-            <a:ext cx="1371600" cy="548640"/>
+            <a:off x="932688" y="4709160"/>
+            <a:ext cx="1097280" cy="548640"/>
           </a:xfrm>
           <a:prstGeom prst="rect">
             <a:avLst/>
@@ -6372,8 +6373,8 @@
         </p:nvSpPr>
         <p:spPr>
           <a:xfrm>
-            <a:off x="978408" y="5047488"/>
-            <a:ext cx="1371600" cy="274320"/>
+            <a:off x="932688" y="5184648"/>
+            <a:ext cx="1097280" cy="274320"/>
           </a:xfrm>
           <a:prstGeom prst="rect">
             <a:avLst/>
@@ -6411,8 +6412,8 @@
         </p:nvSpPr>
         <p:spPr>
           <a:xfrm>
-            <a:off x="2898648" y="3154680"/>
-            <a:ext cx="1371600" cy="1325880"/>
+            <a:off x="2350008" y="3803904"/>
+            <a:ext cx="1097280" cy="813816"/>
           </a:xfrm>
           <a:prstGeom prst="roundRect">
             <a:avLst>
@@ -6420,7 +6421,7 @@
             </a:avLst>
           </a:prstGeom>
           <a:solidFill>
-            <a:srgbClr val="5FD68A"/>
+            <a:srgbClr val="969C90"/>
           </a:solidFill>
           <a:ln>
             <a:noFill/>
@@ -6457,8 +6458,8 @@
         </p:nvSpPr>
         <p:spPr>
           <a:xfrm>
-            <a:off x="2898648" y="2825496"/>
-            <a:ext cx="1371600" cy="274320"/>
+            <a:off x="2350008" y="3474720"/>
+            <a:ext cx="1097280" cy="274320"/>
           </a:xfrm>
           <a:prstGeom prst="rect">
             <a:avLst/>
@@ -6479,7 +6480,7 @@
             <a:r>
               <a:rPr sz="2000" b="1">
                 <a:solidFill>
-                  <a:srgbClr val="5FD68A"/>
+                  <a:srgbClr val="969C90"/>
                 </a:solidFill>
                 <a:latin typeface="Consolas"/>
               </a:rPr>
@@ -6496,8 +6497,8 @@
         </p:nvSpPr>
         <p:spPr>
           <a:xfrm>
-            <a:off x="2898648" y="4572000"/>
-            <a:ext cx="1371600" cy="548640"/>
+            <a:off x="2350008" y="4709160"/>
+            <a:ext cx="1097280" cy="548640"/>
           </a:xfrm>
           <a:prstGeom prst="rect">
             <a:avLst/>
@@ -6539,8 +6540,8 @@
         </p:nvSpPr>
         <p:spPr>
           <a:xfrm>
-            <a:off x="2898648" y="5047488"/>
-            <a:ext cx="1371600" cy="274320"/>
+            <a:off x="2350008" y="5184648"/>
+            <a:ext cx="1097280" cy="274320"/>
           </a:xfrm>
           <a:prstGeom prst="rect">
             <a:avLst/>
@@ -6578,8 +6579,8 @@
         </p:nvSpPr>
         <p:spPr>
           <a:xfrm>
-            <a:off x="4818888" y="3154680"/>
-            <a:ext cx="1371600" cy="1325880"/>
+            <a:off x="3767328" y="3803904"/>
+            <a:ext cx="1097280" cy="813816"/>
           </a:xfrm>
           <a:prstGeom prst="roundRect">
             <a:avLst>
@@ -6624,8 +6625,8 @@
         </p:nvSpPr>
         <p:spPr>
           <a:xfrm>
-            <a:off x="4818888" y="2825496"/>
-            <a:ext cx="1371600" cy="274320"/>
+            <a:off x="3767328" y="3474720"/>
+            <a:ext cx="1097280" cy="274320"/>
           </a:xfrm>
           <a:prstGeom prst="rect">
             <a:avLst/>
@@ -6663,8 +6664,8 @@
         </p:nvSpPr>
         <p:spPr>
           <a:xfrm>
-            <a:off x="4818888" y="4572000"/>
-            <a:ext cx="1371600" cy="548640"/>
+            <a:off x="3767328" y="4709160"/>
+            <a:ext cx="1097280" cy="548640"/>
           </a:xfrm>
           <a:prstGeom prst="rect">
             <a:avLst/>
@@ -6706,8 +6707,8 @@
         </p:nvSpPr>
         <p:spPr>
           <a:xfrm>
-            <a:off x="4818888" y="5047488"/>
-            <a:ext cx="1371600" cy="274320"/>
+            <a:off x="3767328" y="5184648"/>
+            <a:ext cx="1097280" cy="274320"/>
           </a:xfrm>
           <a:prstGeom prst="rect">
             <a:avLst/>
@@ -6745,8 +6746,175 @@
         </p:nvSpPr>
         <p:spPr>
           <a:xfrm>
+            <a:off x="5184648" y="2880360"/>
+            <a:ext cx="1097280" cy="1737360"/>
+          </a:xfrm>
+          <a:prstGeom prst="roundRect">
+            <a:avLst>
+              <a:gd name="adj" fmla="val 18000"/>
+            </a:avLst>
+          </a:prstGeom>
+          <a:solidFill>
+            <a:srgbClr val="5FD68A"/>
+          </a:solidFill>
+          <a:ln>
+            <a:noFill/>
+          </a:ln>
+          <a:effectLst/>
+        </p:spPr>
+        <p:style>
+          <a:lnRef idx="1">
+            <a:schemeClr val="accent1"/>
+          </a:lnRef>
+          <a:fillRef idx="3">
+            <a:schemeClr val="accent1"/>
+          </a:fillRef>
+          <a:effectRef idx="2">
+            <a:schemeClr val="accent1"/>
+          </a:effectRef>
+          <a:fontRef idx="minor">
+            <a:schemeClr val="lt1"/>
+          </a:fontRef>
+        </p:style>
+        <p:txBody>
+          <a:bodyPr rtlCol="0" anchor="ctr"/>
+          <a:lstStyle/>
+          <a:p>
+            <a:pPr algn="ctr"/>
+          </a:p>
+        </p:txBody>
+      </p:sp>
+      <p:sp>
+        <p:nvSpPr>
+          <p:cNvPr id="31" name="TextBox 30"/>
+          <p:cNvSpPr txBox="1"/>
+          <p:nvPr/>
+        </p:nvSpPr>
+        <p:spPr>
+          <a:xfrm>
+            <a:off x="5184648" y="2551176"/>
+            <a:ext cx="1097280" cy="274320"/>
+          </a:xfrm>
+          <a:prstGeom prst="rect">
+            <a:avLst/>
+          </a:prstGeom>
+          <a:noFill/>
+        </p:spPr>
+        <p:txBody>
+          <a:bodyPr wrap="square" anchor="t" lIns="0" rIns="0" tIns="0" bIns="0">
+            <a:spAutoFit/>
+          </a:bodyPr>
+          <a:lstStyle/>
+          <a:p>
+            <a:pPr algn="ctr">
+              <a:spcAft>
+                <a:spcPts val="600"/>
+              </a:spcAft>
+            </a:pPr>
+            <a:r>
+              <a:rPr sz="2000" b="1">
+                <a:solidFill>
+                  <a:srgbClr val="5FD68A"/>
+                </a:solidFill>
+                <a:latin typeface="Consolas"/>
+              </a:rPr>
+              <a:t>100%</a:t>
+            </a:r>
+          </a:p>
+        </p:txBody>
+      </p:sp>
+      <p:sp>
+        <p:nvSpPr>
+          <p:cNvPr id="32" name="TextBox 31"/>
+          <p:cNvSpPr txBox="1"/>
+          <p:nvPr/>
+        </p:nvSpPr>
+        <p:spPr>
+          <a:xfrm>
+            <a:off x="5184648" y="4709160"/>
+            <a:ext cx="1097280" cy="548640"/>
+          </a:xfrm>
+          <a:prstGeom prst="rect">
+            <a:avLst/>
+          </a:prstGeom>
+          <a:noFill/>
+        </p:spPr>
+        <p:txBody>
+          <a:bodyPr wrap="square" anchor="t" lIns="0" rIns="0" tIns="0" bIns="0">
+            <a:spAutoFit/>
+          </a:bodyPr>
+          <a:lstStyle/>
+          <a:p>
+            <a:pPr algn="ctr">
+              <a:lnSpc>
+                <a:spcPct val="130000"/>
+              </a:lnSpc>
+              <a:spcAft>
+                <a:spcPts val="600"/>
+              </a:spcAft>
+            </a:pPr>
+            <a:r>
+              <a:rPr sz="1300" b="0">
+                <a:solidFill>
+                  <a:srgbClr val="969C90"/>
+                </a:solidFill>
+                <a:latin typeface="Consolas"/>
+              </a:rPr>
+              <a:t>30B split
+15 of 15</a:t>
+            </a:r>
+          </a:p>
+        </p:txBody>
+      </p:sp>
+      <p:sp>
+        <p:nvSpPr>
+          <p:cNvPr id="33" name="TextBox 32"/>
+          <p:cNvSpPr txBox="1"/>
+          <p:nvPr/>
+        </p:nvSpPr>
+        <p:spPr>
+          <a:xfrm>
+            <a:off x="5184648" y="5184648"/>
+            <a:ext cx="1097280" cy="274320"/>
+          </a:xfrm>
+          <a:prstGeom prst="rect">
+            <a:avLst/>
+          </a:prstGeom>
+          <a:noFill/>
+        </p:spPr>
+        <p:txBody>
+          <a:bodyPr wrap="square" anchor="t" lIns="0" rIns="0" tIns="0" bIns="0">
+            <a:spAutoFit/>
+          </a:bodyPr>
+          <a:lstStyle/>
+          <a:p>
+            <a:pPr algn="ctr">
+              <a:spcAft>
+                <a:spcPts val="600"/>
+              </a:spcAft>
+            </a:pPr>
+            <a:r>
+              <a:rPr sz="1300" b="0">
+                <a:solidFill>
+                  <a:srgbClr val="C2C6BC"/>
+                </a:solidFill>
+                <a:latin typeface="Consolas"/>
+              </a:rPr>
+              <a:t>6.8 tok/s</a:t>
+            </a:r>
+          </a:p>
+        </p:txBody>
+      </p:sp>
+      <p:sp>
+        <p:nvSpPr>
+          <p:cNvPr id="34" name="Rounded Rectangle 33"/>
+          <p:cNvSpPr/>
+          <p:nvPr/>
+        </p:nvSpPr>
+        <p:spPr>
+          <a:xfrm>
             <a:off x="6880018" y="2377440"/>
-            <a:ext cx="4744748" cy="3017520"/>
+            <a:ext cx="4744748" cy="3200400"/>
           </a:xfrm>
           <a:prstGeom prst="roundRect">
             <a:avLst>
@@ -6787,7 +6955,7 @@
       </p:sp>
       <p:sp>
         <p:nvSpPr>
-          <p:cNvPr id="31" name="TextBox 30"/>
+          <p:cNvPr id="35" name="TextBox 34"/>
           <p:cNvSpPr txBox="1"/>
           <p:nvPr/>
         </p:nvSpPr>
@@ -6826,7 +6994,7 @@
       </p:sp>
       <p:sp>
         <p:nvSpPr>
-          <p:cNvPr id="32" name="Rectangle 31"/>
+          <p:cNvPr id="36" name="Rectangle 35"/>
           <p:cNvSpPr/>
           <p:nvPr/>
         </p:nvSpPr>
@@ -6870,7 +7038,7 @@
       </p:sp>
       <p:sp>
         <p:nvSpPr>
-          <p:cNvPr id="33" name="TextBox 32"/>
+          <p:cNvPr id="37" name="TextBox 36"/>
           <p:cNvSpPr txBox="1"/>
           <p:nvPr/>
         </p:nvSpPr>
@@ -6905,14 +7073,14 @@
                 </a:solidFill>
                 <a:latin typeface="Segoe UI"/>
               </a:rPr>
-              <a:t>A bigger model is three times better</a:t>
+              <a:t>A bigger model gets it right</a:t>
             </a:r>
           </a:p>
         </p:txBody>
       </p:sp>
       <p:sp>
         <p:nvSpPr>
-          <p:cNvPr id="34" name="Rectangle 33"/>
+          <p:cNvPr id="38" name="Rectangle 37"/>
           <p:cNvSpPr/>
           <p:nvPr/>
         </p:nvSpPr>
@@ -6956,99 +7124,13 @@
       </p:sp>
       <p:sp>
         <p:nvSpPr>
-          <p:cNvPr id="35" name="TextBox 34"/>
+          <p:cNvPr id="39" name="TextBox 38"/>
           <p:cNvSpPr txBox="1"/>
           <p:nvPr/>
         </p:nvSpPr>
         <p:spPr>
           <a:xfrm>
             <a:off x="7392082" y="3564853"/>
-            <a:ext cx="3958364" cy="274320"/>
-          </a:xfrm>
-          <a:prstGeom prst="rect">
-            <a:avLst/>
-          </a:prstGeom>
-          <a:noFill/>
-        </p:spPr>
-        <p:txBody>
-          <a:bodyPr wrap="square" anchor="t" lIns="0" rIns="0" tIns="0" bIns="0">
-            <a:spAutoFit/>
-          </a:bodyPr>
-          <a:lstStyle/>
-          <a:p>
-            <a:pPr algn="l">
-              <a:lnSpc>
-                <a:spcPct val="115000"/>
-              </a:lnSpc>
-              <a:spcAft>
-                <a:spcPts val="600"/>
-              </a:spcAft>
-            </a:pPr>
-            <a:r>
-              <a:rPr sz="1500" b="0">
-                <a:solidFill>
-                  <a:srgbClr val="F0EFE9"/>
-                </a:solidFill>
-                <a:latin typeface="Segoe UI"/>
-              </a:rPr>
-              <a:t>Splitting costs a little speed</a:t>
-            </a:r>
-          </a:p>
-        </p:txBody>
-      </p:sp>
-      <p:sp>
-        <p:nvSpPr>
-          <p:cNvPr id="36" name="Rectangle 35"/>
-          <p:cNvSpPr/>
-          <p:nvPr/>
-        </p:nvSpPr>
-        <p:spPr>
-          <a:xfrm>
-            <a:off x="7154338" y="4203626"/>
-            <a:ext cx="118872" cy="19050"/>
-          </a:xfrm>
-          <a:prstGeom prst="rect">
-            <a:avLst/>
-          </a:prstGeom>
-          <a:solidFill>
-            <a:srgbClr val="5FD68A"/>
-          </a:solidFill>
-          <a:ln>
-            <a:noFill/>
-          </a:ln>
-          <a:effectLst/>
-        </p:spPr>
-        <p:style>
-          <a:lnRef idx="1">
-            <a:schemeClr val="accent1"/>
-          </a:lnRef>
-          <a:fillRef idx="3">
-            <a:schemeClr val="accent1"/>
-          </a:fillRef>
-          <a:effectRef idx="2">
-            <a:schemeClr val="accent1"/>
-          </a:effectRef>
-          <a:fontRef idx="minor">
-            <a:schemeClr val="lt1"/>
-          </a:fontRef>
-        </p:style>
-        <p:txBody>
-          <a:bodyPr rtlCol="0" anchor="ctr"/>
-          <a:lstStyle/>
-          <a:p>
-            <a:pPr algn="ctr"/>
-          </a:p>
-        </p:txBody>
-      </p:sp>
-      <p:sp>
-        <p:nvSpPr>
-          <p:cNvPr id="37" name="TextBox 36"/>
-          <p:cNvSpPr txBox="1"/>
-          <p:nvPr/>
-        </p:nvSpPr>
-        <p:spPr>
-          <a:xfrm>
-            <a:off x="7392082" y="4112186"/>
             <a:ext cx="3958364" cy="548640"/>
           </a:xfrm>
           <a:prstGeom prst="rect">
@@ -7084,13 +7166,99 @@
       </p:sp>
       <p:sp>
         <p:nvSpPr>
-          <p:cNvPr id="38" name="TextBox 37"/>
+          <p:cNvPr id="40" name="Rectangle 39"/>
+          <p:cNvSpPr/>
+          <p:nvPr/>
+        </p:nvSpPr>
+        <p:spPr>
+          <a:xfrm>
+            <a:off x="7154338" y="4458352"/>
+            <a:ext cx="118872" cy="19050"/>
+          </a:xfrm>
+          <a:prstGeom prst="rect">
+            <a:avLst/>
+          </a:prstGeom>
+          <a:solidFill>
+            <a:srgbClr val="5FD68A"/>
+          </a:solidFill>
+          <a:ln>
+            <a:noFill/>
+          </a:ln>
+          <a:effectLst/>
+        </p:spPr>
+        <p:style>
+          <a:lnRef idx="1">
+            <a:schemeClr val="accent1"/>
+          </a:lnRef>
+          <a:fillRef idx="3">
+            <a:schemeClr val="accent1"/>
+          </a:fillRef>
+          <a:effectRef idx="2">
+            <a:schemeClr val="accent1"/>
+          </a:effectRef>
+          <a:fontRef idx="minor">
+            <a:schemeClr val="lt1"/>
+          </a:fontRef>
+        </p:style>
+        <p:txBody>
+          <a:bodyPr rtlCol="0" anchor="ctr"/>
+          <a:lstStyle/>
+          <a:p>
+            <a:pPr algn="ctr"/>
+          </a:p>
+        </p:txBody>
+      </p:sp>
+      <p:sp>
+        <p:nvSpPr>
+          <p:cNvPr id="41" name="TextBox 40"/>
           <p:cNvSpPr txBox="1"/>
           <p:nvPr/>
         </p:nvSpPr>
         <p:spPr>
           <a:xfrm>
-            <a:off x="7154338" y="4983480"/>
+            <a:off x="7392082" y="4366912"/>
+            <a:ext cx="3958364" cy="274320"/>
+          </a:xfrm>
+          <a:prstGeom prst="rect">
+            <a:avLst/>
+          </a:prstGeom>
+          <a:noFill/>
+        </p:spPr>
+        <p:txBody>
+          <a:bodyPr wrap="square" anchor="t" lIns="0" rIns="0" tIns="0" bIns="0">
+            <a:spAutoFit/>
+          </a:bodyPr>
+          <a:lstStyle/>
+          <a:p>
+            <a:pPr algn="l">
+              <a:lnSpc>
+                <a:spcPct val="115000"/>
+              </a:lnSpc>
+              <a:spcAft>
+                <a:spcPts val="600"/>
+              </a:spcAft>
+            </a:pPr>
+            <a:r>
+              <a:rPr sz="1500" b="0">
+                <a:solidFill>
+                  <a:srgbClr val="F0EFE9"/>
+                </a:solidFill>
+                <a:latin typeface="Segoe UI"/>
+              </a:rPr>
+              <a:t>Only the split can run the 30B</a:t>
+            </a:r>
+          </a:p>
+        </p:txBody>
+      </p:sp>
+      <p:sp>
+        <p:nvSpPr>
+          <p:cNvPr id="42" name="TextBox 41"/>
+          <p:cNvSpPr txBox="1"/>
+          <p:nvPr/>
+        </p:nvSpPr>
+        <p:spPr>
+          <a:xfrm>
+            <a:off x="7154338" y="5120640"/>
             <a:ext cx="4196108" cy="548640"/>
           </a:xfrm>
           <a:prstGeom prst="rect">
@@ -7126,7 +7294,7 @@
       </p:sp>
       <p:sp>
         <p:nvSpPr>
-          <p:cNvPr id="39" name="TextBox 38"/>
+          <p:cNvPr id="43" name="TextBox 42"/>
           <p:cNvSpPr txBox="1"/>
           <p:nvPr/>
         </p:nvSpPr>
@@ -7165,7 +7333,7 @@
       </p:sp>
       <p:sp>
         <p:nvSpPr>
-          <p:cNvPr id="40" name="TextBox 39"/>
+          <p:cNvPr id="44" name="TextBox 43"/>
           <p:cNvSpPr txBox="1"/>
           <p:nvPr/>
         </p:nvSpPr>
@@ -14304,7 +14472,7 @@
                 </a:solidFill>
                 <a:latin typeface="Segoe UI"/>
               </a:rPr>
-              <a:t>The phones held 9.6 GB of it</a:t>
+              <a:t>The phones held 10.8 GB of it</a:t>
             </a:r>
           </a:p>
         </p:txBody>
@@ -14562,7 +14730,7 @@
                 </a:solidFill>
                 <a:latin typeface="Segoe UI"/>
               </a:rPr>
-              <a:t>Three coding questions, all correct</a:t>
+              <a:t>15 of 15 coding problems solved</a:t>
             </a:r>
           </a:p>
         </p:txBody>
@@ -14655,49 +14823,7 @@
       </p:sp>
       <p:sp>
         <p:nvSpPr>
-          <p:cNvPr id="31" name="TextBox 30"/>
-          <p:cNvSpPr txBox="1"/>
-          <p:nvPr/>
-        </p:nvSpPr>
-        <p:spPr>
-          <a:xfrm>
-            <a:off x="822960" y="4498848"/>
-            <a:ext cx="2991002" cy="365760"/>
-          </a:xfrm>
-          <a:prstGeom prst="rect">
-            <a:avLst/>
-          </a:prstGeom>
-          <a:noFill/>
-        </p:spPr>
-        <p:txBody>
-          <a:bodyPr wrap="square" anchor="t" lIns="0" rIns="0" tIns="0" bIns="0">
-            <a:spAutoFit/>
-          </a:bodyPr>
-          <a:lstStyle/>
-          <a:p>
-            <a:pPr algn="l">
-              <a:lnSpc>
-                <a:spcPct val="130000"/>
-              </a:lnSpc>
-              <a:spcAft>
-                <a:spcPts val="600"/>
-              </a:spcAft>
-            </a:pPr>
-            <a:r>
-              <a:rPr sz="1000" b="0">
-                <a:solidFill>
-                  <a:srgbClr val="969C90"/>
-                </a:solidFill>
-                <a:latin typeface="Consolas"/>
-              </a:rPr>
-              <a:t>Cable at 2–3 ms · context 4096 · laptop capped at 8 GB · 27 September</a:t>
-            </a:r>
-          </a:p>
-        </p:txBody>
-      </p:sp>
-      <p:sp>
-        <p:nvSpPr>
-          <p:cNvPr id="32" name="Rounded Rectangle 31"/>
+          <p:cNvPr id="31" name="Rounded Rectangle 30"/>
           <p:cNvSpPr/>
           <p:nvPr/>
         </p:nvSpPr>
@@ -14745,7 +14871,7 @@
       </p:sp>
       <p:sp>
         <p:nvSpPr>
-          <p:cNvPr id="33" name="TextBox 32"/>
+          <p:cNvPr id="32" name="TextBox 31"/>
           <p:cNvSpPr txBox="1"/>
           <p:nvPr/>
         </p:nvSpPr>
@@ -14784,7 +14910,7 @@
       </p:sp>
       <p:sp>
         <p:nvSpPr>
-          <p:cNvPr id="34" name="Rectangle 33"/>
+          <p:cNvPr id="33" name="Rectangle 32"/>
           <p:cNvSpPr/>
           <p:nvPr/>
         </p:nvSpPr>
@@ -14828,7 +14954,7 @@
       </p:sp>
       <p:sp>
         <p:nvSpPr>
-          <p:cNvPr id="35" name="TextBox 34"/>
+          <p:cNvPr id="34" name="TextBox 33"/>
           <p:cNvSpPr txBox="1"/>
           <p:nvPr/>
         </p:nvSpPr>
@@ -14870,7 +14996,7 @@
       </p:sp>
       <p:sp>
         <p:nvSpPr>
-          <p:cNvPr id="36" name="Rectangle 35"/>
+          <p:cNvPr id="35" name="Rectangle 34"/>
           <p:cNvSpPr/>
           <p:nvPr/>
         </p:nvSpPr>
@@ -14914,7 +15040,7 @@
       </p:sp>
       <p:sp>
         <p:nvSpPr>
-          <p:cNvPr id="37" name="TextBox 36"/>
+          <p:cNvPr id="36" name="TextBox 35"/>
           <p:cNvSpPr txBox="1"/>
           <p:nvPr/>
         </p:nvSpPr>
@@ -14956,7 +15082,7 @@
       </p:sp>
       <p:sp>
         <p:nvSpPr>
-          <p:cNvPr id="38" name="Rectangle 37"/>
+          <p:cNvPr id="37" name="Rectangle 36"/>
           <p:cNvSpPr/>
           <p:nvPr/>
         </p:nvSpPr>
@@ -15000,7 +15126,7 @@
       </p:sp>
       <p:sp>
         <p:nvSpPr>
-          <p:cNvPr id="39" name="TextBox 38"/>
+          <p:cNvPr id="38" name="TextBox 37"/>
           <p:cNvSpPr txBox="1"/>
           <p:nvPr/>
         </p:nvSpPr>
@@ -15042,7 +15168,7 @@
       </p:sp>
       <p:sp>
         <p:nvSpPr>
-          <p:cNvPr id="40" name="Rectangle 39"/>
+          <p:cNvPr id="39" name="Rectangle 38"/>
           <p:cNvSpPr/>
           <p:nvPr/>
         </p:nvSpPr>
@@ -15086,7 +15212,7 @@
       </p:sp>
       <p:sp>
         <p:nvSpPr>
-          <p:cNvPr id="41" name="TextBox 40"/>
+          <p:cNvPr id="40" name="TextBox 39"/>
           <p:cNvSpPr txBox="1"/>
           <p:nvPr/>
         </p:nvSpPr>
@@ -15128,7 +15254,7 @@
       </p:sp>
       <p:sp>
         <p:nvSpPr>
-          <p:cNvPr id="42" name="Rectangle 41"/>
+          <p:cNvPr id="41" name="Rectangle 40"/>
           <p:cNvSpPr/>
           <p:nvPr/>
         </p:nvSpPr>
@@ -15172,7 +15298,7 @@
       </p:sp>
       <p:sp>
         <p:nvSpPr>
-          <p:cNvPr id="43" name="TextBox 42"/>
+          <p:cNvPr id="42" name="TextBox 41"/>
           <p:cNvSpPr txBox="1"/>
           <p:nvPr/>
         </p:nvSpPr>
@@ -15214,7 +15340,7 @@
       </p:sp>
       <p:sp>
         <p:nvSpPr>
-          <p:cNvPr id="44" name="Rectangle 43"/>
+          <p:cNvPr id="43" name="Rectangle 42"/>
           <p:cNvSpPr/>
           <p:nvPr/>
         </p:nvSpPr>
@@ -15258,7 +15384,7 @@
       </p:sp>
       <p:sp>
         <p:nvSpPr>
-          <p:cNvPr id="45" name="TextBox 44"/>
+          <p:cNvPr id="44" name="TextBox 43"/>
           <p:cNvSpPr txBox="1"/>
           <p:nvPr/>
         </p:nvSpPr>
@@ -15300,7 +15426,7 @@
       </p:sp>
       <p:sp>
         <p:nvSpPr>
-          <p:cNvPr id="46" name="Rectangle 45"/>
+          <p:cNvPr id="45" name="Rectangle 44"/>
           <p:cNvSpPr/>
           <p:nvPr/>
         </p:nvSpPr>
@@ -15344,7 +15470,7 @@
       </p:sp>
       <p:sp>
         <p:nvSpPr>
-          <p:cNvPr id="47" name="TextBox 46"/>
+          <p:cNvPr id="46" name="TextBox 45"/>
           <p:cNvSpPr txBox="1"/>
           <p:nvPr/>
         </p:nvSpPr>
@@ -15386,46 +15512,7 @@
       </p:sp>
       <p:sp>
         <p:nvSpPr>
-          <p:cNvPr id="48" name="TextBox 47"/>
-          <p:cNvSpPr txBox="1"/>
-          <p:nvPr/>
-        </p:nvSpPr>
-        <p:spPr>
-          <a:xfrm>
-            <a:off x="4600346" y="4544568"/>
-            <a:ext cx="2991002" cy="274320"/>
-          </a:xfrm>
-          <a:prstGeom prst="rect">
-            <a:avLst/>
-          </a:prstGeom>
-          <a:noFill/>
-        </p:spPr>
-        <p:txBody>
-          <a:bodyPr wrap="square" anchor="t" lIns="0" rIns="0" tIns="0" bIns="0">
-            <a:spAutoFit/>
-          </a:bodyPr>
-          <a:lstStyle/>
-          <a:p>
-            <a:pPr algn="l">
-              <a:spcAft>
-                <a:spcPts val="600"/>
-              </a:spcAft>
-            </a:pPr>
-            <a:r>
-              <a:rPr sz="1200" b="0">
-                <a:solidFill>
-                  <a:srgbClr val="969C90"/>
-                </a:solidFill>
-                <a:latin typeface="Segoe UI"/>
-              </a:rPr>
-              <a:t>Every commit timestamped. Nothing pre-built.</a:t>
-            </a:r>
-          </a:p>
-        </p:txBody>
-      </p:sp>
-      <p:sp>
-        <p:nvSpPr>
-          <p:cNvPr id="49" name="Rounded Rectangle 48"/>
+          <p:cNvPr id="47" name="Rounded Rectangle 46"/>
           <p:cNvSpPr/>
           <p:nvPr/>
         </p:nvSpPr>
@@ -15473,7 +15560,7 @@
       </p:sp>
       <p:sp>
         <p:nvSpPr>
-          <p:cNvPr id="50" name="TextBox 49"/>
+          <p:cNvPr id="48" name="TextBox 47"/>
           <p:cNvSpPr txBox="1"/>
           <p:nvPr/>
         </p:nvSpPr>
@@ -15512,7 +15599,7 @@
       </p:sp>
       <p:sp>
         <p:nvSpPr>
-          <p:cNvPr id="51" name="TextBox 50"/>
+          <p:cNvPr id="49" name="TextBox 48"/>
           <p:cNvSpPr txBox="1"/>
           <p:nvPr/>
         </p:nvSpPr>
@@ -15551,7 +15638,7 @@
       </p:sp>
       <p:sp>
         <p:nvSpPr>
-          <p:cNvPr id="52" name="TextBox 51"/>
+          <p:cNvPr id="50" name="TextBox 49"/>
           <p:cNvSpPr txBox="1"/>
           <p:nvPr/>
         </p:nvSpPr>
@@ -15590,7 +15677,7 @@
       </p:sp>
       <p:sp>
         <p:nvSpPr>
-          <p:cNvPr id="53" name="TextBox 52"/>
+          <p:cNvPr id="51" name="TextBox 50"/>
           <p:cNvSpPr txBox="1"/>
           <p:nvPr/>
         </p:nvSpPr>
@@ -15629,7 +15716,7 @@
       </p:sp>
       <p:sp>
         <p:nvSpPr>
-          <p:cNvPr id="54" name="TextBox 53"/>
+          <p:cNvPr id="52" name="TextBox 51"/>
           <p:cNvSpPr txBox="1"/>
           <p:nvPr/>
         </p:nvSpPr>
@@ -15668,7 +15755,7 @@
       </p:sp>
       <p:sp>
         <p:nvSpPr>
-          <p:cNvPr id="55" name="TextBox 54"/>
+          <p:cNvPr id="53" name="TextBox 52"/>
           <p:cNvSpPr txBox="1"/>
           <p:nvPr/>
         </p:nvSpPr>
@@ -15707,46 +15794,7 @@
       </p:sp>
       <p:sp>
         <p:nvSpPr>
-          <p:cNvPr id="56" name="TextBox 55"/>
-          <p:cNvSpPr txBox="1"/>
-          <p:nvPr/>
-        </p:nvSpPr>
-        <p:spPr>
-          <a:xfrm>
-            <a:off x="10133380" y="3108960"/>
-            <a:ext cx="1217066" cy="274320"/>
-          </a:xfrm>
-          <a:prstGeom prst="rect">
-            <a:avLst/>
-          </a:prstGeom>
-          <a:noFill/>
-        </p:spPr>
-        <p:txBody>
-          <a:bodyPr wrap="square" anchor="t" lIns="0" rIns="0" tIns="0" bIns="0">
-            <a:spAutoFit/>
-          </a:bodyPr>
-          <a:lstStyle/>
-          <a:p>
-            <a:pPr algn="l">
-              <a:spcAft>
-                <a:spcPts val="600"/>
-              </a:spcAft>
-            </a:pPr>
-            <a:r>
-              <a:rPr sz="1400" b="0">
-                <a:solidFill>
-                  <a:srgbClr val="969C90"/>
-                </a:solidFill>
-                <a:latin typeface="Segoe UI"/>
-              </a:rPr>
-              <a:t>it comes back by itself</a:t>
-            </a:r>
-          </a:p>
-        </p:txBody>
-      </p:sp>
-      <p:sp>
-        <p:nvSpPr>
-          <p:cNvPr id="57" name="TextBox 56"/>
+          <p:cNvPr id="54" name="TextBox 53"/>
           <p:cNvSpPr txBox="1"/>
           <p:nvPr/>
         </p:nvSpPr>
@@ -15785,7 +15833,7 @@
       </p:sp>
       <p:sp>
         <p:nvSpPr>
-          <p:cNvPr id="58" name="TextBox 57"/>
+          <p:cNvPr id="55" name="TextBox 54"/>
           <p:cNvSpPr txBox="1"/>
           <p:nvPr/>
         </p:nvSpPr>
@@ -15824,7 +15872,7 @@
       </p:sp>
       <p:sp>
         <p:nvSpPr>
-          <p:cNvPr id="59" name="TextBox 58"/>
+          <p:cNvPr id="56" name="TextBox 55"/>
           <p:cNvSpPr txBox="1"/>
           <p:nvPr/>
         </p:nvSpPr>
@@ -15863,7 +15911,7 @@
       </p:sp>
       <p:sp>
         <p:nvSpPr>
-          <p:cNvPr id="60" name="TextBox 59"/>
+          <p:cNvPr id="57" name="TextBox 56"/>
           <p:cNvSpPr txBox="1"/>
           <p:nvPr/>
         </p:nvSpPr>
@@ -15902,7 +15950,7 @@
       </p:sp>
       <p:sp>
         <p:nvSpPr>
-          <p:cNvPr id="61" name="TextBox 60"/>
+          <p:cNvPr id="58" name="TextBox 57"/>
           <p:cNvSpPr txBox="1"/>
           <p:nvPr/>
         </p:nvSpPr>
@@ -15941,7 +15989,7 @@
       </p:sp>
       <p:sp>
         <p:nvSpPr>
-          <p:cNvPr id="62" name="TextBox 61"/>
+          <p:cNvPr id="59" name="TextBox 58"/>
           <p:cNvSpPr txBox="1"/>
           <p:nvPr/>
         </p:nvSpPr>
@@ -15980,7 +16028,7 @@
       </p:sp>
       <p:sp>
         <p:nvSpPr>
-          <p:cNvPr id="63" name="TextBox 62"/>
+          <p:cNvPr id="60" name="TextBox 59"/>
           <p:cNvSpPr txBox="1"/>
           <p:nvPr/>
         </p:nvSpPr>
@@ -16019,7 +16067,7 @@
       </p:sp>
       <p:sp>
         <p:nvSpPr>
-          <p:cNvPr id="64" name="TextBox 63"/>
+          <p:cNvPr id="61" name="TextBox 60"/>
           <p:cNvSpPr txBox="1"/>
           <p:nvPr/>
         </p:nvSpPr>
@@ -16058,7 +16106,7 @@
       </p:sp>
       <p:sp>
         <p:nvSpPr>
-          <p:cNvPr id="65" name="TextBox 64"/>
+          <p:cNvPr id="62" name="TextBox 61"/>
           <p:cNvSpPr txBox="1"/>
           <p:nvPr/>
         </p:nvSpPr>
@@ -16116,6 +16164,2725 @@
 </file>
 
 <file path=ppt/slides/slide15.xml><?xml version="1.0" encoding="utf-8"?>
+<p:sld xmlns:a="http://schemas.openxmlformats.org/drawingml/2006/main" xmlns:p="http://schemas.openxmlformats.org/presentationml/2006/main" xmlns:r="http://schemas.openxmlformats.org/officeDocument/2006/relationships">
+  <p:cSld>
+    <p:spTree>
+      <p:nvGrpSpPr>
+        <p:cNvPr id="1" name=""/>
+        <p:cNvGrpSpPr/>
+        <p:nvPr/>
+      </p:nvGrpSpPr>
+      <p:grpSpPr/>
+      <p:sp>
+        <p:nvSpPr>
+          <p:cNvPr id="2" name="Rectangle 1"/>
+          <p:cNvSpPr/>
+          <p:nvPr/>
+        </p:nvSpPr>
+        <p:spPr>
+          <a:xfrm>
+            <a:off x="0" y="0"/>
+            <a:ext cx="12191695" cy="6858000"/>
+          </a:xfrm>
+          <a:prstGeom prst="rect">
+            <a:avLst/>
+          </a:prstGeom>
+          <a:solidFill>
+            <a:srgbClr val="0B0C0B"/>
+          </a:solidFill>
+          <a:ln>
+            <a:noFill/>
+          </a:ln>
+          <a:effectLst/>
+        </p:spPr>
+        <p:style>
+          <a:lnRef idx="1">
+            <a:schemeClr val="accent1"/>
+          </a:lnRef>
+          <a:fillRef idx="3">
+            <a:schemeClr val="accent1"/>
+          </a:fillRef>
+          <a:effectRef idx="2">
+            <a:schemeClr val="accent1"/>
+          </a:effectRef>
+          <a:fontRef idx="minor">
+            <a:schemeClr val="lt1"/>
+          </a:fontRef>
+        </p:style>
+        <p:txBody>
+          <a:bodyPr rtlCol="0" anchor="ctr"/>
+          <a:lstStyle/>
+          <a:p>
+            <a:pPr algn="ctr"/>
+          </a:p>
+        </p:txBody>
+      </p:sp>
+      <p:sp>
+        <p:nvSpPr>
+          <p:cNvPr id="3" name="Freeform 2"/>
+          <p:cNvSpPr/>
+          <p:nvPr/>
+        </p:nvSpPr>
+        <p:spPr>
+          <a:xfrm>
+            <a:off x="517781" y="409941"/>
+            <a:ext cx="113155" cy="102123"/>
+          </a:xfrm>
+          <a:custGeom>
+            <a:avLst/>
+            <a:gdLst/>
+            <a:ahLst/>
+            <a:cxnLst/>
+            <a:rect l="l" t="t" r="r" b="b"/>
+            <a:pathLst>
+              <a:path w="113155" h="102123">
+                <a:moveTo>
+                  <a:pt x="113155" y="102123"/>
+                </a:moveTo>
+                <a:lnTo>
+                  <a:pt x="45262" y="0"/>
+                </a:lnTo>
+                <a:lnTo>
+                  <a:pt x="0" y="29938"/>
+                </a:lnTo>
+              </a:path>
+            </a:pathLst>
+          </a:custGeom>
+          <a:noFill/>
+          <a:ln w="19050">
+            <a:solidFill>
+              <a:srgbClr val="969C90"/>
+            </a:solidFill>
+          </a:ln>
+          <a:effectLst/>
+        </p:spPr>
+        <p:style>
+          <a:lnRef idx="1">
+            <a:schemeClr val="accent1"/>
+          </a:lnRef>
+          <a:fillRef idx="3">
+            <a:schemeClr val="accent1"/>
+          </a:fillRef>
+          <a:effectRef idx="2">
+            <a:schemeClr val="accent1"/>
+          </a:effectRef>
+          <a:fontRef idx="minor">
+            <a:schemeClr val="lt1"/>
+          </a:fontRef>
+        </p:style>
+        <p:txBody>
+          <a:bodyPr rtlCol="0" anchor="ctr"/>
+          <a:lstStyle/>
+          <a:p>
+            <a:pPr algn="ctr"/>
+          </a:p>
+        </p:txBody>
+      </p:sp>
+      <p:sp>
+        <p:nvSpPr>
+          <p:cNvPr id="4" name="Freeform 3"/>
+          <p:cNvSpPr/>
+          <p:nvPr/>
+        </p:nvSpPr>
+        <p:spPr>
+          <a:xfrm>
+            <a:off x="465697" y="451479"/>
+            <a:ext cx="165239" cy="60585"/>
+          </a:xfrm>
+          <a:custGeom>
+            <a:avLst/>
+            <a:gdLst/>
+            <a:ahLst/>
+            <a:cxnLst/>
+            <a:rect l="l" t="t" r="r" b="b"/>
+            <a:pathLst>
+              <a:path w="165239" h="60585">
+                <a:moveTo>
+                  <a:pt x="165239" y="60585"/>
+                </a:moveTo>
+                <a:lnTo>
+                  <a:pt x="66095" y="0"/>
+                </a:lnTo>
+                <a:lnTo>
+                  <a:pt x="0" y="54861"/>
+                </a:lnTo>
+              </a:path>
+            </a:pathLst>
+          </a:custGeom>
+          <a:noFill/>
+          <a:ln w="19050">
+            <a:solidFill>
+              <a:srgbClr val="969C90"/>
+            </a:solidFill>
+          </a:ln>
+          <a:effectLst/>
+        </p:spPr>
+        <p:style>
+          <a:lnRef idx="1">
+            <a:schemeClr val="accent1"/>
+          </a:lnRef>
+          <a:fillRef idx="3">
+            <a:schemeClr val="accent1"/>
+          </a:fillRef>
+          <a:effectRef idx="2">
+            <a:schemeClr val="accent1"/>
+          </a:effectRef>
+          <a:fontRef idx="minor">
+            <a:schemeClr val="lt1"/>
+          </a:fontRef>
+        </p:style>
+        <p:txBody>
+          <a:bodyPr rtlCol="0" anchor="ctr"/>
+          <a:lstStyle/>
+          <a:p>
+            <a:pPr algn="ctr"/>
+          </a:p>
+        </p:txBody>
+      </p:sp>
+      <p:sp>
+        <p:nvSpPr>
+          <p:cNvPr id="5" name="Freeform 4"/>
+          <p:cNvSpPr/>
+          <p:nvPr/>
+        </p:nvSpPr>
+        <p:spPr>
+          <a:xfrm>
+            <a:off x="467658" y="500496"/>
+            <a:ext cx="163278" cy="84270"/>
+          </a:xfrm>
+          <a:custGeom>
+            <a:avLst/>
+            <a:gdLst/>
+            <a:ahLst/>
+            <a:cxnLst/>
+            <a:rect l="l" t="t" r="r" b="b"/>
+            <a:pathLst>
+              <a:path w="163278" h="84270">
+                <a:moveTo>
+                  <a:pt x="163278" y="11568"/>
+                </a:moveTo>
+                <a:lnTo>
+                  <a:pt x="65311" y="0"/>
+                </a:lnTo>
+                <a:lnTo>
+                  <a:pt x="0" y="84270"/>
+                </a:lnTo>
+              </a:path>
+            </a:pathLst>
+          </a:custGeom>
+          <a:noFill/>
+          <a:ln w="19050">
+            <a:solidFill>
+              <a:srgbClr val="969C90"/>
+            </a:solidFill>
+          </a:ln>
+          <a:effectLst/>
+        </p:spPr>
+        <p:style>
+          <a:lnRef idx="1">
+            <a:schemeClr val="accent1"/>
+          </a:lnRef>
+          <a:fillRef idx="3">
+            <a:schemeClr val="accent1"/>
+          </a:fillRef>
+          <a:effectRef idx="2">
+            <a:schemeClr val="accent1"/>
+          </a:effectRef>
+          <a:fontRef idx="minor">
+            <a:schemeClr val="lt1"/>
+          </a:fontRef>
+        </p:style>
+        <p:txBody>
+          <a:bodyPr rtlCol="0" anchor="ctr"/>
+          <a:lstStyle/>
+          <a:p>
+            <a:pPr algn="ctr"/>
+          </a:p>
+        </p:txBody>
+      </p:sp>
+      <p:sp>
+        <p:nvSpPr>
+          <p:cNvPr id="6" name="Freeform 5"/>
+          <p:cNvSpPr/>
+          <p:nvPr/>
+        </p:nvSpPr>
+        <p:spPr>
+          <a:xfrm>
+            <a:off x="523023" y="512064"/>
+            <a:ext cx="107913" cy="137444"/>
+          </a:xfrm>
+          <a:custGeom>
+            <a:avLst/>
+            <a:gdLst/>
+            <a:ahLst/>
+            <a:cxnLst/>
+            <a:rect l="l" t="t" r="r" b="b"/>
+            <a:pathLst>
+              <a:path w="107913" h="137444">
+                <a:moveTo>
+                  <a:pt x="107913" y="0"/>
+                </a:moveTo>
+                <a:lnTo>
+                  <a:pt x="43165" y="28895"/>
+                </a:lnTo>
+                <a:lnTo>
+                  <a:pt x="0" y="137444"/>
+                </a:lnTo>
+              </a:path>
+            </a:pathLst>
+          </a:custGeom>
+          <a:noFill/>
+          <a:ln w="19050">
+            <a:solidFill>
+              <a:srgbClr val="969C90"/>
+            </a:solidFill>
+          </a:ln>
+          <a:effectLst/>
+        </p:spPr>
+        <p:style>
+          <a:lnRef idx="1">
+            <a:schemeClr val="accent1"/>
+          </a:lnRef>
+          <a:fillRef idx="3">
+            <a:schemeClr val="accent1"/>
+          </a:fillRef>
+          <a:effectRef idx="2">
+            <a:schemeClr val="accent1"/>
+          </a:effectRef>
+          <a:fontRef idx="minor">
+            <a:schemeClr val="lt1"/>
+          </a:fontRef>
+        </p:style>
+        <p:txBody>
+          <a:bodyPr rtlCol="0" anchor="ctr"/>
+          <a:lstStyle/>
+          <a:p>
+            <a:pPr algn="ctr"/>
+          </a:p>
+        </p:txBody>
+      </p:sp>
+      <p:sp>
+        <p:nvSpPr>
+          <p:cNvPr id="7" name="Freeform 6"/>
+          <p:cNvSpPr/>
+          <p:nvPr/>
+        </p:nvSpPr>
+        <p:spPr>
+          <a:xfrm>
+            <a:off x="630936" y="409941"/>
+            <a:ext cx="113154" cy="102123"/>
+          </a:xfrm>
+          <a:custGeom>
+            <a:avLst/>
+            <a:gdLst/>
+            <a:ahLst/>
+            <a:cxnLst/>
+            <a:rect l="l" t="t" r="r" b="b"/>
+            <a:pathLst>
+              <a:path w="113154" h="102123">
+                <a:moveTo>
+                  <a:pt x="0" y="102123"/>
+                </a:moveTo>
+                <a:lnTo>
+                  <a:pt x="67892" y="0"/>
+                </a:lnTo>
+                <a:lnTo>
+                  <a:pt x="113154" y="29938"/>
+                </a:lnTo>
+              </a:path>
+            </a:pathLst>
+          </a:custGeom>
+          <a:noFill/>
+          <a:ln w="19050">
+            <a:solidFill>
+              <a:srgbClr val="969C90"/>
+            </a:solidFill>
+          </a:ln>
+          <a:effectLst/>
+        </p:spPr>
+        <p:style>
+          <a:lnRef idx="1">
+            <a:schemeClr val="accent1"/>
+          </a:lnRef>
+          <a:fillRef idx="3">
+            <a:schemeClr val="accent1"/>
+          </a:fillRef>
+          <a:effectRef idx="2">
+            <a:schemeClr val="accent1"/>
+          </a:effectRef>
+          <a:fontRef idx="minor">
+            <a:schemeClr val="lt1"/>
+          </a:fontRef>
+        </p:style>
+        <p:txBody>
+          <a:bodyPr rtlCol="0" anchor="ctr"/>
+          <a:lstStyle/>
+          <a:p>
+            <a:pPr algn="ctr"/>
+          </a:p>
+        </p:txBody>
+      </p:sp>
+      <p:sp>
+        <p:nvSpPr>
+          <p:cNvPr id="8" name="Freeform 7"/>
+          <p:cNvSpPr/>
+          <p:nvPr/>
+        </p:nvSpPr>
+        <p:spPr>
+          <a:xfrm>
+            <a:off x="630936" y="451479"/>
+            <a:ext cx="165238" cy="60585"/>
+          </a:xfrm>
+          <a:custGeom>
+            <a:avLst/>
+            <a:gdLst/>
+            <a:ahLst/>
+            <a:cxnLst/>
+            <a:rect l="l" t="t" r="r" b="b"/>
+            <a:pathLst>
+              <a:path w="165238" h="60585">
+                <a:moveTo>
+                  <a:pt x="0" y="60585"/>
+                </a:moveTo>
+                <a:lnTo>
+                  <a:pt x="99143" y="0"/>
+                </a:lnTo>
+                <a:lnTo>
+                  <a:pt x="165238" y="54861"/>
+                </a:lnTo>
+              </a:path>
+            </a:pathLst>
+          </a:custGeom>
+          <a:noFill/>
+          <a:ln w="19050">
+            <a:solidFill>
+              <a:srgbClr val="969C90"/>
+            </a:solidFill>
+          </a:ln>
+          <a:effectLst/>
+        </p:spPr>
+        <p:style>
+          <a:lnRef idx="1">
+            <a:schemeClr val="accent1"/>
+          </a:lnRef>
+          <a:fillRef idx="3">
+            <a:schemeClr val="accent1"/>
+          </a:fillRef>
+          <a:effectRef idx="2">
+            <a:schemeClr val="accent1"/>
+          </a:effectRef>
+          <a:fontRef idx="minor">
+            <a:schemeClr val="lt1"/>
+          </a:fontRef>
+        </p:style>
+        <p:txBody>
+          <a:bodyPr rtlCol="0" anchor="ctr"/>
+          <a:lstStyle/>
+          <a:p>
+            <a:pPr algn="ctr"/>
+          </a:p>
+        </p:txBody>
+      </p:sp>
+      <p:sp>
+        <p:nvSpPr>
+          <p:cNvPr id="9" name="Freeform 8"/>
+          <p:cNvSpPr/>
+          <p:nvPr/>
+        </p:nvSpPr>
+        <p:spPr>
+          <a:xfrm>
+            <a:off x="630936" y="500496"/>
+            <a:ext cx="163277" cy="84270"/>
+          </a:xfrm>
+          <a:custGeom>
+            <a:avLst/>
+            <a:gdLst/>
+            <a:ahLst/>
+            <a:cxnLst/>
+            <a:rect l="l" t="t" r="r" b="b"/>
+            <a:pathLst>
+              <a:path w="163277" h="84270">
+                <a:moveTo>
+                  <a:pt x="0" y="11568"/>
+                </a:moveTo>
+                <a:lnTo>
+                  <a:pt x="97966" y="0"/>
+                </a:lnTo>
+                <a:lnTo>
+                  <a:pt x="163277" y="84270"/>
+                </a:lnTo>
+              </a:path>
+            </a:pathLst>
+          </a:custGeom>
+          <a:noFill/>
+          <a:ln w="19050">
+            <a:solidFill>
+              <a:srgbClr val="969C90"/>
+            </a:solidFill>
+          </a:ln>
+          <a:effectLst/>
+        </p:spPr>
+        <p:style>
+          <a:lnRef idx="1">
+            <a:schemeClr val="accent1"/>
+          </a:lnRef>
+          <a:fillRef idx="3">
+            <a:schemeClr val="accent1"/>
+          </a:fillRef>
+          <a:effectRef idx="2">
+            <a:schemeClr val="accent1"/>
+          </a:effectRef>
+          <a:fontRef idx="minor">
+            <a:schemeClr val="lt1"/>
+          </a:fontRef>
+        </p:style>
+        <p:txBody>
+          <a:bodyPr rtlCol="0" anchor="ctr"/>
+          <a:lstStyle/>
+          <a:p>
+            <a:pPr algn="ctr"/>
+          </a:p>
+        </p:txBody>
+      </p:sp>
+      <p:sp>
+        <p:nvSpPr>
+          <p:cNvPr id="10" name="Freeform 9"/>
+          <p:cNvSpPr/>
+          <p:nvPr/>
+        </p:nvSpPr>
+        <p:spPr>
+          <a:xfrm>
+            <a:off x="630936" y="512064"/>
+            <a:ext cx="107912" cy="137444"/>
+          </a:xfrm>
+          <a:custGeom>
+            <a:avLst/>
+            <a:gdLst/>
+            <a:ahLst/>
+            <a:cxnLst/>
+            <a:rect l="l" t="t" r="r" b="b"/>
+            <a:pathLst>
+              <a:path w="107912" h="137444">
+                <a:moveTo>
+                  <a:pt x="0" y="0"/>
+                </a:moveTo>
+                <a:lnTo>
+                  <a:pt x="64747" y="28895"/>
+                </a:lnTo>
+                <a:lnTo>
+                  <a:pt x="107912" y="137444"/>
+                </a:lnTo>
+              </a:path>
+            </a:pathLst>
+          </a:custGeom>
+          <a:noFill/>
+          <a:ln w="19050">
+            <a:solidFill>
+              <a:srgbClr val="969C90"/>
+            </a:solidFill>
+          </a:ln>
+          <a:effectLst/>
+        </p:spPr>
+        <p:style>
+          <a:lnRef idx="1">
+            <a:schemeClr val="accent1"/>
+          </a:lnRef>
+          <a:fillRef idx="3">
+            <a:schemeClr val="accent1"/>
+          </a:fillRef>
+          <a:effectRef idx="2">
+            <a:schemeClr val="accent1"/>
+          </a:effectRef>
+          <a:fontRef idx="minor">
+            <a:schemeClr val="lt1"/>
+          </a:fontRef>
+        </p:style>
+        <p:txBody>
+          <a:bodyPr rtlCol="0" anchor="ctr"/>
+          <a:lstStyle/>
+          <a:p>
+            <a:pPr algn="ctr"/>
+          </a:p>
+        </p:txBody>
+      </p:sp>
+      <p:sp>
+        <p:nvSpPr>
+          <p:cNvPr id="11" name="Oval 10"/>
+          <p:cNvSpPr/>
+          <p:nvPr/>
+        </p:nvSpPr>
+        <p:spPr>
+          <a:xfrm>
+            <a:off x="572643" y="481203"/>
+            <a:ext cx="116586" cy="116586"/>
+          </a:xfrm>
+          <a:prstGeom prst="ellipse">
+            <a:avLst/>
+          </a:prstGeom>
+          <a:solidFill>
+            <a:srgbClr val="969C90"/>
+          </a:solidFill>
+          <a:ln>
+            <a:noFill/>
+          </a:ln>
+          <a:effectLst/>
+        </p:spPr>
+        <p:style>
+          <a:lnRef idx="1">
+            <a:schemeClr val="accent1"/>
+          </a:lnRef>
+          <a:fillRef idx="3">
+            <a:schemeClr val="accent1"/>
+          </a:fillRef>
+          <a:effectRef idx="2">
+            <a:schemeClr val="accent1"/>
+          </a:effectRef>
+          <a:fontRef idx="minor">
+            <a:schemeClr val="lt1"/>
+          </a:fontRef>
+        </p:style>
+        <p:txBody>
+          <a:bodyPr rtlCol="0" anchor="ctr"/>
+          <a:lstStyle/>
+          <a:p>
+            <a:pPr algn="ctr"/>
+          </a:p>
+        </p:txBody>
+      </p:sp>
+      <p:sp>
+        <p:nvSpPr>
+          <p:cNvPr id="12" name="Oval 11"/>
+          <p:cNvSpPr/>
+          <p:nvPr/>
+        </p:nvSpPr>
+        <p:spPr>
+          <a:xfrm>
+            <a:off x="595274" y="424967"/>
+            <a:ext cx="71323" cy="71323"/>
+          </a:xfrm>
+          <a:prstGeom prst="ellipse">
+            <a:avLst/>
+          </a:prstGeom>
+          <a:solidFill>
+            <a:srgbClr val="969C90"/>
+          </a:solidFill>
+          <a:ln>
+            <a:noFill/>
+          </a:ln>
+          <a:effectLst/>
+        </p:spPr>
+        <p:style>
+          <a:lnRef idx="1">
+            <a:schemeClr val="accent1"/>
+          </a:lnRef>
+          <a:fillRef idx="3">
+            <a:schemeClr val="accent1"/>
+          </a:fillRef>
+          <a:effectRef idx="2">
+            <a:schemeClr val="accent1"/>
+          </a:effectRef>
+          <a:fontRef idx="minor">
+            <a:schemeClr val="lt1"/>
+          </a:fontRef>
+        </p:style>
+        <p:txBody>
+          <a:bodyPr rtlCol="0" anchor="ctr"/>
+          <a:lstStyle/>
+          <a:p>
+            <a:pPr algn="ctr"/>
+          </a:p>
+        </p:txBody>
+      </p:sp>
+      <p:sp>
+        <p:nvSpPr>
+          <p:cNvPr id="13" name="TextBox 12"/>
+          <p:cNvSpPr txBox="1"/>
+          <p:nvPr/>
+        </p:nvSpPr>
+        <p:spPr>
+          <a:xfrm>
+            <a:off x="877824" y="420624"/>
+            <a:ext cx="11057839" cy="274320"/>
+          </a:xfrm>
+          <a:prstGeom prst="rect">
+            <a:avLst/>
+          </a:prstGeom>
+          <a:noFill/>
+        </p:spPr>
+        <p:txBody>
+          <a:bodyPr wrap="square" anchor="t" lIns="0" rIns="0" tIns="0" bIns="0">
+            <a:spAutoFit/>
+          </a:bodyPr>
+          <a:lstStyle/>
+          <a:p>
+            <a:pPr algn="l">
+              <a:spcAft>
+                <a:spcPts val="600"/>
+              </a:spcAft>
+            </a:pPr>
+            <a:r>
+              <a:rPr sz="1300" b="0">
+                <a:solidFill>
+                  <a:srgbClr val="969C90"/>
+                </a:solidFill>
+                <a:latin typeface="Consolas"/>
+              </a:rPr>
+              <a:t>11 · HOW WE BUILT IT</a:t>
+            </a:r>
+          </a:p>
+        </p:txBody>
+      </p:sp>
+      <p:sp>
+        <p:nvSpPr>
+          <p:cNvPr id="14" name="TextBox 13"/>
+          <p:cNvSpPr txBox="1"/>
+          <p:nvPr/>
+        </p:nvSpPr>
+        <p:spPr>
+          <a:xfrm>
+            <a:off x="566928" y="713232"/>
+            <a:ext cx="11057839" cy="566928"/>
+          </a:xfrm>
+          <a:prstGeom prst="rect">
+            <a:avLst/>
+          </a:prstGeom>
+          <a:noFill/>
+        </p:spPr>
+        <p:txBody>
+          <a:bodyPr wrap="square" anchor="t" lIns="0" rIns="0" tIns="0" bIns="0">
+            <a:spAutoFit/>
+          </a:bodyPr>
+          <a:lstStyle/>
+          <a:p>
+            <a:pPr algn="l">
+              <a:lnSpc>
+                <a:spcPct val="105000"/>
+              </a:lnSpc>
+              <a:spcAft>
+                <a:spcPts val="600"/>
+              </a:spcAft>
+            </a:pPr>
+            <a:r>
+              <a:rPr sz="4000" b="1">
+                <a:solidFill>
+                  <a:srgbClr val="F0EFE9"/>
+                </a:solidFill>
+                <a:latin typeface="Segoe UI"/>
+              </a:rPr>
+              <a:t>One laptop drove both phones.</a:t>
+            </a:r>
+          </a:p>
+        </p:txBody>
+      </p:sp>
+      <p:sp>
+        <p:nvSpPr>
+          <p:cNvPr id="15" name="TextBox 14"/>
+          <p:cNvSpPr txBox="1"/>
+          <p:nvPr/>
+        </p:nvSpPr>
+        <p:spPr>
+          <a:xfrm>
+            <a:off x="566928" y="1389888"/>
+            <a:ext cx="8778240" cy="548640"/>
+          </a:xfrm>
+          <a:prstGeom prst="rect">
+            <a:avLst/>
+          </a:prstGeom>
+          <a:noFill/>
+        </p:spPr>
+        <p:txBody>
+          <a:bodyPr wrap="square" anchor="t" lIns="0" rIns="0" tIns="0" bIns="0">
+            <a:spAutoFit/>
+          </a:bodyPr>
+          <a:lstStyle/>
+          <a:p>
+            <a:pPr algn="l">
+              <a:lnSpc>
+                <a:spcPct val="125000"/>
+              </a:lnSpc>
+              <a:spcAft>
+                <a:spcPts val="600"/>
+              </a:spcAft>
+            </a:pPr>
+            <a:r>
+              <a:rPr sz="1600" b="0">
+                <a:solidFill>
+                  <a:srgbClr val="C2C6BC"/>
+                </a:solidFill>
+                <a:latin typeface="Segoe UI"/>
+              </a:rPr>
+              <a:t>Through iQOO Office Kit, the bridge between the laptop and the phones while we built and tested.</a:t>
+            </a:r>
+          </a:p>
+        </p:txBody>
+      </p:sp>
+      <p:sp>
+        <p:nvSpPr>
+          <p:cNvPr id="16" name="Rectangle 15"/>
+          <p:cNvSpPr/>
+          <p:nvPr/>
+        </p:nvSpPr>
+        <p:spPr>
+          <a:xfrm>
+            <a:off x="566928" y="2103120"/>
+            <a:ext cx="11057839" cy="9525"/>
+          </a:xfrm>
+          <a:prstGeom prst="rect">
+            <a:avLst/>
+          </a:prstGeom>
+          <a:solidFill>
+            <a:srgbClr val="2A2F27"/>
+          </a:solidFill>
+          <a:ln>
+            <a:noFill/>
+          </a:ln>
+          <a:effectLst/>
+        </p:spPr>
+        <p:style>
+          <a:lnRef idx="1">
+            <a:schemeClr val="accent1"/>
+          </a:lnRef>
+          <a:fillRef idx="3">
+            <a:schemeClr val="accent1"/>
+          </a:fillRef>
+          <a:effectRef idx="2">
+            <a:schemeClr val="accent1"/>
+          </a:effectRef>
+          <a:fontRef idx="minor">
+            <a:schemeClr val="lt1"/>
+          </a:fontRef>
+        </p:style>
+        <p:txBody>
+          <a:bodyPr rtlCol="0" anchor="ctr"/>
+          <a:lstStyle/>
+          <a:p>
+            <a:pPr algn="ctr"/>
+          </a:p>
+        </p:txBody>
+      </p:sp>
+      <p:sp>
+        <p:nvSpPr>
+          <p:cNvPr id="17" name="Rounded Rectangle 16"/>
+          <p:cNvSpPr/>
+          <p:nvPr/>
+        </p:nvSpPr>
+        <p:spPr>
+          <a:xfrm>
+            <a:off x="566928" y="2377440"/>
+            <a:ext cx="3503066" cy="2011680"/>
+          </a:xfrm>
+          <a:prstGeom prst="roundRect">
+            <a:avLst>
+              <a:gd name="adj" fmla="val 4000"/>
+            </a:avLst>
+          </a:prstGeom>
+          <a:solidFill>
+            <a:srgbClr val="142E20"/>
+          </a:solidFill>
+          <a:ln w="9525">
+            <a:solidFill>
+              <a:srgbClr val="5FD68A"/>
+            </a:solidFill>
+          </a:ln>
+          <a:effectLst/>
+        </p:spPr>
+        <p:style>
+          <a:lnRef idx="1">
+            <a:schemeClr val="accent1"/>
+          </a:lnRef>
+          <a:fillRef idx="3">
+            <a:schemeClr val="accent1"/>
+          </a:fillRef>
+          <a:effectRef idx="2">
+            <a:schemeClr val="accent1"/>
+          </a:effectRef>
+          <a:fontRef idx="minor">
+            <a:schemeClr val="lt1"/>
+          </a:fontRef>
+        </p:style>
+        <p:txBody>
+          <a:bodyPr rtlCol="0" anchor="ctr"/>
+          <a:lstStyle/>
+          <a:p>
+            <a:pPr algn="ctr"/>
+          </a:p>
+        </p:txBody>
+      </p:sp>
+      <p:sp>
+        <p:nvSpPr>
+          <p:cNvPr id="18" name="TextBox 17"/>
+          <p:cNvSpPr txBox="1"/>
+          <p:nvPr/>
+        </p:nvSpPr>
+        <p:spPr>
+          <a:xfrm>
+            <a:off x="822960" y="2578608"/>
+            <a:ext cx="2991002" cy="274320"/>
+          </a:xfrm>
+          <a:prstGeom prst="rect">
+            <a:avLst/>
+          </a:prstGeom>
+          <a:noFill/>
+        </p:spPr>
+        <p:txBody>
+          <a:bodyPr wrap="square" anchor="t" lIns="0" rIns="0" tIns="0" bIns="0">
+            <a:spAutoFit/>
+          </a:bodyPr>
+          <a:lstStyle/>
+          <a:p>
+            <a:pPr algn="l">
+              <a:spcAft>
+                <a:spcPts val="600"/>
+              </a:spcAft>
+            </a:pPr>
+            <a:r>
+              <a:rPr sz="1100" b="0">
+                <a:solidFill>
+                  <a:srgbClr val="5FD68A"/>
+                </a:solidFill>
+                <a:latin typeface="Consolas"/>
+              </a:rPr>
+              <a:t>REMOTE CONTROL</a:t>
+            </a:r>
+          </a:p>
+        </p:txBody>
+      </p:sp>
+      <p:sp>
+        <p:nvSpPr>
+          <p:cNvPr id="19" name="TextBox 18"/>
+          <p:cNvSpPr txBox="1"/>
+          <p:nvPr/>
+        </p:nvSpPr>
+        <p:spPr>
+          <a:xfrm>
+            <a:off x="822960" y="2852928"/>
+            <a:ext cx="2991002" cy="365760"/>
+          </a:xfrm>
+          <a:prstGeom prst="rect">
+            <a:avLst/>
+          </a:prstGeom>
+          <a:noFill/>
+        </p:spPr>
+        <p:txBody>
+          <a:bodyPr wrap="square" anchor="t" lIns="0" rIns="0" tIns="0" bIns="0">
+            <a:spAutoFit/>
+          </a:bodyPr>
+          <a:lstStyle/>
+          <a:p>
+            <a:pPr algn="l">
+              <a:spcAft>
+                <a:spcPts val="600"/>
+              </a:spcAft>
+            </a:pPr>
+            <a:r>
+              <a:rPr sz="1800" b="1">
+                <a:solidFill>
+                  <a:srgbClr val="F0EFE9"/>
+                </a:solidFill>
+                <a:latin typeface="Segoe UI"/>
+              </a:rPr>
+              <a:t>Phones on the laptop</a:t>
+            </a:r>
+          </a:p>
+        </p:txBody>
+      </p:sp>
+      <p:sp>
+        <p:nvSpPr>
+          <p:cNvPr id="20" name="Rectangle 19"/>
+          <p:cNvSpPr/>
+          <p:nvPr/>
+        </p:nvSpPr>
+        <p:spPr>
+          <a:xfrm>
+            <a:off x="822960" y="3429000"/>
+            <a:ext cx="118872" cy="19050"/>
+          </a:xfrm>
+          <a:prstGeom prst="rect">
+            <a:avLst/>
+          </a:prstGeom>
+          <a:solidFill>
+            <a:srgbClr val="5FD68A"/>
+          </a:solidFill>
+          <a:ln>
+            <a:noFill/>
+          </a:ln>
+          <a:effectLst/>
+        </p:spPr>
+        <p:style>
+          <a:lnRef idx="1">
+            <a:schemeClr val="accent1"/>
+          </a:lnRef>
+          <a:fillRef idx="3">
+            <a:schemeClr val="accent1"/>
+          </a:fillRef>
+          <a:effectRef idx="2">
+            <a:schemeClr val="accent1"/>
+          </a:effectRef>
+          <a:fontRef idx="minor">
+            <a:schemeClr val="lt1"/>
+          </a:fontRef>
+        </p:style>
+        <p:txBody>
+          <a:bodyPr rtlCol="0" anchor="ctr"/>
+          <a:lstStyle/>
+          <a:p>
+            <a:pPr algn="ctr"/>
+          </a:p>
+        </p:txBody>
+      </p:sp>
+      <p:sp>
+        <p:nvSpPr>
+          <p:cNvPr id="21" name="TextBox 20"/>
+          <p:cNvSpPr txBox="1"/>
+          <p:nvPr/>
+        </p:nvSpPr>
+        <p:spPr>
+          <a:xfrm>
+            <a:off x="1060704" y="3337560"/>
+            <a:ext cx="2753258" cy="274320"/>
+          </a:xfrm>
+          <a:prstGeom prst="rect">
+            <a:avLst/>
+          </a:prstGeom>
+          <a:noFill/>
+        </p:spPr>
+        <p:txBody>
+          <a:bodyPr wrap="square" anchor="t" lIns="0" rIns="0" tIns="0" bIns="0">
+            <a:spAutoFit/>
+          </a:bodyPr>
+          <a:lstStyle/>
+          <a:p>
+            <a:pPr algn="l">
+              <a:lnSpc>
+                <a:spcPct val="115000"/>
+              </a:lnSpc>
+              <a:spcAft>
+                <a:spcPts val="600"/>
+              </a:spcAft>
+            </a:pPr>
+            <a:r>
+              <a:rPr sz="1400" b="0">
+                <a:solidFill>
+                  <a:srgbClr val="F0EFE9"/>
+                </a:solidFill>
+                <a:latin typeface="Segoe UI"/>
+              </a:rPr>
+              <a:t>Mirror each phone</a:t>
+            </a:r>
+          </a:p>
+        </p:txBody>
+      </p:sp>
+      <p:sp>
+        <p:nvSpPr>
+          <p:cNvPr id="22" name="Rectangle 21"/>
+          <p:cNvSpPr/>
+          <p:nvPr/>
+        </p:nvSpPr>
+        <p:spPr>
+          <a:xfrm>
+            <a:off x="822960" y="3776472"/>
+            <a:ext cx="118872" cy="19050"/>
+          </a:xfrm>
+          <a:prstGeom prst="rect">
+            <a:avLst/>
+          </a:prstGeom>
+          <a:solidFill>
+            <a:srgbClr val="5FD68A"/>
+          </a:solidFill>
+          <a:ln>
+            <a:noFill/>
+          </a:ln>
+          <a:effectLst/>
+        </p:spPr>
+        <p:style>
+          <a:lnRef idx="1">
+            <a:schemeClr val="accent1"/>
+          </a:lnRef>
+          <a:fillRef idx="3">
+            <a:schemeClr val="accent1"/>
+          </a:fillRef>
+          <a:effectRef idx="2">
+            <a:schemeClr val="accent1"/>
+          </a:effectRef>
+          <a:fontRef idx="minor">
+            <a:schemeClr val="lt1"/>
+          </a:fontRef>
+        </p:style>
+        <p:txBody>
+          <a:bodyPr rtlCol="0" anchor="ctr"/>
+          <a:lstStyle/>
+          <a:p>
+            <a:pPr algn="ctr"/>
+          </a:p>
+        </p:txBody>
+      </p:sp>
+      <p:sp>
+        <p:nvSpPr>
+          <p:cNvPr id="23" name="TextBox 22"/>
+          <p:cNvSpPr txBox="1"/>
+          <p:nvPr/>
+        </p:nvSpPr>
+        <p:spPr>
+          <a:xfrm>
+            <a:off x="1060704" y="3685032"/>
+            <a:ext cx="2753258" cy="274320"/>
+          </a:xfrm>
+          <a:prstGeom prst="rect">
+            <a:avLst/>
+          </a:prstGeom>
+          <a:noFill/>
+        </p:spPr>
+        <p:txBody>
+          <a:bodyPr wrap="square" anchor="t" lIns="0" rIns="0" tIns="0" bIns="0">
+            <a:spAutoFit/>
+          </a:bodyPr>
+          <a:lstStyle/>
+          <a:p>
+            <a:pPr algn="l">
+              <a:lnSpc>
+                <a:spcPct val="115000"/>
+              </a:lnSpc>
+              <a:spcAft>
+                <a:spcPts val="600"/>
+              </a:spcAft>
+            </a:pPr>
+            <a:r>
+              <a:rPr sz="1400" b="0">
+                <a:solidFill>
+                  <a:srgbClr val="F0EFE9"/>
+                </a:solidFill>
+                <a:latin typeface="Segoe UI"/>
+              </a:rPr>
+              <a:t>Mouse and keys on the phone</a:t>
+            </a:r>
+          </a:p>
+        </p:txBody>
+      </p:sp>
+      <p:sp>
+        <p:nvSpPr>
+          <p:cNvPr id="24" name="Rectangle 23"/>
+          <p:cNvSpPr/>
+          <p:nvPr/>
+        </p:nvSpPr>
+        <p:spPr>
+          <a:xfrm>
+            <a:off x="822960" y="4123944"/>
+            <a:ext cx="118872" cy="19050"/>
+          </a:xfrm>
+          <a:prstGeom prst="rect">
+            <a:avLst/>
+          </a:prstGeom>
+          <a:solidFill>
+            <a:srgbClr val="5FD68A"/>
+          </a:solidFill>
+          <a:ln>
+            <a:noFill/>
+          </a:ln>
+          <a:effectLst/>
+        </p:spPr>
+        <p:style>
+          <a:lnRef idx="1">
+            <a:schemeClr val="accent1"/>
+          </a:lnRef>
+          <a:fillRef idx="3">
+            <a:schemeClr val="accent1"/>
+          </a:fillRef>
+          <a:effectRef idx="2">
+            <a:schemeClr val="accent1"/>
+          </a:effectRef>
+          <a:fontRef idx="minor">
+            <a:schemeClr val="lt1"/>
+          </a:fontRef>
+        </p:style>
+        <p:txBody>
+          <a:bodyPr rtlCol="0" anchor="ctr"/>
+          <a:lstStyle/>
+          <a:p>
+            <a:pPr algn="ctr"/>
+          </a:p>
+        </p:txBody>
+      </p:sp>
+      <p:sp>
+        <p:nvSpPr>
+          <p:cNvPr id="25" name="TextBox 24"/>
+          <p:cNvSpPr txBox="1"/>
+          <p:nvPr/>
+        </p:nvSpPr>
+        <p:spPr>
+          <a:xfrm>
+            <a:off x="1060704" y="4032504"/>
+            <a:ext cx="2753258" cy="274320"/>
+          </a:xfrm>
+          <a:prstGeom prst="rect">
+            <a:avLst/>
+          </a:prstGeom>
+          <a:noFill/>
+        </p:spPr>
+        <p:txBody>
+          <a:bodyPr wrap="square" anchor="t" lIns="0" rIns="0" tIns="0" bIns="0">
+            <a:spAutoFit/>
+          </a:bodyPr>
+          <a:lstStyle/>
+          <a:p>
+            <a:pPr algn="l">
+              <a:lnSpc>
+                <a:spcPct val="115000"/>
+              </a:lnSpc>
+              <a:spcAft>
+                <a:spcPts val="600"/>
+              </a:spcAft>
+            </a:pPr>
+            <a:r>
+              <a:rPr sz="1400" b="0">
+                <a:solidFill>
+                  <a:srgbClr val="F0EFE9"/>
+                </a:solidFill>
+                <a:latin typeface="Segoe UI"/>
+              </a:rPr>
+              <a:t>No reaching over mid-test</a:t>
+            </a:r>
+          </a:p>
+        </p:txBody>
+      </p:sp>
+      <p:sp>
+        <p:nvSpPr>
+          <p:cNvPr id="26" name="Rounded Rectangle 25"/>
+          <p:cNvSpPr/>
+          <p:nvPr/>
+        </p:nvSpPr>
+        <p:spPr>
+          <a:xfrm>
+            <a:off x="4344314" y="2377440"/>
+            <a:ext cx="3503066" cy="2011680"/>
+          </a:xfrm>
+          <a:prstGeom prst="roundRect">
+            <a:avLst>
+              <a:gd name="adj" fmla="val 4000"/>
+            </a:avLst>
+          </a:prstGeom>
+          <a:solidFill>
+            <a:srgbClr val="141612"/>
+          </a:solidFill>
+          <a:ln w="9525">
+            <a:solidFill>
+              <a:srgbClr val="2A2F27"/>
+            </a:solidFill>
+          </a:ln>
+          <a:effectLst/>
+        </p:spPr>
+        <p:style>
+          <a:lnRef idx="1">
+            <a:schemeClr val="accent1"/>
+          </a:lnRef>
+          <a:fillRef idx="3">
+            <a:schemeClr val="accent1"/>
+          </a:fillRef>
+          <a:effectRef idx="2">
+            <a:schemeClr val="accent1"/>
+          </a:effectRef>
+          <a:fontRef idx="minor">
+            <a:schemeClr val="lt1"/>
+          </a:fontRef>
+        </p:style>
+        <p:txBody>
+          <a:bodyPr rtlCol="0" anchor="ctr"/>
+          <a:lstStyle/>
+          <a:p>
+            <a:pPr algn="ctr"/>
+          </a:p>
+        </p:txBody>
+      </p:sp>
+      <p:sp>
+        <p:nvSpPr>
+          <p:cNvPr id="27" name="TextBox 26"/>
+          <p:cNvSpPr txBox="1"/>
+          <p:nvPr/>
+        </p:nvSpPr>
+        <p:spPr>
+          <a:xfrm>
+            <a:off x="4600346" y="2578608"/>
+            <a:ext cx="2991002" cy="274320"/>
+          </a:xfrm>
+          <a:prstGeom prst="rect">
+            <a:avLst/>
+          </a:prstGeom>
+          <a:noFill/>
+        </p:spPr>
+        <p:txBody>
+          <a:bodyPr wrap="square" anchor="t" lIns="0" rIns="0" tIns="0" bIns="0">
+            <a:spAutoFit/>
+          </a:bodyPr>
+          <a:lstStyle/>
+          <a:p>
+            <a:pPr algn="l">
+              <a:spcAft>
+                <a:spcPts val="600"/>
+              </a:spcAft>
+            </a:pPr>
+            <a:r>
+              <a:rPr sz="1100" b="0">
+                <a:solidFill>
+                  <a:srgbClr val="5FD68A"/>
+                </a:solidFill>
+                <a:latin typeface="Consolas"/>
+              </a:rPr>
+              <a:t>FILE TRANSFER</a:t>
+            </a:r>
+          </a:p>
+        </p:txBody>
+      </p:sp>
+      <p:sp>
+        <p:nvSpPr>
+          <p:cNvPr id="28" name="TextBox 27"/>
+          <p:cNvSpPr txBox="1"/>
+          <p:nvPr/>
+        </p:nvSpPr>
+        <p:spPr>
+          <a:xfrm>
+            <a:off x="4600346" y="2852928"/>
+            <a:ext cx="2991002" cy="365760"/>
+          </a:xfrm>
+          <a:prstGeom prst="rect">
+            <a:avLst/>
+          </a:prstGeom>
+          <a:noFill/>
+        </p:spPr>
+        <p:txBody>
+          <a:bodyPr wrap="square" anchor="t" lIns="0" rIns="0" tIns="0" bIns="0">
+            <a:spAutoFit/>
+          </a:bodyPr>
+          <a:lstStyle/>
+          <a:p>
+            <a:pPr algn="l">
+              <a:spcAft>
+                <a:spcPts val="600"/>
+              </a:spcAft>
+            </a:pPr>
+            <a:r>
+              <a:rPr sz="1800" b="1">
+                <a:solidFill>
+                  <a:srgbClr val="F0EFE9"/>
+                </a:solidFill>
+                <a:latin typeface="Segoe UI"/>
+              </a:rPr>
+              <a:t>The 18.6 GB model</a:t>
+            </a:r>
+          </a:p>
+        </p:txBody>
+      </p:sp>
+      <p:sp>
+        <p:nvSpPr>
+          <p:cNvPr id="29" name="Rectangle 28"/>
+          <p:cNvSpPr/>
+          <p:nvPr/>
+        </p:nvSpPr>
+        <p:spPr>
+          <a:xfrm>
+            <a:off x="4600346" y="3429000"/>
+            <a:ext cx="118872" cy="19050"/>
+          </a:xfrm>
+          <a:prstGeom prst="rect">
+            <a:avLst/>
+          </a:prstGeom>
+          <a:solidFill>
+            <a:srgbClr val="5FD68A"/>
+          </a:solidFill>
+          <a:ln>
+            <a:noFill/>
+          </a:ln>
+          <a:effectLst/>
+        </p:spPr>
+        <p:style>
+          <a:lnRef idx="1">
+            <a:schemeClr val="accent1"/>
+          </a:lnRef>
+          <a:fillRef idx="3">
+            <a:schemeClr val="accent1"/>
+          </a:fillRef>
+          <a:effectRef idx="2">
+            <a:schemeClr val="accent1"/>
+          </a:effectRef>
+          <a:fontRef idx="minor">
+            <a:schemeClr val="lt1"/>
+          </a:fontRef>
+        </p:style>
+        <p:txBody>
+          <a:bodyPr rtlCol="0" anchor="ctr"/>
+          <a:lstStyle/>
+          <a:p>
+            <a:pPr algn="ctr"/>
+          </a:p>
+        </p:txBody>
+      </p:sp>
+      <p:sp>
+        <p:nvSpPr>
+          <p:cNvPr id="30" name="TextBox 29"/>
+          <p:cNvSpPr txBox="1"/>
+          <p:nvPr/>
+        </p:nvSpPr>
+        <p:spPr>
+          <a:xfrm>
+            <a:off x="4838090" y="3337560"/>
+            <a:ext cx="2753258" cy="274320"/>
+          </a:xfrm>
+          <a:prstGeom prst="rect">
+            <a:avLst/>
+          </a:prstGeom>
+          <a:noFill/>
+        </p:spPr>
+        <p:txBody>
+          <a:bodyPr wrap="square" anchor="t" lIns="0" rIns="0" tIns="0" bIns="0">
+            <a:spAutoFit/>
+          </a:bodyPr>
+          <a:lstStyle/>
+          <a:p>
+            <a:pPr algn="l">
+              <a:lnSpc>
+                <a:spcPct val="115000"/>
+              </a:lnSpc>
+              <a:spcAft>
+                <a:spcPts val="600"/>
+              </a:spcAft>
+            </a:pPr>
+            <a:r>
+              <a:rPr sz="1400" b="0">
+                <a:solidFill>
+                  <a:srgbClr val="F0EFE9"/>
+                </a:solidFill>
+                <a:latin typeface="Segoe UI"/>
+              </a:rPr>
+              <a:t>Sent through Office Kit</a:t>
+            </a:r>
+          </a:p>
+        </p:txBody>
+      </p:sp>
+      <p:sp>
+        <p:nvSpPr>
+          <p:cNvPr id="31" name="Rectangle 30"/>
+          <p:cNvSpPr/>
+          <p:nvPr/>
+        </p:nvSpPr>
+        <p:spPr>
+          <a:xfrm>
+            <a:off x="4600346" y="3776472"/>
+            <a:ext cx="118872" cy="19050"/>
+          </a:xfrm>
+          <a:prstGeom prst="rect">
+            <a:avLst/>
+          </a:prstGeom>
+          <a:solidFill>
+            <a:srgbClr val="5FD68A"/>
+          </a:solidFill>
+          <a:ln>
+            <a:noFill/>
+          </a:ln>
+          <a:effectLst/>
+        </p:spPr>
+        <p:style>
+          <a:lnRef idx="1">
+            <a:schemeClr val="accent1"/>
+          </a:lnRef>
+          <a:fillRef idx="3">
+            <a:schemeClr val="accent1"/>
+          </a:fillRef>
+          <a:effectRef idx="2">
+            <a:schemeClr val="accent1"/>
+          </a:effectRef>
+          <a:fontRef idx="minor">
+            <a:schemeClr val="lt1"/>
+          </a:fontRef>
+        </p:style>
+        <p:txBody>
+          <a:bodyPr rtlCol="0" anchor="ctr"/>
+          <a:lstStyle/>
+          <a:p>
+            <a:pPr algn="ctr"/>
+          </a:p>
+        </p:txBody>
+      </p:sp>
+      <p:sp>
+        <p:nvSpPr>
+          <p:cNvPr id="32" name="TextBox 31"/>
+          <p:cNvSpPr txBox="1"/>
+          <p:nvPr/>
+        </p:nvSpPr>
+        <p:spPr>
+          <a:xfrm>
+            <a:off x="4838090" y="3685032"/>
+            <a:ext cx="2753258" cy="274320"/>
+          </a:xfrm>
+          <a:prstGeom prst="rect">
+            <a:avLst/>
+          </a:prstGeom>
+          <a:noFill/>
+        </p:spPr>
+        <p:txBody>
+          <a:bodyPr wrap="square" anchor="t" lIns="0" rIns="0" tIns="0" bIns="0">
+            <a:spAutoFit/>
+          </a:bodyPr>
+          <a:lstStyle/>
+          <a:p>
+            <a:pPr algn="l">
+              <a:lnSpc>
+                <a:spcPct val="115000"/>
+              </a:lnSpc>
+              <a:spcAft>
+                <a:spcPts val="600"/>
+              </a:spcAft>
+            </a:pPr>
+            <a:r>
+              <a:rPr sz="1400" b="0">
+                <a:solidFill>
+                  <a:srgbClr val="F0EFE9"/>
+                </a:solidFill>
+                <a:latin typeface="Segoe UI"/>
+              </a:rPr>
+              <a:t>Same checksum on the phone</a:t>
+            </a:r>
+          </a:p>
+        </p:txBody>
+      </p:sp>
+      <p:sp>
+        <p:nvSpPr>
+          <p:cNvPr id="33" name="Rectangle 32"/>
+          <p:cNvSpPr/>
+          <p:nvPr/>
+        </p:nvSpPr>
+        <p:spPr>
+          <a:xfrm>
+            <a:off x="4600346" y="4123944"/>
+            <a:ext cx="118872" cy="19050"/>
+          </a:xfrm>
+          <a:prstGeom prst="rect">
+            <a:avLst/>
+          </a:prstGeom>
+          <a:solidFill>
+            <a:srgbClr val="5FD68A"/>
+          </a:solidFill>
+          <a:ln>
+            <a:noFill/>
+          </a:ln>
+          <a:effectLst/>
+        </p:spPr>
+        <p:style>
+          <a:lnRef idx="1">
+            <a:schemeClr val="accent1"/>
+          </a:lnRef>
+          <a:fillRef idx="3">
+            <a:schemeClr val="accent1"/>
+          </a:fillRef>
+          <a:effectRef idx="2">
+            <a:schemeClr val="accent1"/>
+          </a:effectRef>
+          <a:fontRef idx="minor">
+            <a:schemeClr val="lt1"/>
+          </a:fontRef>
+        </p:style>
+        <p:txBody>
+          <a:bodyPr rtlCol="0" anchor="ctr"/>
+          <a:lstStyle/>
+          <a:p>
+            <a:pPr algn="ctr"/>
+          </a:p>
+        </p:txBody>
+      </p:sp>
+      <p:sp>
+        <p:nvSpPr>
+          <p:cNvPr id="34" name="TextBox 33"/>
+          <p:cNvSpPr txBox="1"/>
+          <p:nvPr/>
+        </p:nvSpPr>
+        <p:spPr>
+          <a:xfrm>
+            <a:off x="4838090" y="4032504"/>
+            <a:ext cx="2753258" cy="274320"/>
+          </a:xfrm>
+          <a:prstGeom prst="rect">
+            <a:avLst/>
+          </a:prstGeom>
+          <a:noFill/>
+        </p:spPr>
+        <p:txBody>
+          <a:bodyPr wrap="square" anchor="t" lIns="0" rIns="0" tIns="0" bIns="0">
+            <a:spAutoFit/>
+          </a:bodyPr>
+          <a:lstStyle/>
+          <a:p>
+            <a:pPr algn="l">
+              <a:lnSpc>
+                <a:spcPct val="115000"/>
+              </a:lnSpc>
+              <a:spcAft>
+                <a:spcPts val="600"/>
+              </a:spcAft>
+            </a:pPr>
+            <a:r>
+              <a:rPr sz="1400" b="0">
+                <a:solidFill>
+                  <a:srgbClr val="F0EFE9"/>
+                </a:solidFill>
+                <a:latin typeface="Segoe UI"/>
+              </a:rPr>
+              <a:t>Once per phone, then kept</a:t>
+            </a:r>
+          </a:p>
+        </p:txBody>
+      </p:sp>
+      <p:sp>
+        <p:nvSpPr>
+          <p:cNvPr id="35" name="Rounded Rectangle 34"/>
+          <p:cNvSpPr/>
+          <p:nvPr/>
+        </p:nvSpPr>
+        <p:spPr>
+          <a:xfrm>
+            <a:off x="8121700" y="2377440"/>
+            <a:ext cx="3503066" cy="2011680"/>
+          </a:xfrm>
+          <a:prstGeom prst="roundRect">
+            <a:avLst>
+              <a:gd name="adj" fmla="val 4000"/>
+            </a:avLst>
+          </a:prstGeom>
+          <a:solidFill>
+            <a:srgbClr val="141612"/>
+          </a:solidFill>
+          <a:ln w="9525">
+            <a:solidFill>
+              <a:srgbClr val="2A2F27"/>
+            </a:solidFill>
+          </a:ln>
+          <a:effectLst/>
+        </p:spPr>
+        <p:style>
+          <a:lnRef idx="1">
+            <a:schemeClr val="accent1"/>
+          </a:lnRef>
+          <a:fillRef idx="3">
+            <a:schemeClr val="accent1"/>
+          </a:fillRef>
+          <a:effectRef idx="2">
+            <a:schemeClr val="accent1"/>
+          </a:effectRef>
+          <a:fontRef idx="minor">
+            <a:schemeClr val="lt1"/>
+          </a:fontRef>
+        </p:style>
+        <p:txBody>
+          <a:bodyPr rtlCol="0" anchor="ctr"/>
+          <a:lstStyle/>
+          <a:p>
+            <a:pPr algn="ctr"/>
+          </a:p>
+        </p:txBody>
+      </p:sp>
+      <p:sp>
+        <p:nvSpPr>
+          <p:cNvPr id="36" name="TextBox 35"/>
+          <p:cNvSpPr txBox="1"/>
+          <p:nvPr/>
+        </p:nvSpPr>
+        <p:spPr>
+          <a:xfrm>
+            <a:off x="8377732" y="2578608"/>
+            <a:ext cx="2991002" cy="274320"/>
+          </a:xfrm>
+          <a:prstGeom prst="rect">
+            <a:avLst/>
+          </a:prstGeom>
+          <a:noFill/>
+        </p:spPr>
+        <p:txBody>
+          <a:bodyPr wrap="square" anchor="t" lIns="0" rIns="0" tIns="0" bIns="0">
+            <a:spAutoFit/>
+          </a:bodyPr>
+          <a:lstStyle/>
+          <a:p>
+            <a:pPr algn="l">
+              <a:spcAft>
+                <a:spcPts val="600"/>
+              </a:spcAft>
+            </a:pPr>
+            <a:r>
+              <a:rPr sz="1100" b="0">
+                <a:solidFill>
+                  <a:srgbClr val="5FD68A"/>
+                </a:solidFill>
+                <a:latin typeface="Consolas"/>
+              </a:rPr>
+              <a:t>TESTING</a:t>
+            </a:r>
+          </a:p>
+        </p:txBody>
+      </p:sp>
+      <p:sp>
+        <p:nvSpPr>
+          <p:cNvPr id="37" name="TextBox 36"/>
+          <p:cNvSpPr txBox="1"/>
+          <p:nvPr/>
+        </p:nvSpPr>
+        <p:spPr>
+          <a:xfrm>
+            <a:off x="8377732" y="2852928"/>
+            <a:ext cx="2991002" cy="365760"/>
+          </a:xfrm>
+          <a:prstGeom prst="rect">
+            <a:avLst/>
+          </a:prstGeom>
+          <a:noFill/>
+        </p:spPr>
+        <p:txBody>
+          <a:bodyPr wrap="square" anchor="t" lIns="0" rIns="0" tIns="0" bIns="0">
+            <a:spAutoFit/>
+          </a:bodyPr>
+          <a:lstStyle/>
+          <a:p>
+            <a:pPr algn="l">
+              <a:spcAft>
+                <a:spcPts val="600"/>
+              </a:spcAft>
+            </a:pPr>
+            <a:r>
+              <a:rPr sz="1800" b="1">
+                <a:solidFill>
+                  <a:srgbClr val="F0EFE9"/>
+                </a:solidFill>
+                <a:latin typeface="Segoe UI"/>
+              </a:rPr>
+              <a:t>Every screen, remotely</a:t>
+            </a:r>
+          </a:p>
+        </p:txBody>
+      </p:sp>
+      <p:sp>
+        <p:nvSpPr>
+          <p:cNvPr id="38" name="Rectangle 37"/>
+          <p:cNvSpPr/>
+          <p:nvPr/>
+        </p:nvSpPr>
+        <p:spPr>
+          <a:xfrm>
+            <a:off x="8377732" y="3429000"/>
+            <a:ext cx="118872" cy="19050"/>
+          </a:xfrm>
+          <a:prstGeom prst="rect">
+            <a:avLst/>
+          </a:prstGeom>
+          <a:solidFill>
+            <a:srgbClr val="5FD68A"/>
+          </a:solidFill>
+          <a:ln>
+            <a:noFill/>
+          </a:ln>
+          <a:effectLst/>
+        </p:spPr>
+        <p:style>
+          <a:lnRef idx="1">
+            <a:schemeClr val="accent1"/>
+          </a:lnRef>
+          <a:fillRef idx="3">
+            <a:schemeClr val="accent1"/>
+          </a:fillRef>
+          <a:effectRef idx="2">
+            <a:schemeClr val="accent1"/>
+          </a:effectRef>
+          <a:fontRef idx="minor">
+            <a:schemeClr val="lt1"/>
+          </a:fontRef>
+        </p:style>
+        <p:txBody>
+          <a:bodyPr rtlCol="0" anchor="ctr"/>
+          <a:lstStyle/>
+          <a:p>
+            <a:pPr algn="ctr"/>
+          </a:p>
+        </p:txBody>
+      </p:sp>
+      <p:sp>
+        <p:nvSpPr>
+          <p:cNvPr id="39" name="TextBox 38"/>
+          <p:cNvSpPr txBox="1"/>
+          <p:nvPr/>
+        </p:nvSpPr>
+        <p:spPr>
+          <a:xfrm>
+            <a:off x="8615476" y="3337560"/>
+            <a:ext cx="2753258" cy="274320"/>
+          </a:xfrm>
+          <a:prstGeom prst="rect">
+            <a:avLst/>
+          </a:prstGeom>
+          <a:noFill/>
+        </p:spPr>
+        <p:txBody>
+          <a:bodyPr wrap="square" anchor="t" lIns="0" rIns="0" tIns="0" bIns="0">
+            <a:spAutoFit/>
+          </a:bodyPr>
+          <a:lstStyle/>
+          <a:p>
+            <a:pPr algn="l">
+              <a:lnSpc>
+                <a:spcPct val="115000"/>
+              </a:lnSpc>
+              <a:spcAft>
+                <a:spcPts val="600"/>
+              </a:spcAft>
+            </a:pPr>
+            <a:r>
+              <a:rPr sz="1400" b="0">
+                <a:solidFill>
+                  <a:srgbClr val="F0EFE9"/>
+                </a:solidFill>
+                <a:latin typeface="Segoe UI"/>
+              </a:rPr>
+              <a:t>Scan to join, Helper screen</a:t>
+            </a:r>
+          </a:p>
+        </p:txBody>
+      </p:sp>
+      <p:sp>
+        <p:nvSpPr>
+          <p:cNvPr id="40" name="Rectangle 39"/>
+          <p:cNvSpPr/>
+          <p:nvPr/>
+        </p:nvSpPr>
+        <p:spPr>
+          <a:xfrm>
+            <a:off x="8377732" y="3776472"/>
+            <a:ext cx="118872" cy="19050"/>
+          </a:xfrm>
+          <a:prstGeom prst="rect">
+            <a:avLst/>
+          </a:prstGeom>
+          <a:solidFill>
+            <a:srgbClr val="5FD68A"/>
+          </a:solidFill>
+          <a:ln>
+            <a:noFill/>
+          </a:ln>
+          <a:effectLst/>
+        </p:spPr>
+        <p:style>
+          <a:lnRef idx="1">
+            <a:schemeClr val="accent1"/>
+          </a:lnRef>
+          <a:fillRef idx="3">
+            <a:schemeClr val="accent1"/>
+          </a:fillRef>
+          <a:effectRef idx="2">
+            <a:schemeClr val="accent1"/>
+          </a:effectRef>
+          <a:fontRef idx="minor">
+            <a:schemeClr val="lt1"/>
+          </a:fontRef>
+        </p:style>
+        <p:txBody>
+          <a:bodyPr rtlCol="0" anchor="ctr"/>
+          <a:lstStyle/>
+          <a:p>
+            <a:pPr algn="ctr"/>
+          </a:p>
+        </p:txBody>
+      </p:sp>
+      <p:sp>
+        <p:nvSpPr>
+          <p:cNvPr id="41" name="TextBox 40"/>
+          <p:cNvSpPr txBox="1"/>
+          <p:nvPr/>
+        </p:nvSpPr>
+        <p:spPr>
+          <a:xfrm>
+            <a:off x="8615476" y="3685032"/>
+            <a:ext cx="2753258" cy="274320"/>
+          </a:xfrm>
+          <a:prstGeom prst="rect">
+            <a:avLst/>
+          </a:prstGeom>
+          <a:noFill/>
+        </p:spPr>
+        <p:txBody>
+          <a:bodyPr wrap="square" anchor="t" lIns="0" rIns="0" tIns="0" bIns="0">
+            <a:spAutoFit/>
+          </a:bodyPr>
+          <a:lstStyle/>
+          <a:p>
+            <a:pPr algn="l">
+              <a:lnSpc>
+                <a:spcPct val="115000"/>
+              </a:lnSpc>
+              <a:spcAft>
+                <a:spcPts val="600"/>
+              </a:spcAft>
+            </a:pPr>
+            <a:r>
+              <a:rPr sz="1400" b="0">
+                <a:solidFill>
+                  <a:srgbClr val="F0EFE9"/>
+                </a:solidFill>
+                <a:latin typeface="Segoe UI"/>
+              </a:rPr>
+              <a:t>Light and dark, Speed card</a:t>
+            </a:r>
+          </a:p>
+        </p:txBody>
+      </p:sp>
+      <p:sp>
+        <p:nvSpPr>
+          <p:cNvPr id="42" name="Rectangle 41"/>
+          <p:cNvSpPr/>
+          <p:nvPr/>
+        </p:nvSpPr>
+        <p:spPr>
+          <a:xfrm>
+            <a:off x="8377732" y="4123944"/>
+            <a:ext cx="118872" cy="19050"/>
+          </a:xfrm>
+          <a:prstGeom prst="rect">
+            <a:avLst/>
+          </a:prstGeom>
+          <a:solidFill>
+            <a:srgbClr val="5FD68A"/>
+          </a:solidFill>
+          <a:ln>
+            <a:noFill/>
+          </a:ln>
+          <a:effectLst/>
+        </p:spPr>
+        <p:style>
+          <a:lnRef idx="1">
+            <a:schemeClr val="accent1"/>
+          </a:lnRef>
+          <a:fillRef idx="3">
+            <a:schemeClr val="accent1"/>
+          </a:fillRef>
+          <a:effectRef idx="2">
+            <a:schemeClr val="accent1"/>
+          </a:effectRef>
+          <a:fontRef idx="minor">
+            <a:schemeClr val="lt1"/>
+          </a:fontRef>
+        </p:style>
+        <p:txBody>
+          <a:bodyPr rtlCol="0" anchor="ctr"/>
+          <a:lstStyle/>
+          <a:p>
+            <a:pPr algn="ctr"/>
+          </a:p>
+        </p:txBody>
+      </p:sp>
+      <p:sp>
+        <p:nvSpPr>
+          <p:cNvPr id="43" name="TextBox 42"/>
+          <p:cNvSpPr txBox="1"/>
+          <p:nvPr/>
+        </p:nvSpPr>
+        <p:spPr>
+          <a:xfrm>
+            <a:off x="8615476" y="4032504"/>
+            <a:ext cx="2753258" cy="274320"/>
+          </a:xfrm>
+          <a:prstGeom prst="rect">
+            <a:avLst/>
+          </a:prstGeom>
+          <a:noFill/>
+        </p:spPr>
+        <p:txBody>
+          <a:bodyPr wrap="square" anchor="t" lIns="0" rIns="0" tIns="0" bIns="0">
+            <a:spAutoFit/>
+          </a:bodyPr>
+          <a:lstStyle/>
+          <a:p>
+            <a:pPr algn="l">
+              <a:lnSpc>
+                <a:spcPct val="115000"/>
+              </a:lnSpc>
+              <a:spcAft>
+                <a:spcPts val="600"/>
+              </a:spcAft>
+            </a:pPr>
+            <a:r>
+              <a:rPr sz="1400" b="0">
+                <a:solidFill>
+                  <a:srgbClr val="F0EFE9"/>
+                </a:solidFill>
+                <a:latin typeface="Segoe UI"/>
+              </a:rPr>
+              <a:t>Heat during a 30B run</a:t>
+            </a:r>
+          </a:p>
+        </p:txBody>
+      </p:sp>
+      <p:sp>
+        <p:nvSpPr>
+          <p:cNvPr id="44" name="Rounded Rectangle 43"/>
+          <p:cNvSpPr/>
+          <p:nvPr/>
+        </p:nvSpPr>
+        <p:spPr>
+          <a:xfrm>
+            <a:off x="566928" y="4572000"/>
+            <a:ext cx="11057839" cy="1417320"/>
+          </a:xfrm>
+          <a:prstGeom prst="roundRect">
+            <a:avLst>
+              <a:gd name="adj" fmla="val 4000"/>
+            </a:avLst>
+          </a:prstGeom>
+          <a:solidFill>
+            <a:srgbClr val="141612"/>
+          </a:solidFill>
+          <a:ln w="9525">
+            <a:solidFill>
+              <a:srgbClr val="2A2F27"/>
+            </a:solidFill>
+          </a:ln>
+          <a:effectLst/>
+        </p:spPr>
+        <p:style>
+          <a:lnRef idx="1">
+            <a:schemeClr val="accent1"/>
+          </a:lnRef>
+          <a:fillRef idx="3">
+            <a:schemeClr val="accent1"/>
+          </a:fillRef>
+          <a:effectRef idx="2">
+            <a:schemeClr val="accent1"/>
+          </a:effectRef>
+          <a:fontRef idx="minor">
+            <a:schemeClr val="lt1"/>
+          </a:fontRef>
+        </p:style>
+        <p:txBody>
+          <a:bodyPr rtlCol="0" anchor="ctr"/>
+          <a:lstStyle/>
+          <a:p>
+            <a:pPr algn="ctr"/>
+          </a:p>
+        </p:txBody>
+      </p:sp>
+      <p:sp>
+        <p:nvSpPr>
+          <p:cNvPr id="45" name="TextBox 44"/>
+          <p:cNvSpPr txBox="1"/>
+          <p:nvPr/>
+        </p:nvSpPr>
+        <p:spPr>
+          <a:xfrm>
+            <a:off x="841248" y="4754880"/>
+            <a:ext cx="2560320" cy="274320"/>
+          </a:xfrm>
+          <a:prstGeom prst="rect">
+            <a:avLst/>
+          </a:prstGeom>
+          <a:noFill/>
+        </p:spPr>
+        <p:txBody>
+          <a:bodyPr wrap="square" anchor="t" lIns="0" rIns="0" tIns="0" bIns="0">
+            <a:spAutoFit/>
+          </a:bodyPr>
+          <a:lstStyle/>
+          <a:p>
+            <a:pPr algn="l">
+              <a:spcAft>
+                <a:spcPts val="600"/>
+              </a:spcAft>
+            </a:pPr>
+            <a:r>
+              <a:rPr sz="1100" b="0">
+                <a:solidFill>
+                  <a:srgbClr val="969C90"/>
+                </a:solidFill>
+                <a:latin typeface="Consolas"/>
+              </a:rPr>
+              <a:t>MOVING 18.6 GB</a:t>
+            </a:r>
+          </a:p>
+        </p:txBody>
+      </p:sp>
+      <p:sp>
+        <p:nvSpPr>
+          <p:cNvPr id="46" name="TextBox 45"/>
+          <p:cNvSpPr txBox="1"/>
+          <p:nvPr/>
+        </p:nvSpPr>
+        <p:spPr>
+          <a:xfrm>
+            <a:off x="3310128" y="4754880"/>
+            <a:ext cx="2560320" cy="274320"/>
+          </a:xfrm>
+          <a:prstGeom prst="rect">
+            <a:avLst/>
+          </a:prstGeom>
+          <a:noFill/>
+        </p:spPr>
+        <p:txBody>
+          <a:bodyPr wrap="square" anchor="t" lIns="0" rIns="0" tIns="0" bIns="0">
+            <a:spAutoFit/>
+          </a:bodyPr>
+          <a:lstStyle/>
+          <a:p>
+            <a:pPr algn="l">
+              <a:spcAft>
+                <a:spcPts val="600"/>
+              </a:spcAft>
+            </a:pPr>
+            <a:r>
+              <a:rPr sz="1100" b="0">
+                <a:solidFill>
+                  <a:srgbClr val="5FD68A"/>
+                </a:solidFill>
+                <a:latin typeface="Consolas"/>
+              </a:rPr>
+              <a:t>OFFICE KIT</a:t>
+            </a:r>
+          </a:p>
+        </p:txBody>
+      </p:sp>
+      <p:sp>
+        <p:nvSpPr>
+          <p:cNvPr id="47" name="TextBox 46"/>
+          <p:cNvSpPr txBox="1"/>
+          <p:nvPr/>
+        </p:nvSpPr>
+        <p:spPr>
+          <a:xfrm>
+            <a:off x="6053328" y="4754880"/>
+            <a:ext cx="2560320" cy="274320"/>
+          </a:xfrm>
+          <a:prstGeom prst="rect">
+            <a:avLst/>
+          </a:prstGeom>
+          <a:noFill/>
+        </p:spPr>
+        <p:txBody>
+          <a:bodyPr wrap="square" anchor="t" lIns="0" rIns="0" tIns="0" bIns="0">
+            <a:spAutoFit/>
+          </a:bodyPr>
+          <a:lstStyle/>
+          <a:p>
+            <a:pPr algn="l">
+              <a:spcAft>
+                <a:spcPts val="600"/>
+              </a:spcAft>
+            </a:pPr>
+            <a:r>
+              <a:rPr sz="1100" b="0">
+                <a:solidFill>
+                  <a:srgbClr val="5FD68A"/>
+                </a:solidFill>
+                <a:latin typeface="Consolas"/>
+              </a:rPr>
+              <a:t>ADB PUSH</a:t>
+            </a:r>
+          </a:p>
+        </p:txBody>
+      </p:sp>
+      <p:sp>
+        <p:nvSpPr>
+          <p:cNvPr id="48" name="TextBox 47"/>
+          <p:cNvSpPr txBox="1"/>
+          <p:nvPr/>
+        </p:nvSpPr>
+        <p:spPr>
+          <a:xfrm>
+            <a:off x="8796528" y="4754880"/>
+            <a:ext cx="2560320" cy="274320"/>
+          </a:xfrm>
+          <a:prstGeom prst="rect">
+            <a:avLst/>
+          </a:prstGeom>
+          <a:noFill/>
+        </p:spPr>
+        <p:txBody>
+          <a:bodyPr wrap="square" anchor="t" lIns="0" rIns="0" tIns="0" bIns="0">
+            <a:spAutoFit/>
+          </a:bodyPr>
+          <a:lstStyle/>
+          <a:p>
+            <a:pPr algn="l">
+              <a:spcAft>
+                <a:spcPts val="600"/>
+              </a:spcAft>
+            </a:pPr>
+            <a:r>
+              <a:rPr sz="1100" b="0">
+                <a:solidFill>
+                  <a:srgbClr val="5FD68A"/>
+                </a:solidFill>
+                <a:latin typeface="Consolas"/>
+              </a:rPr>
+              <a:t>IN-APP DOWNLOAD</a:t>
+            </a:r>
+          </a:p>
+        </p:txBody>
+      </p:sp>
+      <p:sp>
+        <p:nvSpPr>
+          <p:cNvPr id="49" name="TextBox 48"/>
+          <p:cNvSpPr txBox="1"/>
+          <p:nvPr/>
+        </p:nvSpPr>
+        <p:spPr>
+          <a:xfrm>
+            <a:off x="841248" y="5047488"/>
+            <a:ext cx="2560320" cy="274320"/>
+          </a:xfrm>
+          <a:prstGeom prst="rect">
+            <a:avLst/>
+          </a:prstGeom>
+          <a:noFill/>
+        </p:spPr>
+        <p:txBody>
+          <a:bodyPr wrap="square" anchor="t" lIns="0" rIns="0" tIns="0" bIns="0">
+            <a:spAutoFit/>
+          </a:bodyPr>
+          <a:lstStyle/>
+          <a:p>
+            <a:pPr algn="l">
+              <a:spcAft>
+                <a:spcPts val="600"/>
+              </a:spcAft>
+            </a:pPr>
+            <a:r>
+              <a:rPr sz="1300" b="1">
+                <a:solidFill>
+                  <a:srgbClr val="F0EFE9"/>
+                </a:solidFill>
+                <a:latin typeface="Segoe UI"/>
+              </a:rPr>
+              <a:t>Time</a:t>
+            </a:r>
+          </a:p>
+        </p:txBody>
+      </p:sp>
+      <p:sp>
+        <p:nvSpPr>
+          <p:cNvPr id="50" name="TextBox 49"/>
+          <p:cNvSpPr txBox="1"/>
+          <p:nvPr/>
+        </p:nvSpPr>
+        <p:spPr>
+          <a:xfrm>
+            <a:off x="3310128" y="5047488"/>
+            <a:ext cx="2560320" cy="274320"/>
+          </a:xfrm>
+          <a:prstGeom prst="rect">
+            <a:avLst/>
+          </a:prstGeom>
+          <a:noFill/>
+        </p:spPr>
+        <p:txBody>
+          <a:bodyPr wrap="square" anchor="t" lIns="0" rIns="0" tIns="0" bIns="0">
+            <a:spAutoFit/>
+          </a:bodyPr>
+          <a:lstStyle/>
+          <a:p>
+            <a:pPr algn="l">
+              <a:spcAft>
+                <a:spcPts val="600"/>
+              </a:spcAft>
+            </a:pPr>
+            <a:r>
+              <a:rPr sz="1300" b="0">
+                <a:solidFill>
+                  <a:srgbClr val="E8B84B"/>
+                </a:solidFill>
+                <a:latin typeface="Consolas"/>
+              </a:rPr>
+              <a:t>[fill in]</a:t>
+            </a:r>
+          </a:p>
+        </p:txBody>
+      </p:sp>
+      <p:sp>
+        <p:nvSpPr>
+          <p:cNvPr id="51" name="TextBox 50"/>
+          <p:cNvSpPr txBox="1"/>
+          <p:nvPr/>
+        </p:nvSpPr>
+        <p:spPr>
+          <a:xfrm>
+            <a:off x="6053328" y="5047488"/>
+            <a:ext cx="2560320" cy="274320"/>
+          </a:xfrm>
+          <a:prstGeom prst="rect">
+            <a:avLst/>
+          </a:prstGeom>
+          <a:noFill/>
+        </p:spPr>
+        <p:txBody>
+          <a:bodyPr wrap="square" anchor="t" lIns="0" rIns="0" tIns="0" bIns="0">
+            <a:spAutoFit/>
+          </a:bodyPr>
+          <a:lstStyle/>
+          <a:p>
+            <a:pPr algn="l">
+              <a:spcAft>
+                <a:spcPts val="600"/>
+              </a:spcAft>
+            </a:pPr>
+            <a:r>
+              <a:rPr sz="1300" b="0">
+                <a:solidFill>
+                  <a:srgbClr val="E8B84B"/>
+                </a:solidFill>
+                <a:latin typeface="Consolas"/>
+              </a:rPr>
+              <a:t>[fill in]</a:t>
+            </a:r>
+          </a:p>
+        </p:txBody>
+      </p:sp>
+      <p:sp>
+        <p:nvSpPr>
+          <p:cNvPr id="52" name="TextBox 51"/>
+          <p:cNvSpPr txBox="1"/>
+          <p:nvPr/>
+        </p:nvSpPr>
+        <p:spPr>
+          <a:xfrm>
+            <a:off x="8796528" y="5047488"/>
+            <a:ext cx="2560320" cy="274320"/>
+          </a:xfrm>
+          <a:prstGeom prst="rect">
+            <a:avLst/>
+          </a:prstGeom>
+          <a:noFill/>
+        </p:spPr>
+        <p:txBody>
+          <a:bodyPr wrap="square" anchor="t" lIns="0" rIns="0" tIns="0" bIns="0">
+            <a:spAutoFit/>
+          </a:bodyPr>
+          <a:lstStyle/>
+          <a:p>
+            <a:pPr algn="l">
+              <a:spcAft>
+                <a:spcPts val="600"/>
+              </a:spcAft>
+            </a:pPr>
+            <a:r>
+              <a:rPr sz="1300" b="0">
+                <a:solidFill>
+                  <a:srgbClr val="F0EFE9"/>
+                </a:solidFill>
+                <a:latin typeface="Consolas"/>
+              </a:rPr>
+              <a:t>~13 min · 24 MB/s</a:t>
+            </a:r>
+          </a:p>
+        </p:txBody>
+      </p:sp>
+      <p:sp>
+        <p:nvSpPr>
+          <p:cNvPr id="53" name="TextBox 52"/>
+          <p:cNvSpPr txBox="1"/>
+          <p:nvPr/>
+        </p:nvSpPr>
+        <p:spPr>
+          <a:xfrm>
+            <a:off x="841248" y="5340096"/>
+            <a:ext cx="2560320" cy="274320"/>
+          </a:xfrm>
+          <a:prstGeom prst="rect">
+            <a:avLst/>
+          </a:prstGeom>
+          <a:noFill/>
+        </p:spPr>
+        <p:txBody>
+          <a:bodyPr wrap="square" anchor="t" lIns="0" rIns="0" tIns="0" bIns="0">
+            <a:spAutoFit/>
+          </a:bodyPr>
+          <a:lstStyle/>
+          <a:p>
+            <a:pPr algn="l">
+              <a:spcAft>
+                <a:spcPts val="600"/>
+              </a:spcAft>
+            </a:pPr>
+            <a:r>
+              <a:rPr sz="1300" b="1">
+                <a:solidFill>
+                  <a:srgbClr val="F0EFE9"/>
+                </a:solidFill>
+                <a:latin typeface="Segoe UI"/>
+              </a:rPr>
+              <a:t>Needs</a:t>
+            </a:r>
+          </a:p>
+        </p:txBody>
+      </p:sp>
+      <p:sp>
+        <p:nvSpPr>
+          <p:cNvPr id="54" name="TextBox 53"/>
+          <p:cNvSpPr txBox="1"/>
+          <p:nvPr/>
+        </p:nvSpPr>
+        <p:spPr>
+          <a:xfrm>
+            <a:off x="3310128" y="5340096"/>
+            <a:ext cx="2560320" cy="274320"/>
+          </a:xfrm>
+          <a:prstGeom prst="rect">
+            <a:avLst/>
+          </a:prstGeom>
+          <a:noFill/>
+        </p:spPr>
+        <p:txBody>
+          <a:bodyPr wrap="square" anchor="t" lIns="0" rIns="0" tIns="0" bIns="0">
+            <a:spAutoFit/>
+          </a:bodyPr>
+          <a:lstStyle/>
+          <a:p>
+            <a:pPr algn="l">
+              <a:spcAft>
+                <a:spcPts val="600"/>
+              </a:spcAft>
+            </a:pPr>
+            <a:r>
+              <a:rPr sz="1300" b="0">
+                <a:solidFill>
+                  <a:srgbClr val="C2C6BC"/>
+                </a:solidFill>
+                <a:latin typeface="Segoe UI"/>
+              </a:rPr>
+              <a:t>Office Kit on both</a:t>
+            </a:r>
+          </a:p>
+        </p:txBody>
+      </p:sp>
+      <p:sp>
+        <p:nvSpPr>
+          <p:cNvPr id="55" name="TextBox 54"/>
+          <p:cNvSpPr txBox="1"/>
+          <p:nvPr/>
+        </p:nvSpPr>
+        <p:spPr>
+          <a:xfrm>
+            <a:off x="6053328" y="5340096"/>
+            <a:ext cx="2560320" cy="274320"/>
+          </a:xfrm>
+          <a:prstGeom prst="rect">
+            <a:avLst/>
+          </a:prstGeom>
+          <a:noFill/>
+        </p:spPr>
+        <p:txBody>
+          <a:bodyPr wrap="square" anchor="t" lIns="0" rIns="0" tIns="0" bIns="0">
+            <a:spAutoFit/>
+          </a:bodyPr>
+          <a:lstStyle/>
+          <a:p>
+            <a:pPr algn="l">
+              <a:spcAft>
+                <a:spcPts val="600"/>
+              </a:spcAft>
+            </a:pPr>
+            <a:r>
+              <a:rPr sz="1300" b="0">
+                <a:solidFill>
+                  <a:srgbClr val="C2C6BC"/>
+                </a:solidFill>
+                <a:latin typeface="Segoe UI"/>
+              </a:rPr>
+              <a:t>USB debugging</a:t>
+            </a:r>
+          </a:p>
+        </p:txBody>
+      </p:sp>
+      <p:sp>
+        <p:nvSpPr>
+          <p:cNvPr id="56" name="TextBox 55"/>
+          <p:cNvSpPr txBox="1"/>
+          <p:nvPr/>
+        </p:nvSpPr>
+        <p:spPr>
+          <a:xfrm>
+            <a:off x="8796528" y="5340096"/>
+            <a:ext cx="2560320" cy="274320"/>
+          </a:xfrm>
+          <a:prstGeom prst="rect">
+            <a:avLst/>
+          </a:prstGeom>
+          <a:noFill/>
+        </p:spPr>
+        <p:txBody>
+          <a:bodyPr wrap="square" anchor="t" lIns="0" rIns="0" tIns="0" bIns="0">
+            <a:spAutoFit/>
+          </a:bodyPr>
+          <a:lstStyle/>
+          <a:p>
+            <a:pPr algn="l">
+              <a:spcAft>
+                <a:spcPts val="600"/>
+              </a:spcAft>
+            </a:pPr>
+            <a:r>
+              <a:rPr sz="1300" b="0">
+                <a:solidFill>
+                  <a:srgbClr val="C2C6BC"/>
+                </a:solidFill>
+                <a:latin typeface="Segoe UI"/>
+              </a:rPr>
+              <a:t>the app, same network</a:t>
+            </a:r>
+          </a:p>
+        </p:txBody>
+      </p:sp>
+      <p:sp>
+        <p:nvSpPr>
+          <p:cNvPr id="57" name="TextBox 56"/>
+          <p:cNvSpPr txBox="1"/>
+          <p:nvPr/>
+        </p:nvSpPr>
+        <p:spPr>
+          <a:xfrm>
+            <a:off x="841248" y="5632704"/>
+            <a:ext cx="2560320" cy="274320"/>
+          </a:xfrm>
+          <a:prstGeom prst="rect">
+            <a:avLst/>
+          </a:prstGeom>
+          <a:noFill/>
+        </p:spPr>
+        <p:txBody>
+          <a:bodyPr wrap="square" anchor="t" lIns="0" rIns="0" tIns="0" bIns="0">
+            <a:spAutoFit/>
+          </a:bodyPr>
+          <a:lstStyle/>
+          <a:p>
+            <a:pPr algn="l">
+              <a:spcAft>
+                <a:spcPts val="600"/>
+              </a:spcAft>
+            </a:pPr>
+            <a:r>
+              <a:rPr sz="1300" b="1">
+                <a:solidFill>
+                  <a:srgbClr val="F0EFE9"/>
+                </a:solidFill>
+                <a:latin typeface="Segoe UI"/>
+              </a:rPr>
+              <a:t>Best for</a:t>
+            </a:r>
+          </a:p>
+        </p:txBody>
+      </p:sp>
+      <p:sp>
+        <p:nvSpPr>
+          <p:cNvPr id="58" name="TextBox 57"/>
+          <p:cNvSpPr txBox="1"/>
+          <p:nvPr/>
+        </p:nvSpPr>
+        <p:spPr>
+          <a:xfrm>
+            <a:off x="3310128" y="5632704"/>
+            <a:ext cx="2560320" cy="274320"/>
+          </a:xfrm>
+          <a:prstGeom prst="rect">
+            <a:avLst/>
+          </a:prstGeom>
+          <a:noFill/>
+        </p:spPr>
+        <p:txBody>
+          <a:bodyPr wrap="square" anchor="t" lIns="0" rIns="0" tIns="0" bIns="0">
+            <a:spAutoFit/>
+          </a:bodyPr>
+          <a:lstStyle/>
+          <a:p>
+            <a:pPr algn="l">
+              <a:spcAft>
+                <a:spcPts val="600"/>
+              </a:spcAft>
+            </a:pPr>
+            <a:r>
+              <a:rPr sz="1300" b="0">
+                <a:solidFill>
+                  <a:srgbClr val="C2C6BC"/>
+                </a:solidFill>
+                <a:latin typeface="Segoe UI"/>
+              </a:rPr>
+              <a:t>files, testing by hand</a:t>
+            </a:r>
+          </a:p>
+        </p:txBody>
+      </p:sp>
+      <p:sp>
+        <p:nvSpPr>
+          <p:cNvPr id="59" name="TextBox 58"/>
+          <p:cNvSpPr txBox="1"/>
+          <p:nvPr/>
+        </p:nvSpPr>
+        <p:spPr>
+          <a:xfrm>
+            <a:off x="6053328" y="5632704"/>
+            <a:ext cx="2560320" cy="274320"/>
+          </a:xfrm>
+          <a:prstGeom prst="rect">
+            <a:avLst/>
+          </a:prstGeom>
+          <a:noFill/>
+        </p:spPr>
+        <p:txBody>
+          <a:bodyPr wrap="square" anchor="t" lIns="0" rIns="0" tIns="0" bIns="0">
+            <a:spAutoFit/>
+          </a:bodyPr>
+          <a:lstStyle/>
+          <a:p>
+            <a:pPr algn="l">
+              <a:spcAft>
+                <a:spcPts val="600"/>
+              </a:spcAft>
+            </a:pPr>
+            <a:r>
+              <a:rPr sz="1300" b="0">
+                <a:solidFill>
+                  <a:srgbClr val="C2C6BC"/>
+                </a:solidFill>
+                <a:latin typeface="Segoe UI"/>
+              </a:rPr>
+              <a:t>scripts and logs</a:t>
+            </a:r>
+          </a:p>
+        </p:txBody>
+      </p:sp>
+      <p:sp>
+        <p:nvSpPr>
+          <p:cNvPr id="60" name="TextBox 59"/>
+          <p:cNvSpPr txBox="1"/>
+          <p:nvPr/>
+        </p:nvSpPr>
+        <p:spPr>
+          <a:xfrm>
+            <a:off x="8796528" y="5632704"/>
+            <a:ext cx="2560320" cy="274320"/>
+          </a:xfrm>
+          <a:prstGeom prst="rect">
+            <a:avLst/>
+          </a:prstGeom>
+          <a:noFill/>
+        </p:spPr>
+        <p:txBody>
+          <a:bodyPr wrap="square" anchor="t" lIns="0" rIns="0" tIns="0" bIns="0">
+            <a:spAutoFit/>
+          </a:bodyPr>
+          <a:lstStyle/>
+          <a:p>
+            <a:pPr algn="l">
+              <a:spcAft>
+                <a:spcPts val="600"/>
+              </a:spcAft>
+            </a:pPr>
+            <a:r>
+              <a:rPr sz="1300" b="0">
+                <a:solidFill>
+                  <a:srgbClr val="C2C6BC"/>
+                </a:solidFill>
+                <a:latin typeface="Segoe UI"/>
+              </a:rPr>
+              <a:t>users, no tools</a:t>
+            </a:r>
+          </a:p>
+        </p:txBody>
+      </p:sp>
+      <p:sp>
+        <p:nvSpPr>
+          <p:cNvPr id="61" name="TextBox 60"/>
+          <p:cNvSpPr txBox="1"/>
+          <p:nvPr/>
+        </p:nvSpPr>
+        <p:spPr>
+          <a:xfrm>
+            <a:off x="566928" y="6291072"/>
+            <a:ext cx="4937760" cy="274320"/>
+          </a:xfrm>
+          <a:prstGeom prst="rect">
+            <a:avLst/>
+          </a:prstGeom>
+          <a:noFill/>
+        </p:spPr>
+        <p:txBody>
+          <a:bodyPr wrap="square" anchor="t" lIns="0" rIns="0" tIns="0" bIns="0">
+            <a:spAutoFit/>
+          </a:bodyPr>
+          <a:lstStyle/>
+          <a:p>
+            <a:pPr algn="l">
+              <a:spcAft>
+                <a:spcPts val="600"/>
+              </a:spcAft>
+            </a:pPr>
+            <a:r>
+              <a:rPr sz="1300" b="0">
+                <a:solidFill>
+                  <a:srgbClr val="969C90"/>
+                </a:solidFill>
+                <a:latin typeface="Consolas"/>
+              </a:rPr>
+              <a:t>MeshAI</a:t>
+            </a:r>
+          </a:p>
+        </p:txBody>
+      </p:sp>
+      <p:sp>
+        <p:nvSpPr>
+          <p:cNvPr id="62" name="TextBox 61"/>
+          <p:cNvSpPr txBox="1"/>
+          <p:nvPr/>
+        </p:nvSpPr>
+        <p:spPr>
+          <a:xfrm>
+            <a:off x="5772607" y="6291072"/>
+            <a:ext cx="5852160" cy="274320"/>
+          </a:xfrm>
+          <a:prstGeom prst="rect">
+            <a:avLst/>
+          </a:prstGeom>
+          <a:noFill/>
+        </p:spPr>
+        <p:txBody>
+          <a:bodyPr wrap="square" anchor="t" lIns="0" rIns="0" tIns="0" bIns="0">
+            <a:spAutoFit/>
+          </a:bodyPr>
+          <a:lstStyle/>
+          <a:p>
+            <a:pPr algn="r">
+              <a:spcAft>
+                <a:spcPts val="600"/>
+              </a:spcAft>
+            </a:pPr>
+            <a:r>
+              <a:rPr sz="1300" b="0">
+                <a:solidFill>
+                  <a:srgbClr val="969C90"/>
+                </a:solidFill>
+                <a:latin typeface="Consolas"/>
+              </a:rPr>
+              <a:t>in-app measured 26 Sep · the others to be timed</a:t>
+            </a:r>
+          </a:p>
+        </p:txBody>
+      </p:sp>
+    </p:spTree>
+  </p:cSld>
+  <p:clrMapOvr>
+    <a:masterClrMapping/>
+  </p:clrMapOvr>
+  <mc:AlternateContent xmlns:mc="http://schemas.openxmlformats.org/markup-compatibility/2006" xmlns:p14="http://schemas.microsoft.com/office/powerpoint/2010/main" xmlns:p159="http://schemas.microsoft.com/office/powerpoint/2015/09/main">
+    <mc:Choice Requires="p14">
+      <p:transition spd="slow" p14:dur="800">
+        <p159:morph option="byObject"/>
+      </p:transition>
+    </mc:Choice>
+    <mc:Fallback>
+      <p:transition spd="slow">
+        <p:fade/>
+      </p:transition>
+    </mc:Fallback>
+  </mc:AlternateContent>
+</p:sld>
+</file>
+
+<file path=ppt/slides/slide16.xml><?xml version="1.0" encoding="utf-8"?>
 <p:sld xmlns:a="http://schemas.openxmlformats.org/drawingml/2006/main" xmlns:p="http://schemas.openxmlformats.org/presentationml/2006/main" xmlns:r="http://schemas.openxmlformats.org/officeDocument/2006/relationships">
   <p:cSld>
     <p:spTree>

--- a/docs/deck-editable/MeshAI_Deck.pptx
+++ b/docs/deck-editable/MeshAI_Deck.pptx
@@ -16827,7 +16827,7 @@
                 </a:solidFill>
                 <a:latin typeface="Consolas"/>
               </a:rPr>
-              <a:t>11 · HOW WE BUILT IT</a:t>
+              <a:t>11 · HOW WE TESTED IT</a:t>
             </a:r>
           </a:p>
         </p:txBody>
@@ -16869,7 +16869,7 @@
                 </a:solidFill>
                 <a:latin typeface="Segoe UI"/>
               </a:rPr>
-              <a:t>One laptop drove both phones.</a:t>
+              <a:t>We tested the phones from the laptop.</a:t>
             </a:r>
           </a:p>
         </p:txBody>
@@ -16911,7 +16911,7 @@
                 </a:solidFill>
                 <a:latin typeface="Segoe UI"/>
               </a:rPr>
-              <a:t>Through iQOO Office Kit, the bridge between the laptop and the phones while we built and tested.</a:t>
+              <a:t>Through iQOO Office Kit: every phone screen seen and driven from the laptop while we built.</a:t>
             </a:r>
           </a:p>
         </p:txBody>
@@ -17042,7 +17042,7 @@
                 </a:solidFill>
                 <a:latin typeface="Consolas"/>
               </a:rPr>
-              <a:t>REMOTE CONTROL</a:t>
+              <a:t>DRIVING IT</a:t>
             </a:r>
           </a:p>
         </p:txBody>
@@ -17081,7 +17081,7 @@
                 </a:solidFill>
                 <a:latin typeface="Segoe UI"/>
               </a:rPr>
-              <a:t>Phones on the laptop</a:t>
+              <a:t>Mouse and keys</a:t>
             </a:r>
           </a:p>
         </p:txBody>
@@ -17094,7 +17094,7 @@
         </p:nvSpPr>
         <p:spPr>
           <a:xfrm>
-            <a:off x="822960" y="3429000"/>
+            <a:off x="822960" y="3383280"/>
             <a:ext cx="118872" cy="19050"/>
           </a:xfrm>
           <a:prstGeom prst="rect">
@@ -17138,7 +17138,7 @@
         </p:nvSpPr>
         <p:spPr>
           <a:xfrm>
-            <a:off x="1060704" y="3337560"/>
+            <a:off x="1060704" y="3291840"/>
             <a:ext cx="2753258" cy="274320"/>
           </a:xfrm>
           <a:prstGeom prst="rect">
@@ -17167,7 +17167,7 @@
                 </a:solidFill>
                 <a:latin typeface="Segoe UI"/>
               </a:rPr>
-              <a:t>Mirror each phone</a:t>
+              <a:t>Pairing and joining</a:t>
             </a:r>
           </a:p>
         </p:txBody>
@@ -17180,7 +17180,7 @@
         </p:nvSpPr>
         <p:spPr>
           <a:xfrm>
-            <a:off x="822960" y="3776472"/>
+            <a:off x="822960" y="3730752"/>
             <a:ext cx="118872" cy="19050"/>
           </a:xfrm>
           <a:prstGeom prst="rect">
@@ -17224,7 +17224,7 @@
         </p:nvSpPr>
         <p:spPr>
           <a:xfrm>
-            <a:off x="1060704" y="3685032"/>
+            <a:off x="1060704" y="3639312"/>
             <a:ext cx="2753258" cy="274320"/>
           </a:xfrm>
           <a:prstGeom prst="rect">
@@ -17253,7 +17253,7 @@
                 </a:solidFill>
                 <a:latin typeface="Segoe UI"/>
               </a:rPr>
-              <a:t>Mouse and keys on the phone</a:t>
+              <a:t>Prompts typed in</a:t>
             </a:r>
           </a:p>
         </p:txBody>
@@ -17266,7 +17266,7 @@
         </p:nvSpPr>
         <p:spPr>
           <a:xfrm>
-            <a:off x="822960" y="4123944"/>
+            <a:off x="822960" y="4078224"/>
             <a:ext cx="118872" cy="19050"/>
           </a:xfrm>
           <a:prstGeom prst="rect">
@@ -17310,7 +17310,7 @@
         </p:nvSpPr>
         <p:spPr>
           <a:xfrm>
-            <a:off x="1060704" y="4032504"/>
+            <a:off x="1060704" y="3986784"/>
             <a:ext cx="2753258" cy="274320"/>
           </a:xfrm>
           <a:prstGeom prst="rect">
@@ -17339,7 +17339,7 @@
                 </a:solidFill>
                 <a:latin typeface="Segoe UI"/>
               </a:rPr>
-              <a:t>No reaching over mid-test</a:t>
+              <a:t>No reaching over</a:t>
             </a:r>
           </a:p>
         </p:txBody>
@@ -17361,11 +17361,11 @@
             </a:avLst>
           </a:prstGeom>
           <a:solidFill>
-            <a:srgbClr val="141612"/>
+            <a:srgbClr val="142E20"/>
           </a:solidFill>
           <a:ln w="9525">
             <a:solidFill>
-              <a:srgbClr val="2A2F27"/>
+              <a:srgbClr val="5FD68A"/>
             </a:solidFill>
           </a:ln>
           <a:effectLst/>
@@ -17426,7 +17426,7 @@
                 </a:solidFill>
                 <a:latin typeface="Consolas"/>
               </a:rPr>
-              <a:t>FILE TRANSFER</a:t>
+              <a:t>SEEING IT</a:t>
             </a:r>
           </a:p>
         </p:txBody>
@@ -17465,7 +17465,7 @@
                 </a:solidFill>
                 <a:latin typeface="Segoe UI"/>
               </a:rPr>
-              <a:t>The 18.6 GB model</a:t>
+              <a:t>Both screens, live</a:t>
             </a:r>
           </a:p>
         </p:txBody>
@@ -17478,7 +17478,7 @@
         </p:nvSpPr>
         <p:spPr>
           <a:xfrm>
-            <a:off x="4600346" y="3429000"/>
+            <a:off x="4600346" y="3383280"/>
             <a:ext cx="118872" cy="19050"/>
           </a:xfrm>
           <a:prstGeom prst="rect">
@@ -17522,7 +17522,7 @@
         </p:nvSpPr>
         <p:spPr>
           <a:xfrm>
-            <a:off x="4838090" y="3337560"/>
+            <a:off x="4838090" y="3291840"/>
             <a:ext cx="2753258" cy="274320"/>
           </a:xfrm>
           <a:prstGeom prst="rect">
@@ -17551,7 +17551,7 @@
                 </a:solidFill>
                 <a:latin typeface="Segoe UI"/>
               </a:rPr>
-              <a:t>Sent through Office Kit</a:t>
+              <a:t>Each phone mirrored</a:t>
             </a:r>
           </a:p>
         </p:txBody>
@@ -17564,7 +17564,7 @@
         </p:nvSpPr>
         <p:spPr>
           <a:xfrm>
-            <a:off x="4600346" y="3776472"/>
+            <a:off x="4600346" y="3730752"/>
             <a:ext cx="118872" cy="19050"/>
           </a:xfrm>
           <a:prstGeom prst="rect">
@@ -17608,7 +17608,7 @@
         </p:nvSpPr>
         <p:spPr>
           <a:xfrm>
-            <a:off x="4838090" y="3685032"/>
+            <a:off x="4838090" y="3639312"/>
             <a:ext cx="2753258" cy="274320"/>
           </a:xfrm>
           <a:prstGeom prst="rect">
@@ -17637,7 +17637,7 @@
                 </a:solidFill>
                 <a:latin typeface="Segoe UI"/>
               </a:rPr>
-              <a:t>Same checksum on the phone</a:t>
+              <a:t>Screenshots to the laptop</a:t>
             </a:r>
           </a:p>
         </p:txBody>
@@ -17650,7 +17650,7 @@
         </p:nvSpPr>
         <p:spPr>
           <a:xfrm>
-            <a:off x="4600346" y="4123944"/>
+            <a:off x="4600346" y="4078224"/>
             <a:ext cx="118872" cy="19050"/>
           </a:xfrm>
           <a:prstGeom prst="rect">
@@ -17694,391 +17694,7 @@
         </p:nvSpPr>
         <p:spPr>
           <a:xfrm>
-            <a:off x="4838090" y="4032504"/>
-            <a:ext cx="2753258" cy="274320"/>
-          </a:xfrm>
-          <a:prstGeom prst="rect">
-            <a:avLst/>
-          </a:prstGeom>
-          <a:noFill/>
-        </p:spPr>
-        <p:txBody>
-          <a:bodyPr wrap="square" anchor="t" lIns="0" rIns="0" tIns="0" bIns="0">
-            <a:spAutoFit/>
-          </a:bodyPr>
-          <a:lstStyle/>
-          <a:p>
-            <a:pPr algn="l">
-              <a:lnSpc>
-                <a:spcPct val="115000"/>
-              </a:lnSpc>
-              <a:spcAft>
-                <a:spcPts val="600"/>
-              </a:spcAft>
-            </a:pPr>
-            <a:r>
-              <a:rPr sz="1400" b="0">
-                <a:solidFill>
-                  <a:srgbClr val="F0EFE9"/>
-                </a:solidFill>
-                <a:latin typeface="Segoe UI"/>
-              </a:rPr>
-              <a:t>Once per phone, then kept</a:t>
-            </a:r>
-          </a:p>
-        </p:txBody>
-      </p:sp>
-      <p:sp>
-        <p:nvSpPr>
-          <p:cNvPr id="35" name="Rounded Rectangle 34"/>
-          <p:cNvSpPr/>
-          <p:nvPr/>
-        </p:nvSpPr>
-        <p:spPr>
-          <a:xfrm>
-            <a:off x="8121700" y="2377440"/>
-            <a:ext cx="3503066" cy="2011680"/>
-          </a:xfrm>
-          <a:prstGeom prst="roundRect">
-            <a:avLst>
-              <a:gd name="adj" fmla="val 4000"/>
-            </a:avLst>
-          </a:prstGeom>
-          <a:solidFill>
-            <a:srgbClr val="141612"/>
-          </a:solidFill>
-          <a:ln w="9525">
-            <a:solidFill>
-              <a:srgbClr val="2A2F27"/>
-            </a:solidFill>
-          </a:ln>
-          <a:effectLst/>
-        </p:spPr>
-        <p:style>
-          <a:lnRef idx="1">
-            <a:schemeClr val="accent1"/>
-          </a:lnRef>
-          <a:fillRef idx="3">
-            <a:schemeClr val="accent1"/>
-          </a:fillRef>
-          <a:effectRef idx="2">
-            <a:schemeClr val="accent1"/>
-          </a:effectRef>
-          <a:fontRef idx="minor">
-            <a:schemeClr val="lt1"/>
-          </a:fontRef>
-        </p:style>
-        <p:txBody>
-          <a:bodyPr rtlCol="0" anchor="ctr"/>
-          <a:lstStyle/>
-          <a:p>
-            <a:pPr algn="ctr"/>
-          </a:p>
-        </p:txBody>
-      </p:sp>
-      <p:sp>
-        <p:nvSpPr>
-          <p:cNvPr id="36" name="TextBox 35"/>
-          <p:cNvSpPr txBox="1"/>
-          <p:nvPr/>
-        </p:nvSpPr>
-        <p:spPr>
-          <a:xfrm>
-            <a:off x="8377732" y="2578608"/>
-            <a:ext cx="2991002" cy="274320"/>
-          </a:xfrm>
-          <a:prstGeom prst="rect">
-            <a:avLst/>
-          </a:prstGeom>
-          <a:noFill/>
-        </p:spPr>
-        <p:txBody>
-          <a:bodyPr wrap="square" anchor="t" lIns="0" rIns="0" tIns="0" bIns="0">
-            <a:spAutoFit/>
-          </a:bodyPr>
-          <a:lstStyle/>
-          <a:p>
-            <a:pPr algn="l">
-              <a:spcAft>
-                <a:spcPts val="600"/>
-              </a:spcAft>
-            </a:pPr>
-            <a:r>
-              <a:rPr sz="1100" b="0">
-                <a:solidFill>
-                  <a:srgbClr val="5FD68A"/>
-                </a:solidFill>
-                <a:latin typeface="Consolas"/>
-              </a:rPr>
-              <a:t>TESTING</a:t>
-            </a:r>
-          </a:p>
-        </p:txBody>
-      </p:sp>
-      <p:sp>
-        <p:nvSpPr>
-          <p:cNvPr id="37" name="TextBox 36"/>
-          <p:cNvSpPr txBox="1"/>
-          <p:nvPr/>
-        </p:nvSpPr>
-        <p:spPr>
-          <a:xfrm>
-            <a:off x="8377732" y="2852928"/>
-            <a:ext cx="2991002" cy="365760"/>
-          </a:xfrm>
-          <a:prstGeom prst="rect">
-            <a:avLst/>
-          </a:prstGeom>
-          <a:noFill/>
-        </p:spPr>
-        <p:txBody>
-          <a:bodyPr wrap="square" anchor="t" lIns="0" rIns="0" tIns="0" bIns="0">
-            <a:spAutoFit/>
-          </a:bodyPr>
-          <a:lstStyle/>
-          <a:p>
-            <a:pPr algn="l">
-              <a:spcAft>
-                <a:spcPts val="600"/>
-              </a:spcAft>
-            </a:pPr>
-            <a:r>
-              <a:rPr sz="1800" b="1">
-                <a:solidFill>
-                  <a:srgbClr val="F0EFE9"/>
-                </a:solidFill>
-                <a:latin typeface="Segoe UI"/>
-              </a:rPr>
-              <a:t>Every screen, remotely</a:t>
-            </a:r>
-          </a:p>
-        </p:txBody>
-      </p:sp>
-      <p:sp>
-        <p:nvSpPr>
-          <p:cNvPr id="38" name="Rectangle 37"/>
-          <p:cNvSpPr/>
-          <p:nvPr/>
-        </p:nvSpPr>
-        <p:spPr>
-          <a:xfrm>
-            <a:off x="8377732" y="3429000"/>
-            <a:ext cx="118872" cy="19050"/>
-          </a:xfrm>
-          <a:prstGeom prst="rect">
-            <a:avLst/>
-          </a:prstGeom>
-          <a:solidFill>
-            <a:srgbClr val="5FD68A"/>
-          </a:solidFill>
-          <a:ln>
-            <a:noFill/>
-          </a:ln>
-          <a:effectLst/>
-        </p:spPr>
-        <p:style>
-          <a:lnRef idx="1">
-            <a:schemeClr val="accent1"/>
-          </a:lnRef>
-          <a:fillRef idx="3">
-            <a:schemeClr val="accent1"/>
-          </a:fillRef>
-          <a:effectRef idx="2">
-            <a:schemeClr val="accent1"/>
-          </a:effectRef>
-          <a:fontRef idx="minor">
-            <a:schemeClr val="lt1"/>
-          </a:fontRef>
-        </p:style>
-        <p:txBody>
-          <a:bodyPr rtlCol="0" anchor="ctr"/>
-          <a:lstStyle/>
-          <a:p>
-            <a:pPr algn="ctr"/>
-          </a:p>
-        </p:txBody>
-      </p:sp>
-      <p:sp>
-        <p:nvSpPr>
-          <p:cNvPr id="39" name="TextBox 38"/>
-          <p:cNvSpPr txBox="1"/>
-          <p:nvPr/>
-        </p:nvSpPr>
-        <p:spPr>
-          <a:xfrm>
-            <a:off x="8615476" y="3337560"/>
-            <a:ext cx="2753258" cy="274320"/>
-          </a:xfrm>
-          <a:prstGeom prst="rect">
-            <a:avLst/>
-          </a:prstGeom>
-          <a:noFill/>
-        </p:spPr>
-        <p:txBody>
-          <a:bodyPr wrap="square" anchor="t" lIns="0" rIns="0" tIns="0" bIns="0">
-            <a:spAutoFit/>
-          </a:bodyPr>
-          <a:lstStyle/>
-          <a:p>
-            <a:pPr algn="l">
-              <a:lnSpc>
-                <a:spcPct val="115000"/>
-              </a:lnSpc>
-              <a:spcAft>
-                <a:spcPts val="600"/>
-              </a:spcAft>
-            </a:pPr>
-            <a:r>
-              <a:rPr sz="1400" b="0">
-                <a:solidFill>
-                  <a:srgbClr val="F0EFE9"/>
-                </a:solidFill>
-                <a:latin typeface="Segoe UI"/>
-              </a:rPr>
-              <a:t>Scan to join, Helper screen</a:t>
-            </a:r>
-          </a:p>
-        </p:txBody>
-      </p:sp>
-      <p:sp>
-        <p:nvSpPr>
-          <p:cNvPr id="40" name="Rectangle 39"/>
-          <p:cNvSpPr/>
-          <p:nvPr/>
-        </p:nvSpPr>
-        <p:spPr>
-          <a:xfrm>
-            <a:off x="8377732" y="3776472"/>
-            <a:ext cx="118872" cy="19050"/>
-          </a:xfrm>
-          <a:prstGeom prst="rect">
-            <a:avLst/>
-          </a:prstGeom>
-          <a:solidFill>
-            <a:srgbClr val="5FD68A"/>
-          </a:solidFill>
-          <a:ln>
-            <a:noFill/>
-          </a:ln>
-          <a:effectLst/>
-        </p:spPr>
-        <p:style>
-          <a:lnRef idx="1">
-            <a:schemeClr val="accent1"/>
-          </a:lnRef>
-          <a:fillRef idx="3">
-            <a:schemeClr val="accent1"/>
-          </a:fillRef>
-          <a:effectRef idx="2">
-            <a:schemeClr val="accent1"/>
-          </a:effectRef>
-          <a:fontRef idx="minor">
-            <a:schemeClr val="lt1"/>
-          </a:fontRef>
-        </p:style>
-        <p:txBody>
-          <a:bodyPr rtlCol="0" anchor="ctr"/>
-          <a:lstStyle/>
-          <a:p>
-            <a:pPr algn="ctr"/>
-          </a:p>
-        </p:txBody>
-      </p:sp>
-      <p:sp>
-        <p:nvSpPr>
-          <p:cNvPr id="41" name="TextBox 40"/>
-          <p:cNvSpPr txBox="1"/>
-          <p:nvPr/>
-        </p:nvSpPr>
-        <p:spPr>
-          <a:xfrm>
-            <a:off x="8615476" y="3685032"/>
-            <a:ext cx="2753258" cy="274320"/>
-          </a:xfrm>
-          <a:prstGeom prst="rect">
-            <a:avLst/>
-          </a:prstGeom>
-          <a:noFill/>
-        </p:spPr>
-        <p:txBody>
-          <a:bodyPr wrap="square" anchor="t" lIns="0" rIns="0" tIns="0" bIns="0">
-            <a:spAutoFit/>
-          </a:bodyPr>
-          <a:lstStyle/>
-          <a:p>
-            <a:pPr algn="l">
-              <a:lnSpc>
-                <a:spcPct val="115000"/>
-              </a:lnSpc>
-              <a:spcAft>
-                <a:spcPts val="600"/>
-              </a:spcAft>
-            </a:pPr>
-            <a:r>
-              <a:rPr sz="1400" b="0">
-                <a:solidFill>
-                  <a:srgbClr val="F0EFE9"/>
-                </a:solidFill>
-                <a:latin typeface="Segoe UI"/>
-              </a:rPr>
-              <a:t>Light and dark, Speed card</a:t>
-            </a:r>
-          </a:p>
-        </p:txBody>
-      </p:sp>
-      <p:sp>
-        <p:nvSpPr>
-          <p:cNvPr id="42" name="Rectangle 41"/>
-          <p:cNvSpPr/>
-          <p:nvPr/>
-        </p:nvSpPr>
-        <p:spPr>
-          <a:xfrm>
-            <a:off x="8377732" y="4123944"/>
-            <a:ext cx="118872" cy="19050"/>
-          </a:xfrm>
-          <a:prstGeom prst="rect">
-            <a:avLst/>
-          </a:prstGeom>
-          <a:solidFill>
-            <a:srgbClr val="5FD68A"/>
-          </a:solidFill>
-          <a:ln>
-            <a:noFill/>
-          </a:ln>
-          <a:effectLst/>
-        </p:spPr>
-        <p:style>
-          <a:lnRef idx="1">
-            <a:schemeClr val="accent1"/>
-          </a:lnRef>
-          <a:fillRef idx="3">
-            <a:schemeClr val="accent1"/>
-          </a:fillRef>
-          <a:effectRef idx="2">
-            <a:schemeClr val="accent1"/>
-          </a:effectRef>
-          <a:fontRef idx="minor">
-            <a:schemeClr val="lt1"/>
-          </a:fontRef>
-        </p:style>
-        <p:txBody>
-          <a:bodyPr rtlCol="0" anchor="ctr"/>
-          <a:lstStyle/>
-          <a:p>
-            <a:pPr algn="ctr"/>
-          </a:p>
-        </p:txBody>
-      </p:sp>
-      <p:sp>
-        <p:nvSpPr>
-          <p:cNvPr id="43" name="TextBox 42"/>
-          <p:cNvSpPr txBox="1"/>
-          <p:nvPr/>
-        </p:nvSpPr>
-        <p:spPr>
-          <a:xfrm>
-            <a:off x="8615476" y="4032504"/>
+            <a:off x="4838090" y="3986784"/>
             <a:ext cx="2753258" cy="274320"/>
           </a:xfrm>
           <a:prstGeom prst="rect">
@@ -18114,14 +17730,14 @@
       </p:sp>
       <p:sp>
         <p:nvSpPr>
-          <p:cNvPr id="44" name="Rounded Rectangle 43"/>
-          <p:cNvSpPr/>
-          <p:nvPr/>
-        </p:nvSpPr>
-        <p:spPr>
-          <a:xfrm>
-            <a:off x="566928" y="4572000"/>
-            <a:ext cx="11057839" cy="1417320"/>
+          <p:cNvPr id="35" name="Rounded Rectangle 34"/>
+          <p:cNvSpPr/>
+          <p:nvPr/>
+        </p:nvSpPr>
+        <p:spPr>
+          <a:xfrm>
+            <a:off x="8121700" y="2377440"/>
+            <a:ext cx="3503066" cy="2011680"/>
           </a:xfrm>
           <a:prstGeom prst="roundRect">
             <a:avLst>
@@ -18162,6 +17778,390 @@
       </p:sp>
       <p:sp>
         <p:nvSpPr>
+          <p:cNvPr id="36" name="TextBox 35"/>
+          <p:cNvSpPr txBox="1"/>
+          <p:nvPr/>
+        </p:nvSpPr>
+        <p:spPr>
+          <a:xfrm>
+            <a:off x="8377732" y="2578608"/>
+            <a:ext cx="2991002" cy="274320"/>
+          </a:xfrm>
+          <a:prstGeom prst="rect">
+            <a:avLst/>
+          </a:prstGeom>
+          <a:noFill/>
+        </p:spPr>
+        <p:txBody>
+          <a:bodyPr wrap="square" anchor="t" lIns="0" rIns="0" tIns="0" bIns="0">
+            <a:spAutoFit/>
+          </a:bodyPr>
+          <a:lstStyle/>
+          <a:p>
+            <a:pPr algn="l">
+              <a:spcAft>
+                <a:spcPts val="600"/>
+              </a:spcAft>
+            </a:pPr>
+            <a:r>
+              <a:rPr sz="1100" b="0">
+                <a:solidFill>
+                  <a:srgbClr val="5FD68A"/>
+                </a:solidFill>
+                <a:latin typeface="Consolas"/>
+              </a:rPr>
+              <a:t>FILES</a:t>
+            </a:r>
+          </a:p>
+        </p:txBody>
+      </p:sp>
+      <p:sp>
+        <p:nvSpPr>
+          <p:cNvPr id="37" name="TextBox 36"/>
+          <p:cNvSpPr txBox="1"/>
+          <p:nvPr/>
+        </p:nvSpPr>
+        <p:spPr>
+          <a:xfrm>
+            <a:off x="8377732" y="2852928"/>
+            <a:ext cx="2991002" cy="365760"/>
+          </a:xfrm>
+          <a:prstGeom prst="rect">
+            <a:avLst/>
+          </a:prstGeom>
+          <a:noFill/>
+        </p:spPr>
+        <p:txBody>
+          <a:bodyPr wrap="square" anchor="t" lIns="0" rIns="0" tIns="0" bIns="0">
+            <a:spAutoFit/>
+          </a:bodyPr>
+          <a:lstStyle/>
+          <a:p>
+            <a:pPr algn="l">
+              <a:spcAft>
+                <a:spcPts val="600"/>
+              </a:spcAft>
+            </a:pPr>
+            <a:r>
+              <a:rPr sz="1800" b="1">
+                <a:solidFill>
+                  <a:srgbClr val="F0EFE9"/>
+                </a:solidFill>
+                <a:latin typeface="Segoe UI"/>
+              </a:rPr>
+              <a:t>The model, sent over</a:t>
+            </a:r>
+          </a:p>
+        </p:txBody>
+      </p:sp>
+      <p:sp>
+        <p:nvSpPr>
+          <p:cNvPr id="38" name="Rectangle 37"/>
+          <p:cNvSpPr/>
+          <p:nvPr/>
+        </p:nvSpPr>
+        <p:spPr>
+          <a:xfrm>
+            <a:off x="8377732" y="3383280"/>
+            <a:ext cx="118872" cy="19050"/>
+          </a:xfrm>
+          <a:prstGeom prst="rect">
+            <a:avLst/>
+          </a:prstGeom>
+          <a:solidFill>
+            <a:srgbClr val="5FD68A"/>
+          </a:solidFill>
+          <a:ln>
+            <a:noFill/>
+          </a:ln>
+          <a:effectLst/>
+        </p:spPr>
+        <p:style>
+          <a:lnRef idx="1">
+            <a:schemeClr val="accent1"/>
+          </a:lnRef>
+          <a:fillRef idx="3">
+            <a:schemeClr val="accent1"/>
+          </a:fillRef>
+          <a:effectRef idx="2">
+            <a:schemeClr val="accent1"/>
+          </a:effectRef>
+          <a:fontRef idx="minor">
+            <a:schemeClr val="lt1"/>
+          </a:fontRef>
+        </p:style>
+        <p:txBody>
+          <a:bodyPr rtlCol="0" anchor="ctr"/>
+          <a:lstStyle/>
+          <a:p>
+            <a:pPr algn="ctr"/>
+          </a:p>
+        </p:txBody>
+      </p:sp>
+      <p:sp>
+        <p:nvSpPr>
+          <p:cNvPr id="39" name="TextBox 38"/>
+          <p:cNvSpPr txBox="1"/>
+          <p:nvPr/>
+        </p:nvSpPr>
+        <p:spPr>
+          <a:xfrm>
+            <a:off x="8615476" y="3291840"/>
+            <a:ext cx="2753258" cy="274320"/>
+          </a:xfrm>
+          <a:prstGeom prst="rect">
+            <a:avLst/>
+          </a:prstGeom>
+          <a:noFill/>
+        </p:spPr>
+        <p:txBody>
+          <a:bodyPr wrap="square" anchor="t" lIns="0" rIns="0" tIns="0" bIns="0">
+            <a:spAutoFit/>
+          </a:bodyPr>
+          <a:lstStyle/>
+          <a:p>
+            <a:pPr algn="l">
+              <a:lnSpc>
+                <a:spcPct val="115000"/>
+              </a:lnSpc>
+              <a:spcAft>
+                <a:spcPts val="600"/>
+              </a:spcAft>
+            </a:pPr>
+            <a:r>
+              <a:rPr sz="1400" b="0">
+                <a:solidFill>
+                  <a:srgbClr val="F0EFE9"/>
+                </a:solidFill>
+                <a:latin typeface="Segoe UI"/>
+              </a:rPr>
+              <a:t>The 18.6 GB GGUF</a:t>
+            </a:r>
+          </a:p>
+        </p:txBody>
+      </p:sp>
+      <p:sp>
+        <p:nvSpPr>
+          <p:cNvPr id="40" name="Rectangle 39"/>
+          <p:cNvSpPr/>
+          <p:nvPr/>
+        </p:nvSpPr>
+        <p:spPr>
+          <a:xfrm>
+            <a:off x="8377732" y="3730752"/>
+            <a:ext cx="118872" cy="19050"/>
+          </a:xfrm>
+          <a:prstGeom prst="rect">
+            <a:avLst/>
+          </a:prstGeom>
+          <a:solidFill>
+            <a:srgbClr val="5FD68A"/>
+          </a:solidFill>
+          <a:ln>
+            <a:noFill/>
+          </a:ln>
+          <a:effectLst/>
+        </p:spPr>
+        <p:style>
+          <a:lnRef idx="1">
+            <a:schemeClr val="accent1"/>
+          </a:lnRef>
+          <a:fillRef idx="3">
+            <a:schemeClr val="accent1"/>
+          </a:fillRef>
+          <a:effectRef idx="2">
+            <a:schemeClr val="accent1"/>
+          </a:effectRef>
+          <a:fontRef idx="minor">
+            <a:schemeClr val="lt1"/>
+          </a:fontRef>
+        </p:style>
+        <p:txBody>
+          <a:bodyPr rtlCol="0" anchor="ctr"/>
+          <a:lstStyle/>
+          <a:p>
+            <a:pPr algn="ctr"/>
+          </a:p>
+        </p:txBody>
+      </p:sp>
+      <p:sp>
+        <p:nvSpPr>
+          <p:cNvPr id="41" name="TextBox 40"/>
+          <p:cNvSpPr txBox="1"/>
+          <p:nvPr/>
+        </p:nvSpPr>
+        <p:spPr>
+          <a:xfrm>
+            <a:off x="8615476" y="3639312"/>
+            <a:ext cx="2753258" cy="274320"/>
+          </a:xfrm>
+          <a:prstGeom prst="rect">
+            <a:avLst/>
+          </a:prstGeom>
+          <a:noFill/>
+        </p:spPr>
+        <p:txBody>
+          <a:bodyPr wrap="square" anchor="t" lIns="0" rIns="0" tIns="0" bIns="0">
+            <a:spAutoFit/>
+          </a:bodyPr>
+          <a:lstStyle/>
+          <a:p>
+            <a:pPr algn="l">
+              <a:lnSpc>
+                <a:spcPct val="115000"/>
+              </a:lnSpc>
+              <a:spcAft>
+                <a:spcPts val="600"/>
+              </a:spcAft>
+            </a:pPr>
+            <a:r>
+              <a:rPr sz="1400" b="0">
+                <a:solidFill>
+                  <a:srgbClr val="F0EFE9"/>
+                </a:solidFill>
+                <a:latin typeface="Segoe UI"/>
+              </a:rPr>
+              <a:t>Same checksum after</a:t>
+            </a:r>
+          </a:p>
+        </p:txBody>
+      </p:sp>
+      <p:sp>
+        <p:nvSpPr>
+          <p:cNvPr id="42" name="Rectangle 41"/>
+          <p:cNvSpPr/>
+          <p:nvPr/>
+        </p:nvSpPr>
+        <p:spPr>
+          <a:xfrm>
+            <a:off x="8377732" y="4078224"/>
+            <a:ext cx="118872" cy="19050"/>
+          </a:xfrm>
+          <a:prstGeom prst="rect">
+            <a:avLst/>
+          </a:prstGeom>
+          <a:solidFill>
+            <a:srgbClr val="5FD68A"/>
+          </a:solidFill>
+          <a:ln>
+            <a:noFill/>
+          </a:ln>
+          <a:effectLst/>
+        </p:spPr>
+        <p:style>
+          <a:lnRef idx="1">
+            <a:schemeClr val="accent1"/>
+          </a:lnRef>
+          <a:fillRef idx="3">
+            <a:schemeClr val="accent1"/>
+          </a:fillRef>
+          <a:effectRef idx="2">
+            <a:schemeClr val="accent1"/>
+          </a:effectRef>
+          <a:fontRef idx="minor">
+            <a:schemeClr val="lt1"/>
+          </a:fontRef>
+        </p:style>
+        <p:txBody>
+          <a:bodyPr rtlCol="0" anchor="ctr"/>
+          <a:lstStyle/>
+          <a:p>
+            <a:pPr algn="ctr"/>
+          </a:p>
+        </p:txBody>
+      </p:sp>
+      <p:sp>
+        <p:nvSpPr>
+          <p:cNvPr id="43" name="TextBox 42"/>
+          <p:cNvSpPr txBox="1"/>
+          <p:nvPr/>
+        </p:nvSpPr>
+        <p:spPr>
+          <a:xfrm>
+            <a:off x="8615476" y="3986784"/>
+            <a:ext cx="2753258" cy="274320"/>
+          </a:xfrm>
+          <a:prstGeom prst="rect">
+            <a:avLst/>
+          </a:prstGeom>
+          <a:noFill/>
+        </p:spPr>
+        <p:txBody>
+          <a:bodyPr wrap="square" anchor="t" lIns="0" rIns="0" tIns="0" bIns="0">
+            <a:spAutoFit/>
+          </a:bodyPr>
+          <a:lstStyle/>
+          <a:p>
+            <a:pPr algn="l">
+              <a:lnSpc>
+                <a:spcPct val="115000"/>
+              </a:lnSpc>
+              <a:spcAft>
+                <a:spcPts val="600"/>
+              </a:spcAft>
+            </a:pPr>
+            <a:r>
+              <a:rPr sz="1400" b="0">
+                <a:solidFill>
+                  <a:srgbClr val="F0EFE9"/>
+                </a:solidFill>
+                <a:latin typeface="Segoe UI"/>
+              </a:rPr>
+              <a:t>Once per phone</a:t>
+            </a:r>
+          </a:p>
+        </p:txBody>
+      </p:sp>
+      <p:sp>
+        <p:nvSpPr>
+          <p:cNvPr id="44" name="Rounded Rectangle 43"/>
+          <p:cNvSpPr/>
+          <p:nvPr/>
+        </p:nvSpPr>
+        <p:spPr>
+          <a:xfrm>
+            <a:off x="566928" y="4572000"/>
+            <a:ext cx="11057839" cy="1417320"/>
+          </a:xfrm>
+          <a:prstGeom prst="roundRect">
+            <a:avLst>
+              <a:gd name="adj" fmla="val 4000"/>
+            </a:avLst>
+          </a:prstGeom>
+          <a:solidFill>
+            <a:srgbClr val="141612"/>
+          </a:solidFill>
+          <a:ln w="9525">
+            <a:solidFill>
+              <a:srgbClr val="2A2F27"/>
+            </a:solidFill>
+          </a:ln>
+          <a:effectLst/>
+        </p:spPr>
+        <p:style>
+          <a:lnRef idx="1">
+            <a:schemeClr val="accent1"/>
+          </a:lnRef>
+          <a:fillRef idx="3">
+            <a:schemeClr val="accent1"/>
+          </a:fillRef>
+          <a:effectRef idx="2">
+            <a:schemeClr val="accent1"/>
+          </a:effectRef>
+          <a:fontRef idx="minor">
+            <a:schemeClr val="lt1"/>
+          </a:fontRef>
+        </p:style>
+        <p:txBody>
+          <a:bodyPr rtlCol="0" anchor="ctr"/>
+          <a:lstStyle/>
+          <a:p>
+            <a:pPr algn="ctr"/>
+          </a:p>
+        </p:txBody>
+      </p:sp>
+      <p:sp>
+        <p:nvSpPr>
           <p:cNvPr id="45" name="TextBox 44"/>
           <p:cNvSpPr txBox="1"/>
           <p:nvPr/>
@@ -18169,7 +18169,7 @@
         <p:spPr>
           <a:xfrm>
             <a:off x="841248" y="4754880"/>
-            <a:ext cx="2560320" cy="274320"/>
+            <a:ext cx="3840480" cy="274320"/>
           </a:xfrm>
           <a:prstGeom prst="rect">
             <a:avLst/>
@@ -18194,7 +18194,7 @@
                 </a:solidFill>
                 <a:latin typeface="Consolas"/>
               </a:rPr>
-              <a:t>MOVING 18.6 GB</a:t>
+              <a:t>TESTING A PHONE</a:t>
             </a:r>
           </a:p>
         </p:txBody>
@@ -18207,8 +18207,8 @@
         </p:nvSpPr>
         <p:spPr>
           <a:xfrm>
-            <a:off x="3310128" y="4754880"/>
-            <a:ext cx="2560320" cy="274320"/>
+            <a:off x="3584448" y="4754880"/>
+            <a:ext cx="3840480" cy="274320"/>
           </a:xfrm>
           <a:prstGeom prst="rect">
             <a:avLst/>
@@ -18246,8 +18246,8 @@
         </p:nvSpPr>
         <p:spPr>
           <a:xfrm>
-            <a:off x="6053328" y="4754880"/>
-            <a:ext cx="2560320" cy="274320"/>
+            <a:off x="7516368" y="4754880"/>
+            <a:ext cx="3840480" cy="274320"/>
           </a:xfrm>
           <a:prstGeom prst="rect">
             <a:avLst/>
@@ -18272,7 +18272,7 @@
                 </a:solidFill>
                 <a:latin typeface="Consolas"/>
               </a:rPr>
-              <a:t>ADB PUSH</a:t>
+              <a:t>ADB</a:t>
             </a:r>
           </a:p>
         </p:txBody>
@@ -18285,47 +18285,8 @@
         </p:nvSpPr>
         <p:spPr>
           <a:xfrm>
-            <a:off x="8796528" y="4754880"/>
-            <a:ext cx="2560320" cy="274320"/>
-          </a:xfrm>
-          <a:prstGeom prst="rect">
-            <a:avLst/>
-          </a:prstGeom>
-          <a:noFill/>
-        </p:spPr>
-        <p:txBody>
-          <a:bodyPr wrap="square" anchor="t" lIns="0" rIns="0" tIns="0" bIns="0">
-            <a:spAutoFit/>
-          </a:bodyPr>
-          <a:lstStyle/>
-          <a:p>
-            <a:pPr algn="l">
-              <a:spcAft>
-                <a:spcPts val="600"/>
-              </a:spcAft>
-            </a:pPr>
-            <a:r>
-              <a:rPr sz="1100" b="0">
-                <a:solidFill>
-                  <a:srgbClr val="5FD68A"/>
-                </a:solidFill>
-                <a:latin typeface="Consolas"/>
-              </a:rPr>
-              <a:t>IN-APP DOWNLOAD</a:t>
-            </a:r>
-          </a:p>
-        </p:txBody>
-      </p:sp>
-      <p:sp>
-        <p:nvSpPr>
-          <p:cNvPr id="49" name="TextBox 48"/>
-          <p:cNvSpPr txBox="1"/>
-          <p:nvPr/>
-        </p:nvSpPr>
-        <p:spPr>
-          <a:xfrm>
             <a:off x="841248" y="5047488"/>
-            <a:ext cx="2560320" cy="274320"/>
+            <a:ext cx="2651760" cy="274320"/>
           </a:xfrm>
           <a:prstGeom prst="rect">
             <a:avLst/>
@@ -18350,99 +18311,21 @@
                 </a:solidFill>
                 <a:latin typeface="Segoe UI"/>
               </a:rPr>
-              <a:t>Time</a:t>
+              <a:t>See the screen</a:t>
             </a:r>
           </a:p>
         </p:txBody>
       </p:sp>
       <p:sp>
         <p:nvSpPr>
-          <p:cNvPr id="50" name="TextBox 49"/>
+          <p:cNvPr id="49" name="TextBox 48"/>
           <p:cNvSpPr txBox="1"/>
           <p:nvPr/>
         </p:nvSpPr>
         <p:spPr>
           <a:xfrm>
-            <a:off x="3310128" y="5047488"/>
-            <a:ext cx="2560320" cy="274320"/>
-          </a:xfrm>
-          <a:prstGeom prst="rect">
-            <a:avLst/>
-          </a:prstGeom>
-          <a:noFill/>
-        </p:spPr>
-        <p:txBody>
-          <a:bodyPr wrap="square" anchor="t" lIns="0" rIns="0" tIns="0" bIns="0">
-            <a:spAutoFit/>
-          </a:bodyPr>
-          <a:lstStyle/>
-          <a:p>
-            <a:pPr algn="l">
-              <a:spcAft>
-                <a:spcPts val="600"/>
-              </a:spcAft>
-            </a:pPr>
-            <a:r>
-              <a:rPr sz="1300" b="0">
-                <a:solidFill>
-                  <a:srgbClr val="E8B84B"/>
-                </a:solidFill>
-                <a:latin typeface="Consolas"/>
-              </a:rPr>
-              <a:t>[fill in]</a:t>
-            </a:r>
-          </a:p>
-        </p:txBody>
-      </p:sp>
-      <p:sp>
-        <p:nvSpPr>
-          <p:cNvPr id="51" name="TextBox 50"/>
-          <p:cNvSpPr txBox="1"/>
-          <p:nvPr/>
-        </p:nvSpPr>
-        <p:spPr>
-          <a:xfrm>
-            <a:off x="6053328" y="5047488"/>
-            <a:ext cx="2560320" cy="274320"/>
-          </a:xfrm>
-          <a:prstGeom prst="rect">
-            <a:avLst/>
-          </a:prstGeom>
-          <a:noFill/>
-        </p:spPr>
-        <p:txBody>
-          <a:bodyPr wrap="square" anchor="t" lIns="0" rIns="0" tIns="0" bIns="0">
-            <a:spAutoFit/>
-          </a:bodyPr>
-          <a:lstStyle/>
-          <a:p>
-            <a:pPr algn="l">
-              <a:spcAft>
-                <a:spcPts val="600"/>
-              </a:spcAft>
-            </a:pPr>
-            <a:r>
-              <a:rPr sz="1300" b="0">
-                <a:solidFill>
-                  <a:srgbClr val="E8B84B"/>
-                </a:solidFill>
-                <a:latin typeface="Consolas"/>
-              </a:rPr>
-              <a:t>[fill in]</a:t>
-            </a:r>
-          </a:p>
-        </p:txBody>
-      </p:sp>
-      <p:sp>
-        <p:nvSpPr>
-          <p:cNvPr id="52" name="TextBox 51"/>
-          <p:cNvSpPr txBox="1"/>
-          <p:nvPr/>
-        </p:nvSpPr>
-        <p:spPr>
-          <a:xfrm>
-            <a:off x="8796528" y="5047488"/>
-            <a:ext cx="2560320" cy="274320"/>
+            <a:off x="3584448" y="5047488"/>
+            <a:ext cx="3840480" cy="274320"/>
           </a:xfrm>
           <a:prstGeom prst="rect">
             <a:avLst/>
@@ -18465,23 +18348,62 @@
                 <a:solidFill>
                   <a:srgbClr val="F0EFE9"/>
                 </a:solidFill>
-                <a:latin typeface="Consolas"/>
+                <a:latin typeface="Segoe UI"/>
               </a:rPr>
-              <a:t>~13 min · 24 MB/s</a:t>
+              <a:t>a live mirror, always on</a:t>
             </a:r>
           </a:p>
         </p:txBody>
       </p:sp>
       <p:sp>
         <p:nvSpPr>
-          <p:cNvPr id="53" name="TextBox 52"/>
+          <p:cNvPr id="50" name="TextBox 49"/>
           <p:cNvSpPr txBox="1"/>
           <p:nvPr/>
         </p:nvSpPr>
         <p:spPr>
           <a:xfrm>
+            <a:off x="7516368" y="5047488"/>
+            <a:ext cx="3840480" cy="274320"/>
+          </a:xfrm>
+          <a:prstGeom prst="rect">
+            <a:avLst/>
+          </a:prstGeom>
+          <a:noFill/>
+        </p:spPr>
+        <p:txBody>
+          <a:bodyPr wrap="square" anchor="t" lIns="0" rIns="0" tIns="0" bIns="0">
+            <a:spAutoFit/>
+          </a:bodyPr>
+          <a:lstStyle/>
+          <a:p>
+            <a:pPr algn="l">
+              <a:spcAft>
+                <a:spcPts val="600"/>
+              </a:spcAft>
+            </a:pPr>
+            <a:r>
+              <a:rPr sz="1300" b="0">
+                <a:solidFill>
+                  <a:srgbClr val="C2C6BC"/>
+                </a:solidFill>
+                <a:latin typeface="Segoe UI"/>
+              </a:rPr>
+              <a:t>one screenshot per command</a:t>
+            </a:r>
+          </a:p>
+        </p:txBody>
+      </p:sp>
+      <p:sp>
+        <p:nvSpPr>
+          <p:cNvPr id="51" name="TextBox 50"/>
+          <p:cNvSpPr txBox="1"/>
+          <p:nvPr/>
+        </p:nvSpPr>
+        <p:spPr>
+          <a:xfrm>
             <a:off x="841248" y="5340096"/>
-            <a:ext cx="2560320" cy="274320"/>
+            <a:ext cx="2651760" cy="274320"/>
           </a:xfrm>
           <a:prstGeom prst="rect">
             <a:avLst/>
@@ -18506,21 +18428,60 @@
                 </a:solidFill>
                 <a:latin typeface="Segoe UI"/>
               </a:rPr>
-              <a:t>Needs</a:t>
+              <a:t>Drive it</a:t>
             </a:r>
           </a:p>
         </p:txBody>
       </p:sp>
       <p:sp>
         <p:nvSpPr>
-          <p:cNvPr id="54" name="TextBox 53"/>
+          <p:cNvPr id="52" name="TextBox 51"/>
           <p:cNvSpPr txBox="1"/>
           <p:nvPr/>
         </p:nvSpPr>
         <p:spPr>
           <a:xfrm>
-            <a:off x="3310128" y="5340096"/>
-            <a:ext cx="2560320" cy="274320"/>
+            <a:off x="3584448" y="5340096"/>
+            <a:ext cx="3840480" cy="274320"/>
+          </a:xfrm>
+          <a:prstGeom prst="rect">
+            <a:avLst/>
+          </a:prstGeom>
+          <a:noFill/>
+        </p:spPr>
+        <p:txBody>
+          <a:bodyPr wrap="square" anchor="t" lIns="0" rIns="0" tIns="0" bIns="0">
+            <a:spAutoFit/>
+          </a:bodyPr>
+          <a:lstStyle/>
+          <a:p>
+            <a:pPr algn="l">
+              <a:spcAft>
+                <a:spcPts val="600"/>
+              </a:spcAft>
+            </a:pPr>
+            <a:r>
+              <a:rPr sz="1300" b="0">
+                <a:solidFill>
+                  <a:srgbClr val="F0EFE9"/>
+                </a:solidFill>
+                <a:latin typeface="Segoe UI"/>
+              </a:rPr>
+              <a:t>mouse and keyboard on the mirror</a:t>
+            </a:r>
+          </a:p>
+        </p:txBody>
+      </p:sp>
+      <p:sp>
+        <p:nvSpPr>
+          <p:cNvPr id="53" name="TextBox 52"/>
+          <p:cNvSpPr txBox="1"/>
+          <p:nvPr/>
+        </p:nvSpPr>
+        <p:spPr>
+          <a:xfrm>
+            <a:off x="7516368" y="5340096"/>
+            <a:ext cx="3840480" cy="274320"/>
           </a:xfrm>
           <a:prstGeom prst="rect">
             <a:avLst/>
@@ -18545,99 +18506,21 @@
                 </a:solidFill>
                 <a:latin typeface="Segoe UI"/>
               </a:rPr>
-              <a:t>Office Kit on both</a:t>
+              <a:t>one command per tap, by x and y</a:t>
             </a:r>
           </a:p>
         </p:txBody>
       </p:sp>
       <p:sp>
         <p:nvSpPr>
-          <p:cNvPr id="55" name="TextBox 54"/>
+          <p:cNvPr id="54" name="TextBox 53"/>
           <p:cNvSpPr txBox="1"/>
           <p:nvPr/>
         </p:nvSpPr>
         <p:spPr>
           <a:xfrm>
-            <a:off x="6053328" y="5340096"/>
-            <a:ext cx="2560320" cy="274320"/>
-          </a:xfrm>
-          <a:prstGeom prst="rect">
-            <a:avLst/>
-          </a:prstGeom>
-          <a:noFill/>
-        </p:spPr>
-        <p:txBody>
-          <a:bodyPr wrap="square" anchor="t" lIns="0" rIns="0" tIns="0" bIns="0">
-            <a:spAutoFit/>
-          </a:bodyPr>
-          <a:lstStyle/>
-          <a:p>
-            <a:pPr algn="l">
-              <a:spcAft>
-                <a:spcPts val="600"/>
-              </a:spcAft>
-            </a:pPr>
-            <a:r>
-              <a:rPr sz="1300" b="0">
-                <a:solidFill>
-                  <a:srgbClr val="C2C6BC"/>
-                </a:solidFill>
-                <a:latin typeface="Segoe UI"/>
-              </a:rPr>
-              <a:t>USB debugging</a:t>
-            </a:r>
-          </a:p>
-        </p:txBody>
-      </p:sp>
-      <p:sp>
-        <p:nvSpPr>
-          <p:cNvPr id="56" name="TextBox 55"/>
-          <p:cNvSpPr txBox="1"/>
-          <p:nvPr/>
-        </p:nvSpPr>
-        <p:spPr>
-          <a:xfrm>
-            <a:off x="8796528" y="5340096"/>
-            <a:ext cx="2560320" cy="274320"/>
-          </a:xfrm>
-          <a:prstGeom prst="rect">
-            <a:avLst/>
-          </a:prstGeom>
-          <a:noFill/>
-        </p:spPr>
-        <p:txBody>
-          <a:bodyPr wrap="square" anchor="t" lIns="0" rIns="0" tIns="0" bIns="0">
-            <a:spAutoFit/>
-          </a:bodyPr>
-          <a:lstStyle/>
-          <a:p>
-            <a:pPr algn="l">
-              <a:spcAft>
-                <a:spcPts val="600"/>
-              </a:spcAft>
-            </a:pPr>
-            <a:r>
-              <a:rPr sz="1300" b="0">
-                <a:solidFill>
-                  <a:srgbClr val="C2C6BC"/>
-                </a:solidFill>
-                <a:latin typeface="Segoe UI"/>
-              </a:rPr>
-              <a:t>the app, same network</a:t>
-            </a:r>
-          </a:p>
-        </p:txBody>
-      </p:sp>
-      <p:sp>
-        <p:nvSpPr>
-          <p:cNvPr id="57" name="TextBox 56"/>
-          <p:cNvSpPr txBox="1"/>
-          <p:nvPr/>
-        </p:nvSpPr>
-        <p:spPr>
-          <a:xfrm>
             <a:off x="841248" y="5632704"/>
-            <a:ext cx="2560320" cy="274320"/>
+            <a:ext cx="2651760" cy="274320"/>
           </a:xfrm>
           <a:prstGeom prst="rect">
             <a:avLst/>
@@ -18669,14 +18552,53 @@
       </p:sp>
       <p:sp>
         <p:nvSpPr>
-          <p:cNvPr id="58" name="TextBox 57"/>
+          <p:cNvPr id="55" name="TextBox 54"/>
           <p:cNvSpPr txBox="1"/>
           <p:nvPr/>
         </p:nvSpPr>
         <p:spPr>
           <a:xfrm>
-            <a:off x="3310128" y="5632704"/>
-            <a:ext cx="2560320" cy="274320"/>
+            <a:off x="3584448" y="5632704"/>
+            <a:ext cx="3840480" cy="274320"/>
+          </a:xfrm>
+          <a:prstGeom prst="rect">
+            <a:avLst/>
+          </a:prstGeom>
+          <a:noFill/>
+        </p:spPr>
+        <p:txBody>
+          <a:bodyPr wrap="square" anchor="t" lIns="0" rIns="0" tIns="0" bIns="0">
+            <a:spAutoFit/>
+          </a:bodyPr>
+          <a:lstStyle/>
+          <a:p>
+            <a:pPr algn="l">
+              <a:spcAft>
+                <a:spcPts val="600"/>
+              </a:spcAft>
+            </a:pPr>
+            <a:r>
+              <a:rPr sz="1300" b="0">
+                <a:solidFill>
+                  <a:srgbClr val="F0EFE9"/>
+                </a:solidFill>
+                <a:latin typeface="Segoe UI"/>
+              </a:rPr>
+              <a:t>testing by hand, the demo</a:t>
+            </a:r>
+          </a:p>
+        </p:txBody>
+      </p:sp>
+      <p:sp>
+        <p:nvSpPr>
+          <p:cNvPr id="56" name="TextBox 55"/>
+          <p:cNvSpPr txBox="1"/>
+          <p:nvPr/>
+        </p:nvSpPr>
+        <p:spPr>
+          <a:xfrm>
+            <a:off x="7516368" y="5632704"/>
+            <a:ext cx="3840480" cy="274320"/>
           </a:xfrm>
           <a:prstGeom prst="rect">
             <a:avLst/>
@@ -18701,92 +18623,14 @@
                 </a:solidFill>
                 <a:latin typeface="Segoe UI"/>
               </a:rPr>
-              <a:t>files, testing by hand</a:t>
+              <a:t>scripted runs: installs, logs, checks</a:t>
             </a:r>
           </a:p>
         </p:txBody>
       </p:sp>
       <p:sp>
         <p:nvSpPr>
-          <p:cNvPr id="59" name="TextBox 58"/>
-          <p:cNvSpPr txBox="1"/>
-          <p:nvPr/>
-        </p:nvSpPr>
-        <p:spPr>
-          <a:xfrm>
-            <a:off x="6053328" y="5632704"/>
-            <a:ext cx="2560320" cy="274320"/>
-          </a:xfrm>
-          <a:prstGeom prst="rect">
-            <a:avLst/>
-          </a:prstGeom>
-          <a:noFill/>
-        </p:spPr>
-        <p:txBody>
-          <a:bodyPr wrap="square" anchor="t" lIns="0" rIns="0" tIns="0" bIns="0">
-            <a:spAutoFit/>
-          </a:bodyPr>
-          <a:lstStyle/>
-          <a:p>
-            <a:pPr algn="l">
-              <a:spcAft>
-                <a:spcPts val="600"/>
-              </a:spcAft>
-            </a:pPr>
-            <a:r>
-              <a:rPr sz="1300" b="0">
-                <a:solidFill>
-                  <a:srgbClr val="C2C6BC"/>
-                </a:solidFill>
-                <a:latin typeface="Segoe UI"/>
-              </a:rPr>
-              <a:t>scripts and logs</a:t>
-            </a:r>
-          </a:p>
-        </p:txBody>
-      </p:sp>
-      <p:sp>
-        <p:nvSpPr>
-          <p:cNvPr id="60" name="TextBox 59"/>
-          <p:cNvSpPr txBox="1"/>
-          <p:nvPr/>
-        </p:nvSpPr>
-        <p:spPr>
-          <a:xfrm>
-            <a:off x="8796528" y="5632704"/>
-            <a:ext cx="2560320" cy="274320"/>
-          </a:xfrm>
-          <a:prstGeom prst="rect">
-            <a:avLst/>
-          </a:prstGeom>
-          <a:noFill/>
-        </p:spPr>
-        <p:txBody>
-          <a:bodyPr wrap="square" anchor="t" lIns="0" rIns="0" tIns="0" bIns="0">
-            <a:spAutoFit/>
-          </a:bodyPr>
-          <a:lstStyle/>
-          <a:p>
-            <a:pPr algn="l">
-              <a:spcAft>
-                <a:spcPts val="600"/>
-              </a:spcAft>
-            </a:pPr>
-            <a:r>
-              <a:rPr sz="1300" b="0">
-                <a:solidFill>
-                  <a:srgbClr val="C2C6BC"/>
-                </a:solidFill>
-                <a:latin typeface="Segoe UI"/>
-              </a:rPr>
-              <a:t>users, no tools</a:t>
-            </a:r>
-          </a:p>
-        </p:txBody>
-      </p:sp>
-      <p:sp>
-        <p:nvSpPr>
-          <p:cNvPr id="61" name="TextBox 60"/>
+          <p:cNvPr id="57" name="TextBox 56"/>
           <p:cNvSpPr txBox="1"/>
           <p:nvPr/>
         </p:nvSpPr>
@@ -18825,7 +18669,7 @@
       </p:sp>
       <p:sp>
         <p:nvSpPr>
-          <p:cNvPr id="62" name="TextBox 61"/>
+          <p:cNvPr id="58" name="TextBox 57"/>
           <p:cNvSpPr txBox="1"/>
           <p:nvPr/>
         </p:nvSpPr>
@@ -18857,7 +18701,7 @@
                 </a:solidFill>
                 <a:latin typeface="Consolas"/>
               </a:rPr>
-              <a:t>in-app measured 26 Sep · the others to be timed</a:t>
+              <a:t>we used both: Office Kit by hand, adb in scripts</a:t>
             </a:r>
           </a:p>
         </p:txBody>
